--- a/assets/docs/PK-Bayes_Presentacion_Clinica_Institucional.pptx
+++ b/assets/docs/PK-Bayes_Presentacion_Clinica_Institucional.pptx
@@ -4679,9 +4679,54 @@
           </a:p>
         </p:txBody>
       </p:sp>
+      <p:sp>
+        <p:nvSpPr>
+          <p:cNvPr id="6" name="Rounded Rectangle 5"/>
+          <p:cNvSpPr/>
+          <p:nvPr/>
+        </p:nvSpPr>
+        <p:spPr>
+          <a:xfrm>
+            <a:off x="6163056" y="1728216"/>
+            <a:ext cx="5321808" cy="4498848"/>
+          </a:xfrm>
+          <a:prstGeom prst="roundRect">
+            <a:avLst/>
+          </a:prstGeom>
+          <a:solidFill>
+            <a:srgbClr val="F1F5F9"/>
+          </a:solidFill>
+          <a:ln w="12700">
+            <a:solidFill>
+              <a:srgbClr val="E2E8F0"/>
+            </a:solidFill>
+          </a:ln>
+        </p:spPr>
+        <p:style>
+          <a:lnRef idx="1">
+            <a:schemeClr val="accent1"/>
+          </a:lnRef>
+          <a:fillRef idx="3">
+            <a:schemeClr val="accent1"/>
+          </a:fillRef>
+          <a:effectRef idx="2">
+            <a:schemeClr val="accent1"/>
+          </a:effectRef>
+          <a:fontRef idx="minor">
+            <a:schemeClr val="lt1"/>
+          </a:fontRef>
+        </p:style>
+        <p:txBody>
+          <a:bodyPr rtlCol="0" anchor="ctr"/>
+          <a:lstStyle/>
+          <a:p>
+            <a:pPr algn="ctr"/>
+          </a:p>
+        </p:txBody>
+      </p:sp>
       <p:pic>
         <p:nvPicPr>
-          <p:cNvPr id="6" name="Picture 5" descr="09-modelo-institucional.png"/>
+          <p:cNvPr id="7" name="Picture 6" descr="09-modelo-institucional.png"/>
           <p:cNvPicPr>
             <a:picLocks noChangeAspect="1"/>
           </p:cNvPicPr>
@@ -4705,7 +4750,7 @@
       </p:pic>
       <p:sp>
         <p:nvSpPr>
-          <p:cNvPr id="7" name="TextBox 6"/>
+          <p:cNvPr id="8" name="TextBox 7"/>
           <p:cNvSpPr txBox="1"/>
           <p:nvPr/>
         </p:nvSpPr>
@@ -6539,9 +6584,54 @@
           </a:p>
         </p:txBody>
       </p:sp>
+      <p:sp>
+        <p:nvSpPr>
+          <p:cNvPr id="6" name="Rounded Rectangle 5"/>
+          <p:cNvSpPr/>
+          <p:nvPr/>
+        </p:nvSpPr>
+        <p:spPr>
+          <a:xfrm>
+            <a:off x="6071616" y="1728216"/>
+            <a:ext cx="5413248" cy="3218688"/>
+          </a:xfrm>
+          <a:prstGeom prst="roundRect">
+            <a:avLst/>
+          </a:prstGeom>
+          <a:solidFill>
+            <a:srgbClr val="F1F5F9"/>
+          </a:solidFill>
+          <a:ln w="12700">
+            <a:solidFill>
+              <a:srgbClr val="E2E8F0"/>
+            </a:solidFill>
+          </a:ln>
+        </p:spPr>
+        <p:style>
+          <a:lnRef idx="1">
+            <a:schemeClr val="accent1"/>
+          </a:lnRef>
+          <a:fillRef idx="3">
+            <a:schemeClr val="accent1"/>
+          </a:fillRef>
+          <a:effectRef idx="2">
+            <a:schemeClr val="accent1"/>
+          </a:effectRef>
+          <a:fontRef idx="minor">
+            <a:schemeClr val="lt1"/>
+          </a:fontRef>
+        </p:style>
+        <p:txBody>
+          <a:bodyPr rtlCol="0" anchor="ctr"/>
+          <a:lstStyle/>
+          <a:p>
+            <a:pPr algn="ctr"/>
+          </a:p>
+        </p:txBody>
+      </p:sp>
       <p:pic>
         <p:nvPicPr>
-          <p:cNvPr id="6" name="Picture 5" descr="04-simulacion.png"/>
+          <p:cNvPr id="7" name="Picture 6" descr="04-simulacion.png"/>
           <p:cNvPicPr>
             <a:picLocks noChangeAspect="1"/>
           </p:cNvPicPr>
@@ -6565,7 +6655,7 @@
       </p:pic>
       <p:sp>
         <p:nvSpPr>
-          <p:cNvPr id="7" name="Rounded Rectangle 6"/>
+          <p:cNvPr id="8" name="Rounded Rectangle 7"/>
           <p:cNvSpPr/>
           <p:nvPr/>
         </p:nvSpPr>
@@ -6631,7 +6721,7 @@
       </p:sp>
       <p:sp>
         <p:nvSpPr>
-          <p:cNvPr id="8" name="TextBox 7"/>
+          <p:cNvPr id="9" name="TextBox 8"/>
           <p:cNvSpPr txBox="1"/>
           <p:nvPr/>
         </p:nvSpPr>
@@ -6795,9 +6885,54 @@
           </a:p>
         </p:txBody>
       </p:sp>
+      <p:sp>
+        <p:nvSpPr>
+          <p:cNvPr id="5" name="Rounded Rectangle 4"/>
+          <p:cNvSpPr/>
+          <p:nvPr/>
+        </p:nvSpPr>
+        <p:spPr>
+          <a:xfrm>
+            <a:off x="676656" y="1728216"/>
+            <a:ext cx="5596128" cy="4498848"/>
+          </a:xfrm>
+          <a:prstGeom prst="roundRect">
+            <a:avLst/>
+          </a:prstGeom>
+          <a:solidFill>
+            <a:srgbClr val="F1F5F9"/>
+          </a:solidFill>
+          <a:ln w="12700">
+            <a:solidFill>
+              <a:srgbClr val="E2E8F0"/>
+            </a:solidFill>
+          </a:ln>
+        </p:spPr>
+        <p:style>
+          <a:lnRef idx="1">
+            <a:schemeClr val="accent1"/>
+          </a:lnRef>
+          <a:fillRef idx="3">
+            <a:schemeClr val="accent1"/>
+          </a:fillRef>
+          <a:effectRef idx="2">
+            <a:schemeClr val="accent1"/>
+          </a:effectRef>
+          <a:fontRef idx="minor">
+            <a:schemeClr val="lt1"/>
+          </a:fontRef>
+        </p:style>
+        <p:txBody>
+          <a:bodyPr rtlCol="0" anchor="ctr"/>
+          <a:lstStyle/>
+          <a:p>
+            <a:pPr algn="ctr"/>
+          </a:p>
+        </p:txBody>
+      </p:sp>
       <p:pic>
         <p:nvPicPr>
-          <p:cNvPr id="5" name="Picture 4" descr="03-funcion-renal.png"/>
+          <p:cNvPr id="6" name="Picture 5" descr="03-funcion-renal.png"/>
           <p:cNvPicPr>
             <a:picLocks noChangeAspect="1"/>
           </p:cNvPicPr>
@@ -6821,7 +6956,7 @@
       </p:pic>
       <p:sp>
         <p:nvSpPr>
-          <p:cNvPr id="6" name="Rounded Rectangle 5"/>
+          <p:cNvPr id="7" name="Rounded Rectangle 6"/>
           <p:cNvSpPr/>
           <p:nvPr/>
         </p:nvSpPr>
@@ -6890,7 +7025,7 @@
       </p:sp>
       <p:sp>
         <p:nvSpPr>
-          <p:cNvPr id="7" name="Rounded Rectangle 6"/>
+          <p:cNvPr id="8" name="Rounded Rectangle 7"/>
           <p:cNvSpPr/>
           <p:nvPr/>
         </p:nvSpPr>
@@ -6959,7 +7094,7 @@
       </p:sp>
       <p:sp>
         <p:nvSpPr>
-          <p:cNvPr id="8" name="Rounded Rectangle 7"/>
+          <p:cNvPr id="9" name="Rounded Rectangle 8"/>
           <p:cNvSpPr/>
           <p:nvPr/>
         </p:nvSpPr>
@@ -7028,7 +7163,7 @@
       </p:sp>
       <p:sp>
         <p:nvSpPr>
-          <p:cNvPr id="9" name="TextBox 8"/>
+          <p:cNvPr id="10" name="TextBox 9"/>
           <p:cNvSpPr txBox="1"/>
           <p:nvPr/>
         </p:nvSpPr>
@@ -8196,9 +8331,54 @@
           </a:p>
         </p:txBody>
       </p:sp>
+      <p:sp>
+        <p:nvSpPr>
+          <p:cNvPr id="5" name="Rounded Rectangle 4"/>
+          <p:cNvSpPr/>
+          <p:nvPr/>
+        </p:nvSpPr>
+        <p:spPr>
+          <a:xfrm>
+            <a:off x="676656" y="1728216"/>
+            <a:ext cx="6327648" cy="4498848"/>
+          </a:xfrm>
+          <a:prstGeom prst="roundRect">
+            <a:avLst/>
+          </a:prstGeom>
+          <a:solidFill>
+            <a:srgbClr val="F1F5F9"/>
+          </a:solidFill>
+          <a:ln w="12700">
+            <a:solidFill>
+              <a:srgbClr val="E2E8F0"/>
+            </a:solidFill>
+          </a:ln>
+        </p:spPr>
+        <p:style>
+          <a:lnRef idx="1">
+            <a:schemeClr val="accent1"/>
+          </a:lnRef>
+          <a:fillRef idx="3">
+            <a:schemeClr val="accent1"/>
+          </a:fillRef>
+          <a:effectRef idx="2">
+            <a:schemeClr val="accent1"/>
+          </a:effectRef>
+          <a:fontRef idx="minor">
+            <a:schemeClr val="lt1"/>
+          </a:fontRef>
+        </p:style>
+        <p:txBody>
+          <a:bodyPr rtlCol="0" anchor="ctr"/>
+          <a:lstStyle/>
+          <a:p>
+            <a:pPr algn="ctr"/>
+          </a:p>
+        </p:txBody>
+      </p:sp>
       <p:pic>
         <p:nvPicPr>
-          <p:cNvPr id="5" name="Picture 4" descr="01-dashboard.png"/>
+          <p:cNvPr id="6" name="Picture 5" descr="01-dashboard.png"/>
           <p:cNvPicPr>
             <a:picLocks noChangeAspect="1"/>
           </p:cNvPicPr>
@@ -8222,7 +8402,7 @@
       </p:pic>
       <p:sp>
         <p:nvSpPr>
-          <p:cNvPr id="6" name="Rounded Rectangle 5"/>
+          <p:cNvPr id="7" name="Rounded Rectangle 6"/>
           <p:cNvSpPr/>
           <p:nvPr/>
         </p:nvSpPr>
@@ -8384,7 +8564,7 @@
       </p:sp>
       <p:sp>
         <p:nvSpPr>
-          <p:cNvPr id="7" name="TextBox 6"/>
+          <p:cNvPr id="8" name="TextBox 7"/>
           <p:cNvSpPr txBox="1"/>
           <p:nvPr/>
         </p:nvSpPr>
@@ -8710,9 +8890,54 @@
           </a:p>
         </p:txBody>
       </p:sp>
+      <p:sp>
+        <p:nvSpPr>
+          <p:cNvPr id="6" name="Rounded Rectangle 5"/>
+          <p:cNvSpPr/>
+          <p:nvPr/>
+        </p:nvSpPr>
+        <p:spPr>
+          <a:xfrm>
+            <a:off x="5705856" y="1728216"/>
+            <a:ext cx="5779008" cy="4498848"/>
+          </a:xfrm>
+          <a:prstGeom prst="roundRect">
+            <a:avLst/>
+          </a:prstGeom>
+          <a:solidFill>
+            <a:srgbClr val="F1F5F9"/>
+          </a:solidFill>
+          <a:ln w="12700">
+            <a:solidFill>
+              <a:srgbClr val="E2E8F0"/>
+            </a:solidFill>
+          </a:ln>
+        </p:spPr>
+        <p:style>
+          <a:lnRef idx="1">
+            <a:schemeClr val="accent1"/>
+          </a:lnRef>
+          <a:fillRef idx="3">
+            <a:schemeClr val="accent1"/>
+          </a:fillRef>
+          <a:effectRef idx="2">
+            <a:schemeClr val="accent1"/>
+          </a:effectRef>
+          <a:fontRef idx="minor">
+            <a:schemeClr val="lt1"/>
+          </a:fontRef>
+        </p:style>
+        <p:txBody>
+          <a:bodyPr rtlCol="0" anchor="ctr"/>
+          <a:lstStyle/>
+          <a:p>
+            <a:pPr algn="ctr"/>
+          </a:p>
+        </p:txBody>
+      </p:sp>
       <p:pic>
         <p:nvPicPr>
-          <p:cNvPr id="6" name="Picture 5" descr="04-simulacion.png"/>
+          <p:cNvPr id="7" name="Picture 6" descr="04-simulacion.png"/>
           <p:cNvPicPr>
             <a:picLocks noChangeAspect="1"/>
           </p:cNvPicPr>
@@ -8736,7 +8961,7 @@
       </p:pic>
       <p:sp>
         <p:nvSpPr>
-          <p:cNvPr id="7" name="TextBox 6"/>
+          <p:cNvPr id="8" name="TextBox 7"/>
           <p:cNvSpPr txBox="1"/>
           <p:nvPr/>
         </p:nvSpPr>

--- a/assets/docs/PK-Bayes_Presentacion_Clinica_Institucional.pptx
+++ b/assets/docs/PK-Bayes_Presentacion_Clinica_Institucional.pptx
@@ -6,19 +6,19 @@
   </p:sldMasterIdLst>
   <p:sldIdLst>
     <p:sldId id="256" r:id="rId7"/>
-    <p:sldId id="257" r:id="rId8"/>
-    <p:sldId id="258" r:id="rId9"/>
-    <p:sldId id="259" r:id="rId10"/>
-    <p:sldId id="260" r:id="rId11"/>
-    <p:sldId id="261" r:id="rId12"/>
-    <p:sldId id="262" r:id="rId13"/>
-    <p:sldId id="263" r:id="rId14"/>
-    <p:sldId id="264" r:id="rId15"/>
-    <p:sldId id="265" r:id="rId16"/>
-    <p:sldId id="266" r:id="rId17"/>
-    <p:sldId id="267" r:id="rId18"/>
-    <p:sldId id="268" r:id="rId19"/>
-    <p:sldId id="269" r:id="rId20"/>
+    <p:sldId id="257" r:id="rId9"/>
+    <p:sldId id="258" r:id="rId10"/>
+    <p:sldId id="259" r:id="rId11"/>
+    <p:sldId id="260" r:id="rId12"/>
+    <p:sldId id="261" r:id="rId13"/>
+    <p:sldId id="262" r:id="rId14"/>
+    <p:sldId id="263" r:id="rId15"/>
+    <p:sldId id="264" r:id="rId16"/>
+    <p:sldId id="265" r:id="rId17"/>
+    <p:sldId id="266" r:id="rId18"/>
+    <p:sldId id="267" r:id="rId19"/>
+    <p:sldId id="268" r:id="rId20"/>
+    <p:sldId id="269" r:id="rId21"/>
   </p:sldIdLst>
   <p:sldSz cx="12191695" cy="6858000" type="screen4x3"/>
   <p:notesSz cx="6858000" cy="9144000"/>
@@ -118,6 +118,1511 @@
     </a:lvl9pPr>
   </p:defaultTextStyle>
 </p:presentation>
+</file>
+
+<file path=ppt/notesMasters/notesMaster1.xml><?xml version="1.0" encoding="utf-8"?>
+<p:notesMaster xmlns:a="http://schemas.openxmlformats.org/drawingml/2006/main" xmlns:p="http://schemas.openxmlformats.org/presentationml/2006/main" xmlns:r="http://schemas.openxmlformats.org/officeDocument/2006/relationships">
+  <p:cSld>
+    <p:bg>
+      <p:bgRef idx="1001">
+        <a:schemeClr val="bg1"/>
+      </p:bgRef>
+    </p:bg>
+    <p:spTree>
+      <p:nvGrpSpPr>
+        <p:cNvPr id="1" name=""/>
+        <p:cNvGrpSpPr/>
+        <p:nvPr/>
+      </p:nvGrpSpPr>
+      <p:grpSpPr>
+        <a:xfrm>
+          <a:off x="0" y="0"/>
+          <a:ext cx="0" cy="0"/>
+          <a:chOff x="0" y="0"/>
+          <a:chExt cx="0" cy="0"/>
+        </a:xfrm>
+      </p:grpSpPr>
+      <p:sp>
+        <p:nvSpPr>
+          <p:cNvPr id="2" name="Header Placeholder 1"/>
+          <p:cNvSpPr>
+            <a:spLocks noGrp="1"/>
+          </p:cNvSpPr>
+          <p:nvPr>
+            <p:ph type="hdr" sz="quarter"/>
+          </p:nvPr>
+        </p:nvSpPr>
+        <p:spPr>
+          <a:xfrm>
+            <a:off x="0" y="0"/>
+            <a:ext cx="2971800" cy="457200"/>
+          </a:xfrm>
+          <a:prstGeom prst="rect">
+            <a:avLst/>
+          </a:prstGeom>
+        </p:spPr>
+        <p:txBody>
+          <a:bodyPr vert="horz" lIns="91440" tIns="45720" rIns="91440" bIns="45720" rtlCol="0"/>
+          <a:lstStyle>
+            <a:lvl1pPr algn="l">
+              <a:defRPr sz="1200"/>
+            </a:lvl1pPr>
+          </a:lstStyle>
+          <a:p>
+            <a:endParaRPr lang="en-US"/>
+          </a:p>
+        </p:txBody>
+      </p:sp>
+      <p:sp>
+        <p:nvSpPr>
+          <p:cNvPr id="3" name="Date Placeholder 2"/>
+          <p:cNvSpPr>
+            <a:spLocks noGrp="1"/>
+          </p:cNvSpPr>
+          <p:nvPr>
+            <p:ph type="dt" idx="1"/>
+          </p:nvPr>
+        </p:nvSpPr>
+        <p:spPr>
+          <a:xfrm>
+            <a:off x="3884613" y="0"/>
+            <a:ext cx="2971800" cy="457200"/>
+          </a:xfrm>
+          <a:prstGeom prst="rect">
+            <a:avLst/>
+          </a:prstGeom>
+        </p:spPr>
+        <p:txBody>
+          <a:bodyPr vert="horz" lIns="91440" tIns="45720" rIns="91440" bIns="45720" rtlCol="0"/>
+          <a:lstStyle>
+            <a:lvl1pPr algn="r">
+              <a:defRPr sz="1200"/>
+            </a:lvl1pPr>
+          </a:lstStyle>
+          <a:p>
+            <a:fld id="{0F89C1C7-3DCD-1040-A9CF-14679D8B5DDD}" type="datetimeFigureOut">
+              <a:rPr lang="en-US" smtClean="0"/>
+              <a:t>10/17/16</a:t>
+            </a:fld>
+            <a:endParaRPr lang="en-US"/>
+          </a:p>
+        </p:txBody>
+      </p:sp>
+      <p:sp>
+        <p:nvSpPr>
+          <p:cNvPr id="4" name="Slide Image Placeholder 3"/>
+          <p:cNvSpPr>
+            <a:spLocks noGrp="1" noRot="1" noChangeAspect="1"/>
+          </p:cNvSpPr>
+          <p:nvPr>
+            <p:ph type="sldImg" idx="2"/>
+          </p:nvPr>
+        </p:nvSpPr>
+        <p:spPr>
+          <a:xfrm>
+            <a:off x="1143000" y="685800"/>
+            <a:ext cx="4572000" cy="3429000"/>
+          </a:xfrm>
+          <a:prstGeom prst="rect">
+            <a:avLst/>
+          </a:prstGeom>
+          <a:noFill/>
+          <a:ln w="12700">
+            <a:solidFill>
+              <a:prstClr val="black"/>
+            </a:solidFill>
+          </a:ln>
+        </p:spPr>
+        <p:txBody>
+          <a:bodyPr vert="horz" lIns="91440" tIns="45720" rIns="91440" bIns="45720" rtlCol="0" anchor="ctr"/>
+          <a:lstStyle/>
+          <a:p>
+            <a:endParaRPr lang="en-US"/>
+          </a:p>
+        </p:txBody>
+      </p:sp>
+      <p:sp>
+        <p:nvSpPr>
+          <p:cNvPr id="5" name="Notes Placeholder 4"/>
+          <p:cNvSpPr>
+            <a:spLocks noGrp="1"/>
+          </p:cNvSpPr>
+          <p:nvPr>
+            <p:ph type="body" sz="quarter" idx="3"/>
+          </p:nvPr>
+        </p:nvSpPr>
+        <p:spPr>
+          <a:xfrm>
+            <a:off x="685800" y="4343400"/>
+            <a:ext cx="5486400" cy="4114800"/>
+          </a:xfrm>
+          <a:prstGeom prst="rect">
+            <a:avLst/>
+          </a:prstGeom>
+        </p:spPr>
+        <p:txBody>
+          <a:bodyPr vert="horz" lIns="91440" tIns="45720" rIns="91440" bIns="45720" rtlCol="0"/>
+          <a:lstStyle/>
+          <a:p>
+            <a:pPr lvl="0"/>
+            <a:r>
+              <a:rPr lang="en-US" smtClean="0"/>
+              <a:t>Click to edit Master text styles</a:t>
+            </a:r>
+          </a:p>
+          <a:p>
+            <a:pPr lvl="1"/>
+            <a:r>
+              <a:rPr lang="en-US" smtClean="0"/>
+              <a:t>Second level</a:t>
+            </a:r>
+          </a:p>
+          <a:p>
+            <a:pPr lvl="2"/>
+            <a:r>
+              <a:rPr lang="en-US" smtClean="0"/>
+              <a:t>Third level</a:t>
+            </a:r>
+          </a:p>
+          <a:p>
+            <a:pPr lvl="3"/>
+            <a:r>
+              <a:rPr lang="en-US" smtClean="0"/>
+              <a:t>Fourth level</a:t>
+            </a:r>
+          </a:p>
+          <a:p>
+            <a:pPr lvl="4"/>
+            <a:r>
+              <a:rPr lang="en-US" smtClean="0"/>
+              <a:t>Fifth level</a:t>
+            </a:r>
+            <a:endParaRPr lang="en-US"/>
+          </a:p>
+        </p:txBody>
+      </p:sp>
+      <p:sp>
+        <p:nvSpPr>
+          <p:cNvPr id="6" name="Footer Placeholder 5"/>
+          <p:cNvSpPr>
+            <a:spLocks noGrp="1"/>
+          </p:cNvSpPr>
+          <p:nvPr>
+            <p:ph type="ftr" sz="quarter" idx="4"/>
+          </p:nvPr>
+        </p:nvSpPr>
+        <p:spPr>
+          <a:xfrm>
+            <a:off x="0" y="8685213"/>
+            <a:ext cx="2971800" cy="457200"/>
+          </a:xfrm>
+          <a:prstGeom prst="rect">
+            <a:avLst/>
+          </a:prstGeom>
+        </p:spPr>
+        <p:txBody>
+          <a:bodyPr vert="horz" lIns="91440" tIns="45720" rIns="91440" bIns="45720" rtlCol="0" anchor="b"/>
+          <a:lstStyle>
+            <a:lvl1pPr algn="l">
+              <a:defRPr sz="1200"/>
+            </a:lvl1pPr>
+          </a:lstStyle>
+          <a:p>
+            <a:endParaRPr lang="en-US"/>
+          </a:p>
+        </p:txBody>
+      </p:sp>
+      <p:sp>
+        <p:nvSpPr>
+          <p:cNvPr id="7" name="Slide Number Placeholder 6"/>
+          <p:cNvSpPr>
+            <a:spLocks noGrp="1"/>
+          </p:cNvSpPr>
+          <p:nvPr>
+            <p:ph type="sldNum" sz="quarter" idx="5"/>
+          </p:nvPr>
+        </p:nvSpPr>
+        <p:spPr>
+          <a:xfrm>
+            <a:off x="3884613" y="8685213"/>
+            <a:ext cx="2971800" cy="457200"/>
+          </a:xfrm>
+          <a:prstGeom prst="rect">
+            <a:avLst/>
+          </a:prstGeom>
+        </p:spPr>
+        <p:txBody>
+          <a:bodyPr vert="horz" lIns="91440" tIns="45720" rIns="91440" bIns="45720" rtlCol="0" anchor="b"/>
+          <a:lstStyle>
+            <a:lvl1pPr algn="r">
+              <a:defRPr sz="1200"/>
+            </a:lvl1pPr>
+          </a:lstStyle>
+          <a:p>
+            <a:fld id="{BB5E49A5-4136-284D-997B-48E1D791AD67}" type="slidenum">
+              <a:rPr lang="en-US" smtClean="0"/>
+              <a:t>‹#›</a:t>
+            </a:fld>
+            <a:endParaRPr lang="en-US"/>
+          </a:p>
+        </p:txBody>
+      </p:sp>
+    </p:spTree>
+    <p:extLst>
+      <p:ext uri="{BB962C8B-B14F-4D97-AF65-F5344CB8AC3E}">
+        <p14:creationId xmlns:p14="http://schemas.microsoft.com/office/powerpoint/2010/main" val="2623252185"/>
+      </p:ext>
+    </p:extLst>
+  </p:cSld>
+  <p:clrMap bg1="lt1" tx1="dk1" bg2="lt2" tx2="dk2" accent1="accent1" accent2="accent2" accent3="accent3" accent4="accent4" accent5="accent5" accent6="accent6" hlink="hlink" folHlink="folHlink"/>
+  <p:notesStyle>
+    <a:lvl1pPr marL="0" algn="l" defTabSz="457200" rtl="0" eaLnBrk="1" latinLnBrk="0" hangingPunct="1">
+      <a:defRPr sz="1200" kern="1200">
+        <a:solidFill>
+          <a:schemeClr val="tx1"/>
+        </a:solidFill>
+        <a:latin typeface="+mn-lt"/>
+        <a:ea typeface="+mn-ea"/>
+        <a:cs typeface="+mn-cs"/>
+      </a:defRPr>
+    </a:lvl1pPr>
+    <a:lvl2pPr marL="457200" algn="l" defTabSz="457200" rtl="0" eaLnBrk="1" latinLnBrk="0" hangingPunct="1">
+      <a:defRPr sz="1200" kern="1200">
+        <a:solidFill>
+          <a:schemeClr val="tx1"/>
+        </a:solidFill>
+        <a:latin typeface="+mn-lt"/>
+        <a:ea typeface="+mn-ea"/>
+        <a:cs typeface="+mn-cs"/>
+      </a:defRPr>
+    </a:lvl2pPr>
+    <a:lvl3pPr marL="914400" algn="l" defTabSz="457200" rtl="0" eaLnBrk="1" latinLnBrk="0" hangingPunct="1">
+      <a:defRPr sz="1200" kern="1200">
+        <a:solidFill>
+          <a:schemeClr val="tx1"/>
+        </a:solidFill>
+        <a:latin typeface="+mn-lt"/>
+        <a:ea typeface="+mn-ea"/>
+        <a:cs typeface="+mn-cs"/>
+      </a:defRPr>
+    </a:lvl3pPr>
+    <a:lvl4pPr marL="1371600" algn="l" defTabSz="457200" rtl="0" eaLnBrk="1" latinLnBrk="0" hangingPunct="1">
+      <a:defRPr sz="1200" kern="1200">
+        <a:solidFill>
+          <a:schemeClr val="tx1"/>
+        </a:solidFill>
+        <a:latin typeface="+mn-lt"/>
+        <a:ea typeface="+mn-ea"/>
+        <a:cs typeface="+mn-cs"/>
+      </a:defRPr>
+    </a:lvl4pPr>
+    <a:lvl5pPr marL="1828800" algn="l" defTabSz="457200" rtl="0" eaLnBrk="1" latinLnBrk="0" hangingPunct="1">
+      <a:defRPr sz="1200" kern="1200">
+        <a:solidFill>
+          <a:schemeClr val="tx1"/>
+        </a:solidFill>
+        <a:latin typeface="+mn-lt"/>
+        <a:ea typeface="+mn-ea"/>
+        <a:cs typeface="+mn-cs"/>
+      </a:defRPr>
+    </a:lvl5pPr>
+    <a:lvl6pPr marL="2286000" algn="l" defTabSz="457200" rtl="0" eaLnBrk="1" latinLnBrk="0" hangingPunct="1">
+      <a:defRPr sz="1200" kern="1200">
+        <a:solidFill>
+          <a:schemeClr val="tx1"/>
+        </a:solidFill>
+        <a:latin typeface="+mn-lt"/>
+        <a:ea typeface="+mn-ea"/>
+        <a:cs typeface="+mn-cs"/>
+      </a:defRPr>
+    </a:lvl6pPr>
+    <a:lvl7pPr marL="2743200" algn="l" defTabSz="457200" rtl="0" eaLnBrk="1" latinLnBrk="0" hangingPunct="1">
+      <a:defRPr sz="1200" kern="1200">
+        <a:solidFill>
+          <a:schemeClr val="tx1"/>
+        </a:solidFill>
+        <a:latin typeface="+mn-lt"/>
+        <a:ea typeface="+mn-ea"/>
+        <a:cs typeface="+mn-cs"/>
+      </a:defRPr>
+    </a:lvl7pPr>
+    <a:lvl8pPr marL="3200400" algn="l" defTabSz="457200" rtl="0" eaLnBrk="1" latinLnBrk="0" hangingPunct="1">
+      <a:defRPr sz="1200" kern="1200">
+        <a:solidFill>
+          <a:schemeClr val="tx1"/>
+        </a:solidFill>
+        <a:latin typeface="+mn-lt"/>
+        <a:ea typeface="+mn-ea"/>
+        <a:cs typeface="+mn-cs"/>
+      </a:defRPr>
+    </a:lvl8pPr>
+    <a:lvl9pPr marL="3657600" algn="l" defTabSz="457200" rtl="0" eaLnBrk="1" latinLnBrk="0" hangingPunct="1">
+      <a:defRPr sz="1200" kern="1200">
+        <a:solidFill>
+          <a:schemeClr val="tx1"/>
+        </a:solidFill>
+        <a:latin typeface="+mn-lt"/>
+        <a:ea typeface="+mn-ea"/>
+        <a:cs typeface="+mn-cs"/>
+      </a:defRPr>
+    </a:lvl9pPr>
+  </p:notesStyle>
+</p:notesMaster>
+</file>
+
+<file path=ppt/notesSlides/notesSlide1.xml><?xml version="1.0" encoding="utf-8"?>
+<p:notes xmlns:a="http://schemas.openxmlformats.org/drawingml/2006/main" xmlns:p="http://schemas.openxmlformats.org/presentationml/2006/main" xmlns:r="http://schemas.openxmlformats.org/officeDocument/2006/relationships">
+  <p:cSld>
+    <p:spTree>
+      <p:nvGrpSpPr>
+        <p:cNvPr id="1" name=""/>
+        <p:cNvGrpSpPr/>
+        <p:nvPr/>
+      </p:nvGrpSpPr>
+      <p:grpSpPr>
+        <a:xfrm>
+          <a:off x="0" y="0"/>
+          <a:ext cx="0" cy="0"/>
+          <a:chOff x="0" y="0"/>
+          <a:chExt cx="0" cy="0"/>
+        </a:xfrm>
+      </p:grpSpPr>
+      <p:sp>
+        <p:nvSpPr>
+          <p:cNvPr id="2" name="Slide Image Placeholder 1"/>
+          <p:cNvSpPr>
+            <a:spLocks noGrp="1"/>
+          </p:cNvSpPr>
+          <p:nvPr>
+            <p:ph type="sldImg" idx="2"/>
+          </p:nvPr>
+        </p:nvSpPr>
+        <p:spPr/>
+      </p:sp>
+      <p:sp>
+        <p:nvSpPr>
+          <p:cNvPr id="3" name="Notes Placeholder 2"/>
+          <p:cNvSpPr>
+            <a:spLocks noGrp="1"/>
+          </p:cNvSpPr>
+          <p:nvPr>
+            <p:ph type="body" idx="3" sz="quarter"/>
+          </p:nvPr>
+        </p:nvSpPr>
+        <p:spPr/>
+        <p:txBody>
+          <a:bodyPr/>
+          <a:lstStyle/>
+          <a:p>
+            <a:r>
+              <a:t>NOTAS DE ORADOR - DIAPOSITIVA 1 (PORTADA INSTITUCIONAL):</a:t>
+            </a:r>
+          </a:p>
+          <a:p>
+            <a:r>
+              <a:t>- Agradecer a los asistentes (Dirección Médica, Jefatura de Farmacia Clínica, Infectología, UCI y Comité PROA).</a:t>
+            </a:r>
+          </a:p>
+          <a:p>
+            <a:r>
+              <a:t>- Presentar PK-Bayes como un sistema de apoyo a la decisión clínica (CDSS) rigurosamente validado.</a:t>
+            </a:r>
+          </a:p>
+          <a:p>
+            <a:r>
+              <a:t>- Enfatizar que no sustituye el juicio del médico ni del farmacéutico, sino que proporciona un motor de cálculo farmacocinético bayesiano de alta velocidad para individualizar dosis en pacientes críticos complejos.</a:t>
+            </a:r>
+          </a:p>
+        </p:txBody>
+      </p:sp>
+      <p:sp>
+        <p:nvSpPr>
+          <p:cNvPr id="4" name="Slide Number Placeholder 3"/>
+          <p:cNvSpPr>
+            <a:spLocks noGrp="1"/>
+          </p:cNvSpPr>
+          <p:nvPr>
+            <p:ph type="sldNum" idx="5" sz="quarter"/>
+          </p:nvPr>
+        </p:nvSpPr>
+        <p:spPr/>
+      </p:sp>
+    </p:spTree>
+  </p:cSld>
+  <p:clrMapOvr>
+    <a:masterClrMapping/>
+  </p:clrMapOvr>
+</p:notes>
+</file>
+
+<file path=ppt/notesSlides/notesSlide10.xml><?xml version="1.0" encoding="utf-8"?>
+<p:notes xmlns:a="http://schemas.openxmlformats.org/drawingml/2006/main" xmlns:p="http://schemas.openxmlformats.org/presentationml/2006/main" xmlns:r="http://schemas.openxmlformats.org/officeDocument/2006/relationships">
+  <p:cSld>
+    <p:spTree>
+      <p:nvGrpSpPr>
+        <p:cNvPr id="1" name=""/>
+        <p:cNvGrpSpPr/>
+        <p:nvPr/>
+      </p:nvGrpSpPr>
+      <p:grpSpPr>
+        <a:xfrm>
+          <a:off x="0" y="0"/>
+          <a:ext cx="0" cy="0"/>
+          <a:chOff x="0" y="0"/>
+          <a:chExt cx="0" cy="0"/>
+        </a:xfrm>
+      </p:grpSpPr>
+      <p:sp>
+        <p:nvSpPr>
+          <p:cNvPr id="2" name="Slide Image Placeholder 1"/>
+          <p:cNvSpPr>
+            <a:spLocks noGrp="1"/>
+          </p:cNvSpPr>
+          <p:nvPr>
+            <p:ph type="sldImg" idx="2"/>
+          </p:nvPr>
+        </p:nvSpPr>
+        <p:spPr/>
+      </p:sp>
+      <p:sp>
+        <p:nvSpPr>
+          <p:cNvPr id="3" name="Notes Placeholder 2"/>
+          <p:cNvSpPr>
+            <a:spLocks noGrp="1"/>
+          </p:cNvSpPr>
+          <p:nvPr>
+            <p:ph type="body" idx="3" sz="quarter"/>
+          </p:nvPr>
+        </p:nvSpPr>
+        <p:spPr/>
+        <p:txBody>
+          <a:bodyPr/>
+          <a:lstStyle/>
+          <a:p>
+            <a:r>
+              <a:t>NOTAS DE ORADOR - DIAPOSITIVA 10 (FARMACOECONOMÍA &amp; ROI):</a:t>
+            </a:r>
+          </a:p>
+          <a:p>
+            <a:r>
+              <a:t>- Argumento decisivo para Directores Financieros y Gerentes de Hospitales.</a:t>
+            </a:r>
+          </a:p>
+          <a:p>
+            <a:r>
+              <a:t>- Un hospital de 400 camas trata aproximadamente 300 pacientes al año con vancomicina en UCI. Reducir la LRA en 9 puntos porcentuales evita 27 episodios de falla renal, ahorrando más de $250,000 USD anuales.</a:t>
+            </a:r>
+          </a:p>
+        </p:txBody>
+      </p:sp>
+      <p:sp>
+        <p:nvSpPr>
+          <p:cNvPr id="4" name="Slide Number Placeholder 3"/>
+          <p:cNvSpPr>
+            <a:spLocks noGrp="1"/>
+          </p:cNvSpPr>
+          <p:nvPr>
+            <p:ph type="sldNum" idx="5" sz="quarter"/>
+          </p:nvPr>
+        </p:nvSpPr>
+        <p:spPr/>
+      </p:sp>
+    </p:spTree>
+  </p:cSld>
+  <p:clrMapOvr>
+    <a:masterClrMapping/>
+  </p:clrMapOvr>
+</p:notes>
+</file>
+
+<file path=ppt/notesSlides/notesSlide11.xml><?xml version="1.0" encoding="utf-8"?>
+<p:notes xmlns:a="http://schemas.openxmlformats.org/drawingml/2006/main" xmlns:p="http://schemas.openxmlformats.org/presentationml/2006/main" xmlns:r="http://schemas.openxmlformats.org/officeDocument/2006/relationships">
+  <p:cSld>
+    <p:spTree>
+      <p:nvGrpSpPr>
+        <p:cNvPr id="1" name=""/>
+        <p:cNvGrpSpPr/>
+        <p:nvPr/>
+      </p:nvGrpSpPr>
+      <p:grpSpPr>
+        <a:xfrm>
+          <a:off x="0" y="0"/>
+          <a:ext cx="0" cy="0"/>
+          <a:chOff x="0" y="0"/>
+          <a:chExt cx="0" cy="0"/>
+        </a:xfrm>
+      </p:grpSpPr>
+      <p:sp>
+        <p:nvSpPr>
+          <p:cNvPr id="2" name="Slide Image Placeholder 1"/>
+          <p:cNvSpPr>
+            <a:spLocks noGrp="1"/>
+          </p:cNvSpPr>
+          <p:nvPr>
+            <p:ph type="sldImg" idx="2"/>
+          </p:nvPr>
+        </p:nvSpPr>
+        <p:spPr/>
+      </p:sp>
+      <p:sp>
+        <p:nvSpPr>
+          <p:cNvPr id="3" name="Notes Placeholder 2"/>
+          <p:cNvSpPr>
+            <a:spLocks noGrp="1"/>
+          </p:cNvSpPr>
+          <p:nvPr>
+            <p:ph type="body" idx="3" sz="quarter"/>
+          </p:nvPr>
+        </p:nvSpPr>
+        <p:spPr/>
+        <p:txBody>
+          <a:bodyPr/>
+          <a:lstStyle/>
+          <a:p>
+            <a:r>
+              <a:t>NOTAS DE ORADOR - DIAPOSITIVA 11 (CIBERSEGURIDAD &amp; PRIVACIDAD):</a:t>
+            </a:r>
+          </a:p>
+          <a:p>
+            <a:r>
+              <a:t>- Abordar la preocupación prioritaria de los Oficiales de Seguridad de la Información (CISO) del hospital.</a:t>
+            </a:r>
+          </a:p>
+          <a:p>
+            <a:r>
+              <a:t>- Explicar que la inferencia MAP puede ejecutarse 100% de manera local y en el navegador, sin enviar registros a servidores externos.</a:t>
+            </a:r>
+          </a:p>
+        </p:txBody>
+      </p:sp>
+      <p:sp>
+        <p:nvSpPr>
+          <p:cNvPr id="4" name="Slide Number Placeholder 3"/>
+          <p:cNvSpPr>
+            <a:spLocks noGrp="1"/>
+          </p:cNvSpPr>
+          <p:nvPr>
+            <p:ph type="sldNum" idx="5" sz="quarter"/>
+          </p:nvPr>
+        </p:nvSpPr>
+        <p:spPr/>
+      </p:sp>
+    </p:spTree>
+  </p:cSld>
+  <p:clrMapOvr>
+    <a:masterClrMapping/>
+  </p:clrMapOvr>
+</p:notes>
+</file>
+
+<file path=ppt/notesSlides/notesSlide12.xml><?xml version="1.0" encoding="utf-8"?>
+<p:notes xmlns:a="http://schemas.openxmlformats.org/drawingml/2006/main" xmlns:p="http://schemas.openxmlformats.org/presentationml/2006/main" xmlns:r="http://schemas.openxmlformats.org/officeDocument/2006/relationships">
+  <p:cSld>
+    <p:spTree>
+      <p:nvGrpSpPr>
+        <p:cNvPr id="1" name=""/>
+        <p:cNvGrpSpPr/>
+        <p:nvPr/>
+      </p:nvGrpSpPr>
+      <p:grpSpPr>
+        <a:xfrm>
+          <a:off x="0" y="0"/>
+          <a:ext cx="0" cy="0"/>
+          <a:chOff x="0" y="0"/>
+          <a:chExt cx="0" cy="0"/>
+        </a:xfrm>
+      </p:grpSpPr>
+      <p:sp>
+        <p:nvSpPr>
+          <p:cNvPr id="2" name="Slide Image Placeholder 1"/>
+          <p:cNvSpPr>
+            <a:spLocks noGrp="1"/>
+          </p:cNvSpPr>
+          <p:nvPr>
+            <p:ph type="sldImg" idx="2"/>
+          </p:nvPr>
+        </p:nvSpPr>
+        <p:spPr/>
+      </p:sp>
+      <p:sp>
+        <p:nvSpPr>
+          <p:cNvPr id="3" name="Notes Placeholder 2"/>
+          <p:cNvSpPr>
+            <a:spLocks noGrp="1"/>
+          </p:cNvSpPr>
+          <p:nvPr>
+            <p:ph type="body" idx="3" sz="quarter"/>
+          </p:nvPr>
+        </p:nvSpPr>
+        <p:spPr/>
+        <p:txBody>
+          <a:bodyPr/>
+          <a:lstStyle/>
+          <a:p>
+            <a:r>
+              <a:t>NOTAS DE ORADOR - DIAPOSITIVA 12 (INFRAESTRUCTURA &amp; HL7 FHIR):</a:t>
+            </a:r>
+          </a:p>
+          <a:p>
+            <a:r>
+              <a:t>- Demostrar al equipo de TI biomédica que la integración es moderna y no invasiva.</a:t>
+            </a:r>
+          </a:p>
+          <a:p>
+            <a:r>
+              <a:t>- Mediante SMART on FHIR, PK-Bayes puede embeberse como una pestaña interactiva dentro de Epic o Cerner.</a:t>
+            </a:r>
+          </a:p>
+        </p:txBody>
+      </p:sp>
+      <p:sp>
+        <p:nvSpPr>
+          <p:cNvPr id="4" name="Slide Number Placeholder 3"/>
+          <p:cNvSpPr>
+            <a:spLocks noGrp="1"/>
+          </p:cNvSpPr>
+          <p:nvPr>
+            <p:ph type="sldNum" idx="5" sz="quarter"/>
+          </p:nvPr>
+        </p:nvSpPr>
+        <p:spPr/>
+      </p:sp>
+    </p:spTree>
+  </p:cSld>
+  <p:clrMapOvr>
+    <a:masterClrMapping/>
+  </p:clrMapOvr>
+</p:notes>
+</file>
+
+<file path=ppt/notesSlides/notesSlide13.xml><?xml version="1.0" encoding="utf-8"?>
+<p:notes xmlns:a="http://schemas.openxmlformats.org/drawingml/2006/main" xmlns:p="http://schemas.openxmlformats.org/presentationml/2006/main" xmlns:r="http://schemas.openxmlformats.org/officeDocument/2006/relationships">
+  <p:cSld>
+    <p:spTree>
+      <p:nvGrpSpPr>
+        <p:cNvPr id="1" name=""/>
+        <p:cNvGrpSpPr/>
+        <p:nvPr/>
+      </p:nvGrpSpPr>
+      <p:grpSpPr>
+        <a:xfrm>
+          <a:off x="0" y="0"/>
+          <a:ext cx="0" cy="0"/>
+          <a:chOff x="0" y="0"/>
+          <a:chExt cx="0" cy="0"/>
+        </a:xfrm>
+      </p:grpSpPr>
+      <p:sp>
+        <p:nvSpPr>
+          <p:cNvPr id="2" name="Slide Image Placeholder 1"/>
+          <p:cNvSpPr>
+            <a:spLocks noGrp="1"/>
+          </p:cNvSpPr>
+          <p:nvPr>
+            <p:ph type="sldImg" idx="2"/>
+          </p:nvPr>
+        </p:nvSpPr>
+        <p:spPr/>
+      </p:sp>
+      <p:sp>
+        <p:nvSpPr>
+          <p:cNvPr id="3" name="Notes Placeholder 2"/>
+          <p:cNvSpPr>
+            <a:spLocks noGrp="1"/>
+          </p:cNvSpPr>
+          <p:nvPr>
+            <p:ph type="body" idx="3" sz="quarter"/>
+          </p:nvPr>
+        </p:nvSpPr>
+        <p:spPr/>
+        <p:txBody>
+          <a:bodyPr/>
+          <a:lstStyle/>
+          <a:p>
+            <a:r>
+              <a:t>NOTAS DE ORADOR - DIAPOSITIVA 13 (PROGRAMA PILOTO 60 DÍAS):</a:t>
+            </a:r>
+          </a:p>
+          <a:p>
+            <a:r>
+              <a:t>- Ofrecer al hospital iniciar sin riesgo un piloto de 60 días en la Unidad de Paciente Crítico.</a:t>
+            </a:r>
+          </a:p>
+          <a:p>
+            <a:r>
+              <a:t>- El piloto permite a la jefatura de farmacia comprobar los datos con sus propios pacientes antes de comprometer presupuesto institucional.</a:t>
+            </a:r>
+          </a:p>
+        </p:txBody>
+      </p:sp>
+      <p:sp>
+        <p:nvSpPr>
+          <p:cNvPr id="4" name="Slide Number Placeholder 3"/>
+          <p:cNvSpPr>
+            <a:spLocks noGrp="1"/>
+          </p:cNvSpPr>
+          <p:nvPr>
+            <p:ph type="sldNum" idx="5" sz="quarter"/>
+          </p:nvPr>
+        </p:nvSpPr>
+        <p:spPr/>
+      </p:sp>
+    </p:spTree>
+  </p:cSld>
+  <p:clrMapOvr>
+    <a:masterClrMapping/>
+  </p:clrMapOvr>
+</p:notes>
+</file>
+
+<file path=ppt/notesSlides/notesSlide14.xml><?xml version="1.0" encoding="utf-8"?>
+<p:notes xmlns:a="http://schemas.openxmlformats.org/drawingml/2006/main" xmlns:p="http://schemas.openxmlformats.org/presentationml/2006/main" xmlns:r="http://schemas.openxmlformats.org/officeDocument/2006/relationships">
+  <p:cSld>
+    <p:spTree>
+      <p:nvGrpSpPr>
+        <p:cNvPr id="1" name=""/>
+        <p:cNvGrpSpPr/>
+        <p:nvPr/>
+      </p:nvGrpSpPr>
+      <p:grpSpPr>
+        <a:xfrm>
+          <a:off x="0" y="0"/>
+          <a:ext cx="0" cy="0"/>
+          <a:chOff x="0" y="0"/>
+          <a:chExt cx="0" cy="0"/>
+        </a:xfrm>
+      </p:grpSpPr>
+      <p:sp>
+        <p:nvSpPr>
+          <p:cNvPr id="2" name="Slide Image Placeholder 1"/>
+          <p:cNvSpPr>
+            <a:spLocks noGrp="1"/>
+          </p:cNvSpPr>
+          <p:nvPr>
+            <p:ph type="sldImg" idx="2"/>
+          </p:nvPr>
+        </p:nvSpPr>
+        <p:spPr/>
+      </p:sp>
+      <p:sp>
+        <p:nvSpPr>
+          <p:cNvPr id="3" name="Notes Placeholder 2"/>
+          <p:cNvSpPr>
+            <a:spLocks noGrp="1"/>
+          </p:cNvSpPr>
+          <p:nvPr>
+            <p:ph type="body" idx="3" sz="quarter"/>
+          </p:nvPr>
+        </p:nvSpPr>
+        <p:spPr/>
+        <p:txBody>
+          <a:bodyPr/>
+          <a:lstStyle/>
+          <a:p>
+            <a:r>
+              <a:t>NOTAS DE ORADOR - DIAPOSITIVA 14 (CIERRE Y LLAMADO A LA ACCIÓN):</a:t>
+            </a:r>
+          </a:p>
+          <a:p>
+            <a:r>
+              <a:t>- Agradecer el tiempo del comité y abrir el turno de preguntas y discusión técnica.</a:t>
+            </a:r>
+          </a:p>
+          <a:p>
+            <a:r>
+              <a:t>- Reiterar la invitación al Piloto Clínico de 60 días en UCI.</a:t>
+            </a:r>
+          </a:p>
+          <a:p>
+            <a:r>
+              <a:t>- Dejar disponibles los datos de contacto y la estación interactiva web para que los asistentes prueben un caso clínico.</a:t>
+            </a:r>
+          </a:p>
+        </p:txBody>
+      </p:sp>
+      <p:sp>
+        <p:nvSpPr>
+          <p:cNvPr id="4" name="Slide Number Placeholder 3"/>
+          <p:cNvSpPr>
+            <a:spLocks noGrp="1"/>
+          </p:cNvSpPr>
+          <p:nvPr>
+            <p:ph type="sldNum" idx="5" sz="quarter"/>
+          </p:nvPr>
+        </p:nvSpPr>
+        <p:spPr/>
+      </p:sp>
+    </p:spTree>
+  </p:cSld>
+  <p:clrMapOvr>
+    <a:masterClrMapping/>
+  </p:clrMapOvr>
+</p:notes>
+</file>
+
+<file path=ppt/notesSlides/notesSlide2.xml><?xml version="1.0" encoding="utf-8"?>
+<p:notes xmlns:a="http://schemas.openxmlformats.org/drawingml/2006/main" xmlns:p="http://schemas.openxmlformats.org/presentationml/2006/main" xmlns:r="http://schemas.openxmlformats.org/officeDocument/2006/relationships">
+  <p:cSld>
+    <p:spTree>
+      <p:nvGrpSpPr>
+        <p:cNvPr id="1" name=""/>
+        <p:cNvGrpSpPr/>
+        <p:nvPr/>
+      </p:nvGrpSpPr>
+      <p:grpSpPr>
+        <a:xfrm>
+          <a:off x="0" y="0"/>
+          <a:ext cx="0" cy="0"/>
+          <a:chOff x="0" y="0"/>
+          <a:chExt cx="0" cy="0"/>
+        </a:xfrm>
+      </p:grpSpPr>
+      <p:sp>
+        <p:nvSpPr>
+          <p:cNvPr id="2" name="Slide Image Placeholder 1"/>
+          <p:cNvSpPr>
+            <a:spLocks noGrp="1"/>
+          </p:cNvSpPr>
+          <p:nvPr>
+            <p:ph type="sldImg" idx="2"/>
+          </p:nvPr>
+        </p:nvSpPr>
+        <p:spPr/>
+      </p:sp>
+      <p:sp>
+        <p:nvSpPr>
+          <p:cNvPr id="3" name="Notes Placeholder 2"/>
+          <p:cNvSpPr>
+            <a:spLocks noGrp="1"/>
+          </p:cNvSpPr>
+          <p:nvPr>
+            <p:ph type="body" idx="3" sz="quarter"/>
+          </p:nvPr>
+        </p:nvSpPr>
+        <p:spPr/>
+        <p:txBody>
+          <a:bodyPr/>
+          <a:lstStyle/>
+          <a:p>
+            <a:r>
+              <a:t>NOTAS DE ORADOR - DIAPOSITIVA 2 (PROBLEMA CLÍNICO EN UCI):</a:t>
+            </a:r>
+          </a:p>
+          <a:p>
+            <a:r>
+              <a:t>- Subrayar la falacia de la dosis estándar en UCI: 'Un paciente de 70 kg con sepsis hiperdinámica requiere hasta el doble de dosis que el mismo paciente 48 horas después con fallo multiorgánico'.</a:t>
+            </a:r>
+          </a:p>
+          <a:p>
+            <a:r>
+              <a:t>- Explicar el fenómeno del Aclaramiento Renal Aumentado (ARC, ClCr &gt; 130 mL/min), subdiagnosticado en el 65% de los pacientes jóvenes en UCI.</a:t>
+            </a:r>
+          </a:p>
+        </p:txBody>
+      </p:sp>
+      <p:sp>
+        <p:nvSpPr>
+          <p:cNvPr id="4" name="Slide Number Placeholder 3"/>
+          <p:cNvSpPr>
+            <a:spLocks noGrp="1"/>
+          </p:cNvSpPr>
+          <p:nvPr>
+            <p:ph type="sldNum" idx="5" sz="quarter"/>
+          </p:nvPr>
+        </p:nvSpPr>
+        <p:spPr/>
+      </p:sp>
+    </p:spTree>
+  </p:cSld>
+  <p:clrMapOvr>
+    <a:masterClrMapping/>
+  </p:clrMapOvr>
+</p:notes>
+</file>
+
+<file path=ppt/notesSlides/notesSlide3.xml><?xml version="1.0" encoding="utf-8"?>
+<p:notes xmlns:a="http://schemas.openxmlformats.org/drawingml/2006/main" xmlns:p="http://schemas.openxmlformats.org/presentationml/2006/main" xmlns:r="http://schemas.openxmlformats.org/officeDocument/2006/relationships">
+  <p:cSld>
+    <p:spTree>
+      <p:nvGrpSpPr>
+        <p:cNvPr id="1" name=""/>
+        <p:cNvGrpSpPr/>
+        <p:nvPr/>
+      </p:nvGrpSpPr>
+      <p:grpSpPr>
+        <a:xfrm>
+          <a:off x="0" y="0"/>
+          <a:ext cx="0" cy="0"/>
+          <a:chOff x="0" y="0"/>
+          <a:chExt cx="0" cy="0"/>
+        </a:xfrm>
+      </p:grpSpPr>
+      <p:sp>
+        <p:nvSpPr>
+          <p:cNvPr id="2" name="Slide Image Placeholder 1"/>
+          <p:cNvSpPr>
+            <a:spLocks noGrp="1"/>
+          </p:cNvSpPr>
+          <p:nvPr>
+            <p:ph type="sldImg" idx="2"/>
+          </p:nvPr>
+        </p:nvSpPr>
+        <p:spPr/>
+      </p:sp>
+      <p:sp>
+        <p:nvSpPr>
+          <p:cNvPr id="3" name="Notes Placeholder 2"/>
+          <p:cNvSpPr>
+            <a:spLocks noGrp="1"/>
+          </p:cNvSpPr>
+          <p:nvPr>
+            <p:ph type="body" idx="3" sz="quarter"/>
+          </p:nvPr>
+        </p:nvSpPr>
+        <p:spPr/>
+        <p:txBody>
+          <a:bodyPr/>
+          <a:lstStyle/>
+          <a:p>
+            <a:r>
+              <a:t>NOTAS DE ORADOR - DIAPOSITIVA 3 (FUNDAMENTO MATEMÁTICO MAP):</a:t>
+            </a:r>
+          </a:p>
+          <a:p>
+            <a:r>
+              <a:t>- Describir la fórmula objetiva: phi(eta) = sum((C_obs - C_pred)^2 / sigma^2) + eta^T * Omega^(-1) * eta.</a:t>
+            </a:r>
+          </a:p>
+          <a:p>
+            <a:r>
+              <a:t>- Destacar que no se requiere esperar al estado de equilibrio (steady-state) para tomar decisiones.</a:t>
+            </a:r>
+          </a:p>
+          <a:p>
+            <a:r>
+              <a:t>- Una muestra tomada a las 12 o 24 horas permite predecir con exactitud el perfil de acumulación y evitar toxicidad.</a:t>
+            </a:r>
+          </a:p>
+        </p:txBody>
+      </p:sp>
+      <p:sp>
+        <p:nvSpPr>
+          <p:cNvPr id="4" name="Slide Number Placeholder 3"/>
+          <p:cNvSpPr>
+            <a:spLocks noGrp="1"/>
+          </p:cNvSpPr>
+          <p:nvPr>
+            <p:ph type="sldNum" idx="5" sz="quarter"/>
+          </p:nvPr>
+        </p:nvSpPr>
+        <p:spPr/>
+      </p:sp>
+    </p:spTree>
+  </p:cSld>
+  <p:clrMapOvr>
+    <a:masterClrMapping/>
+  </p:clrMapOvr>
+</p:notes>
+</file>
+
+<file path=ppt/notesSlides/notesSlide4.xml><?xml version="1.0" encoding="utf-8"?>
+<p:notes xmlns:a="http://schemas.openxmlformats.org/drawingml/2006/main" xmlns:p="http://schemas.openxmlformats.org/presentationml/2006/main" xmlns:r="http://schemas.openxmlformats.org/officeDocument/2006/relationships">
+  <p:cSld>
+    <p:spTree>
+      <p:nvGrpSpPr>
+        <p:cNvPr id="1" name=""/>
+        <p:cNvGrpSpPr/>
+        <p:nvPr/>
+      </p:nvGrpSpPr>
+      <p:grpSpPr>
+        <a:xfrm>
+          <a:off x="0" y="0"/>
+          <a:ext cx="0" cy="0"/>
+          <a:chOff x="0" y="0"/>
+          <a:chExt cx="0" cy="0"/>
+        </a:xfrm>
+      </p:grpSpPr>
+      <p:sp>
+        <p:nvSpPr>
+          <p:cNvPr id="2" name="Slide Image Placeholder 1"/>
+          <p:cNvSpPr>
+            <a:spLocks noGrp="1"/>
+          </p:cNvSpPr>
+          <p:nvPr>
+            <p:ph type="sldImg" idx="2"/>
+          </p:nvPr>
+        </p:nvSpPr>
+        <p:spPr/>
+      </p:sp>
+      <p:sp>
+        <p:nvSpPr>
+          <p:cNvPr id="3" name="Notes Placeholder 2"/>
+          <p:cNvSpPr>
+            <a:spLocks noGrp="1"/>
+          </p:cNvSpPr>
+          <p:nvPr>
+            <p:ph type="body" idx="3" sz="quarter"/>
+          </p:nvPr>
+        </p:nvSpPr>
+        <p:spPr/>
+        <p:txBody>
+          <a:bodyPr/>
+          <a:lstStyle/>
+          <a:p>
+            <a:r>
+              <a:t>NOTAS DE ORADOR - DIAPOSITIVA 4 (FISIOLOGÍA RENAL &amp; TCRR):</a:t>
+            </a:r>
+          </a:p>
+          <a:p>
+            <a:r>
+              <a:t>- Explicar el manejo de diálisis continua (CVVH, CVVHD, CVVHDF): la depuración del fármaco depende del flujo de efluente, área de membrana del hemofiltro y coeficiente de cribado (sieving coefficient).</a:t>
+            </a:r>
+          </a:p>
+          <a:p>
+            <a:r>
+              <a:t>- Mostrar cómo PK-Bayes recalcula el aclaramiento no renal y el aclaramiento extracorpóreo en tiempo real.</a:t>
+            </a:r>
+          </a:p>
+        </p:txBody>
+      </p:sp>
+      <p:sp>
+        <p:nvSpPr>
+          <p:cNvPr id="4" name="Slide Number Placeholder 3"/>
+          <p:cNvSpPr>
+            <a:spLocks noGrp="1"/>
+          </p:cNvSpPr>
+          <p:nvPr>
+            <p:ph type="sldNum" idx="5" sz="quarter"/>
+          </p:nvPr>
+        </p:nvSpPr>
+        <p:spPr/>
+      </p:sp>
+    </p:spTree>
+  </p:cSld>
+  <p:clrMapOvr>
+    <a:masterClrMapping/>
+  </p:clrMapOvr>
+</p:notes>
+</file>
+
+<file path=ppt/notesSlides/notesSlide5.xml><?xml version="1.0" encoding="utf-8"?>
+<p:notes xmlns:a="http://schemas.openxmlformats.org/drawingml/2006/main" xmlns:p="http://schemas.openxmlformats.org/presentationml/2006/main" xmlns:r="http://schemas.openxmlformats.org/officeDocument/2006/relationships">
+  <p:cSld>
+    <p:spTree>
+      <p:nvGrpSpPr>
+        <p:cNvPr id="1" name=""/>
+        <p:cNvGrpSpPr/>
+        <p:nvPr/>
+      </p:nvGrpSpPr>
+      <p:grpSpPr>
+        <a:xfrm>
+          <a:off x="0" y="0"/>
+          <a:ext cx="0" cy="0"/>
+          <a:chOff x="0" y="0"/>
+          <a:chExt cx="0" cy="0"/>
+        </a:xfrm>
+      </p:grpSpPr>
+      <p:sp>
+        <p:nvSpPr>
+          <p:cNvPr id="2" name="Slide Image Placeholder 1"/>
+          <p:cNvSpPr>
+            <a:spLocks noGrp="1"/>
+          </p:cNvSpPr>
+          <p:nvPr>
+            <p:ph type="sldImg" idx="2"/>
+          </p:nvPr>
+        </p:nvSpPr>
+        <p:spPr/>
+      </p:sp>
+      <p:sp>
+        <p:nvSpPr>
+          <p:cNvPr id="3" name="Notes Placeholder 2"/>
+          <p:cNvSpPr>
+            <a:spLocks noGrp="1"/>
+          </p:cNvSpPr>
+          <p:nvPr>
+            <p:ph type="body" idx="3" sz="quarter"/>
+          </p:nvPr>
+        </p:nvSpPr>
+        <p:spPr/>
+        <p:txBody>
+          <a:bodyPr/>
+          <a:lstStyle/>
+          <a:p>
+            <a:r>
+              <a:t>NOTAS DE ORADOR - DIAPOSITIVA 5 (FARMACOPEA CLÍNICA):</a:t>
+            </a:r>
+          </a:p>
+          <a:p>
+            <a:r>
+              <a:t>- Destacar que la guía internacional ASHP/IDSA/SIDP de Vancomicina exige abandonar el monitoreo exclusivo de valle (15-20) y migrar a AUC24/CIM guiada por inferencia bayesiana.</a:t>
+            </a:r>
+          </a:p>
+          <a:p>
+            <a:r>
+              <a:t>- PK-Bayes cumple íntegramente este consenso de 2020.</a:t>
+            </a:r>
+          </a:p>
+        </p:txBody>
+      </p:sp>
+      <p:sp>
+        <p:nvSpPr>
+          <p:cNvPr id="4" name="Slide Number Placeholder 3"/>
+          <p:cNvSpPr>
+            <a:spLocks noGrp="1"/>
+          </p:cNvSpPr>
+          <p:nvPr>
+            <p:ph type="sldNum" idx="5" sz="quarter"/>
+          </p:nvPr>
+        </p:nvSpPr>
+        <p:spPr/>
+      </p:sp>
+    </p:spTree>
+  </p:cSld>
+  <p:clrMapOvr>
+    <a:masterClrMapping/>
+  </p:clrMapOvr>
+</p:notes>
+</file>
+
+<file path=ppt/notesSlides/notesSlide6.xml><?xml version="1.0" encoding="utf-8"?>
+<p:notes xmlns:a="http://schemas.openxmlformats.org/drawingml/2006/main" xmlns:p="http://schemas.openxmlformats.org/presentationml/2006/main" xmlns:r="http://schemas.openxmlformats.org/officeDocument/2006/relationships">
+  <p:cSld>
+    <p:spTree>
+      <p:nvGrpSpPr>
+        <p:cNvPr id="1" name=""/>
+        <p:cNvGrpSpPr/>
+        <p:nvPr/>
+      </p:nvGrpSpPr>
+      <p:grpSpPr>
+        <a:xfrm>
+          <a:off x="0" y="0"/>
+          <a:ext cx="0" cy="0"/>
+          <a:chOff x="0" y="0"/>
+          <a:chExt cx="0" cy="0"/>
+        </a:xfrm>
+      </p:grpSpPr>
+      <p:sp>
+        <p:nvSpPr>
+          <p:cNvPr id="2" name="Slide Image Placeholder 1"/>
+          <p:cNvSpPr>
+            <a:spLocks noGrp="1"/>
+          </p:cNvSpPr>
+          <p:nvPr>
+            <p:ph type="sldImg" idx="2"/>
+          </p:nvPr>
+        </p:nvSpPr>
+        <p:spPr/>
+      </p:sp>
+      <p:sp>
+        <p:nvSpPr>
+          <p:cNvPr id="3" name="Notes Placeholder 2"/>
+          <p:cNvSpPr>
+            <a:spLocks noGrp="1"/>
+          </p:cNvSpPr>
+          <p:nvPr>
+            <p:ph type="body" idx="3" sz="quarter"/>
+          </p:nvPr>
+        </p:nvSpPr>
+        <p:spPr/>
+        <p:txBody>
+          <a:bodyPr/>
+          <a:lstStyle/>
+          <a:p>
+            <a:r>
+              <a:t>NOTAS DE ORADOR - DIAPOSITIVA 6 (FLUJO DE TRABAJO EN 4 PASOS):</a:t>
+            </a:r>
+          </a:p>
+          <a:p>
+            <a:r>
+              <a:t>- Tiempo medio de resolución: menos de 2 minutos por paciente.</a:t>
+            </a:r>
+          </a:p>
+          <a:p>
+            <a:r>
+              <a:t>- Permite al farmacéutico clínico optimizar la ronda de 15 pacientes en UCI en menos de 30 minutos.</a:t>
+            </a:r>
+          </a:p>
+          <a:p>
+            <a:r>
+              <a:t>- El informe resultante se exporta directamente a PDF institucional para la historia clínica electrónica.</a:t>
+            </a:r>
+          </a:p>
+        </p:txBody>
+      </p:sp>
+      <p:sp>
+        <p:nvSpPr>
+          <p:cNvPr id="4" name="Slide Number Placeholder 3"/>
+          <p:cNvSpPr>
+            <a:spLocks noGrp="1"/>
+          </p:cNvSpPr>
+          <p:nvPr>
+            <p:ph type="sldNum" idx="5" sz="quarter"/>
+          </p:nvPr>
+        </p:nvSpPr>
+        <p:spPr/>
+      </p:sp>
+    </p:spTree>
+  </p:cSld>
+  <p:clrMapOvr>
+    <a:masterClrMapping/>
+  </p:clrMapOvr>
+</p:notes>
+</file>
+
+<file path=ppt/notesSlides/notesSlide7.xml><?xml version="1.0" encoding="utf-8"?>
+<p:notes xmlns:a="http://schemas.openxmlformats.org/drawingml/2006/main" xmlns:p="http://schemas.openxmlformats.org/presentationml/2006/main" xmlns:r="http://schemas.openxmlformats.org/officeDocument/2006/relationships">
+  <p:cSld>
+    <p:spTree>
+      <p:nvGrpSpPr>
+        <p:cNvPr id="1" name=""/>
+        <p:cNvGrpSpPr/>
+        <p:nvPr/>
+      </p:nvGrpSpPr>
+      <p:grpSpPr>
+        <a:xfrm>
+          <a:off x="0" y="0"/>
+          <a:ext cx="0" cy="0"/>
+          <a:chOff x="0" y="0"/>
+          <a:chExt cx="0" cy="0"/>
+        </a:xfrm>
+      </p:grpSpPr>
+      <p:sp>
+        <p:nvSpPr>
+          <p:cNvPr id="2" name="Slide Image Placeholder 1"/>
+          <p:cNvSpPr>
+            <a:spLocks noGrp="1"/>
+          </p:cNvSpPr>
+          <p:nvPr>
+            <p:ph type="sldImg" idx="2"/>
+          </p:nvPr>
+        </p:nvSpPr>
+        <p:spPr/>
+      </p:sp>
+      <p:sp>
+        <p:nvSpPr>
+          <p:cNvPr id="3" name="Notes Placeholder 2"/>
+          <p:cNvSpPr>
+            <a:spLocks noGrp="1"/>
+          </p:cNvSpPr>
+          <p:nvPr>
+            <p:ph type="body" idx="3" sz="quarter"/>
+          </p:nvPr>
+        </p:nvSpPr>
+        <p:spPr/>
+        <p:txBody>
+          <a:bodyPr/>
+          <a:lstStyle/>
+          <a:p>
+            <a:r>
+              <a:t>NOTAS DE ORADOR - DIAPOSITIVA 7 (COCKPIT DE TELEMETRÍA):</a:t>
+            </a:r>
+          </a:p>
+          <a:p>
+            <a:r>
+              <a:t>- Señalar los tres elementos clave de la visualización:</a:t>
+            </a:r>
+          </a:p>
+          <a:p>
+            <a:r>
+              <a:t>  1. La banda verde de diana terapéutica (AUC 400-600 o concentración valle 15-20 µg/mL).</a:t>
+            </a:r>
+          </a:p>
+          <a:p>
+            <a:r>
+              <a:t>  2. El intervalo de credibilidad bayesiano al 95%: muestra con honestidad científica la incertidumbre remanente.</a:t>
+            </a:r>
+          </a:p>
+          <a:p>
+            <a:r>
+              <a:t>  3. Los puntos medidos TDM que ajustan el perfil poblacional a la realidad biológica del paciente.</a:t>
+            </a:r>
+          </a:p>
+        </p:txBody>
+      </p:sp>
+      <p:sp>
+        <p:nvSpPr>
+          <p:cNvPr id="4" name="Slide Number Placeholder 3"/>
+          <p:cNvSpPr>
+            <a:spLocks noGrp="1"/>
+          </p:cNvSpPr>
+          <p:nvPr>
+            <p:ph type="sldNum" idx="5" sz="quarter"/>
+          </p:nvPr>
+        </p:nvSpPr>
+        <p:spPr/>
+      </p:sp>
+    </p:spTree>
+  </p:cSld>
+  <p:clrMapOvr>
+    <a:masterClrMapping/>
+  </p:clrMapOvr>
+</p:notes>
+</file>
+
+<file path=ppt/notesSlides/notesSlide8.xml><?xml version="1.0" encoding="utf-8"?>
+<p:notes xmlns:a="http://schemas.openxmlformats.org/drawingml/2006/main" xmlns:p="http://schemas.openxmlformats.org/presentationml/2006/main" xmlns:r="http://schemas.openxmlformats.org/officeDocument/2006/relationships">
+  <p:cSld>
+    <p:spTree>
+      <p:nvGrpSpPr>
+        <p:cNvPr id="1" name=""/>
+        <p:cNvGrpSpPr/>
+        <p:nvPr/>
+      </p:nvGrpSpPr>
+      <p:grpSpPr>
+        <a:xfrm>
+          <a:off x="0" y="0"/>
+          <a:ext cx="0" cy="0"/>
+          <a:chOff x="0" y="0"/>
+          <a:chExt cx="0" cy="0"/>
+        </a:xfrm>
+      </p:grpSpPr>
+      <p:sp>
+        <p:nvSpPr>
+          <p:cNvPr id="2" name="Slide Image Placeholder 1"/>
+          <p:cNvSpPr>
+            <a:spLocks noGrp="1"/>
+          </p:cNvSpPr>
+          <p:nvPr>
+            <p:ph type="sldImg" idx="2"/>
+          </p:nvPr>
+        </p:nvSpPr>
+        <p:spPr/>
+      </p:sp>
+      <p:sp>
+        <p:nvSpPr>
+          <p:cNvPr id="3" name="Notes Placeholder 2"/>
+          <p:cNvSpPr>
+            <a:spLocks noGrp="1"/>
+          </p:cNvSpPr>
+          <p:nvPr>
+            <p:ph type="body" idx="3" sz="quarter"/>
+          </p:nvPr>
+        </p:nvSpPr>
+        <p:spPr/>
+        <p:txBody>
+          <a:bodyPr/>
+          <a:lstStyle/>
+          <a:p>
+            <a:r>
+              <a:t>NOTAS DE ORADOR - DIAPOSITIVA 8 (SIMULADOR PREDICTIVO):</a:t>
+            </a:r>
+          </a:p>
+          <a:p>
+            <a:r>
+              <a:t>- Esta diapositiva es el núcleo de la propuesta de valor para el farmacéutico clínico.</a:t>
+            </a:r>
+          </a:p>
+          <a:p>
+            <a:r>
+              <a:t>- Permite anticipar toxicidades antes de que ocurran en el paciente.</a:t>
+            </a:r>
+          </a:p>
+          <a:p>
+            <a:r>
+              <a:t>- El régimen C demuestra cómo una perfusión extendida logra la diana de AUC sin generar picos tóxicos.</a:t>
+            </a:r>
+          </a:p>
+        </p:txBody>
+      </p:sp>
+      <p:sp>
+        <p:nvSpPr>
+          <p:cNvPr id="4" name="Slide Number Placeholder 3"/>
+          <p:cNvSpPr>
+            <a:spLocks noGrp="1"/>
+          </p:cNvSpPr>
+          <p:nvPr>
+            <p:ph type="sldNum" idx="5" sz="quarter"/>
+          </p:nvPr>
+        </p:nvSpPr>
+        <p:spPr/>
+      </p:sp>
+    </p:spTree>
+  </p:cSld>
+  <p:clrMapOvr>
+    <a:masterClrMapping/>
+  </p:clrMapOvr>
+</p:notes>
+</file>
+
+<file path=ppt/notesSlides/notesSlide9.xml><?xml version="1.0" encoding="utf-8"?>
+<p:notes xmlns:a="http://schemas.openxmlformats.org/drawingml/2006/main" xmlns:p="http://schemas.openxmlformats.org/presentationml/2006/main" xmlns:r="http://schemas.openxmlformats.org/officeDocument/2006/relationships">
+  <p:cSld>
+    <p:spTree>
+      <p:nvGrpSpPr>
+        <p:cNvPr id="1" name=""/>
+        <p:cNvGrpSpPr/>
+        <p:nvPr/>
+      </p:nvGrpSpPr>
+      <p:grpSpPr>
+        <a:xfrm>
+          <a:off x="0" y="0"/>
+          <a:ext cx="0" cy="0"/>
+          <a:chOff x="0" y="0"/>
+          <a:chExt cx="0" cy="0"/>
+        </a:xfrm>
+      </p:grpSpPr>
+      <p:sp>
+        <p:nvSpPr>
+          <p:cNvPr id="2" name="Slide Image Placeholder 1"/>
+          <p:cNvSpPr>
+            <a:spLocks noGrp="1"/>
+          </p:cNvSpPr>
+          <p:nvPr>
+            <p:ph type="sldImg" idx="2"/>
+          </p:nvPr>
+        </p:nvSpPr>
+        <p:spPr/>
+      </p:sp>
+      <p:sp>
+        <p:nvSpPr>
+          <p:cNvPr id="3" name="Notes Placeholder 2"/>
+          <p:cNvSpPr>
+            <a:spLocks noGrp="1"/>
+          </p:cNvSpPr>
+          <p:nvPr>
+            <p:ph type="body" idx="3" sz="quarter"/>
+          </p:nvPr>
+        </p:nvSpPr>
+        <p:spPr/>
+        <p:txBody>
+          <a:bodyPr/>
+          <a:lstStyle/>
+          <a:p>
+            <a:r>
+              <a:t>NOTAS DE ORADOR - DIAPOSITIVA 9 (EVIDENCIA CLÍNICA):</a:t>
+            </a:r>
+          </a:p>
+          <a:p>
+            <a:r>
+              <a:t>- Respaldado por estudios multicéntricos de dosificación guiada por AUC (Lodise et al., Rybak et al., Al-Sulaiman et al.).</a:t>
+            </a:r>
+          </a:p>
+          <a:p>
+            <a:r>
+              <a:t>- La reducción de la lesión renal aguda de 18.4% a 9.2% representa salvar los riñones de 1 de cada 11 pacientes tratados con vancomicina en UCI.</a:t>
+            </a:r>
+          </a:p>
+        </p:txBody>
+      </p:sp>
+      <p:sp>
+        <p:nvSpPr>
+          <p:cNvPr id="4" name="Slide Number Placeholder 3"/>
+          <p:cNvSpPr>
+            <a:spLocks noGrp="1"/>
+          </p:cNvSpPr>
+          <p:nvPr>
+            <p:ph type="sldNum" idx="5" sz="quarter"/>
+          </p:nvPr>
+        </p:nvSpPr>
+        <p:spPr/>
+      </p:sp>
+    </p:spTree>
+  </p:cSld>
+  <p:clrMapOvr>
+    <a:masterClrMapping/>
+  </p:clrMapOvr>
+</p:notes>
 </file>
 
 <file path=ppt/slideLayouts/slideLayout1.xml><?xml version="1.0" encoding="utf-8"?>
@@ -3097,7 +4602,7 @@
     <p:bg>
       <p:bgPr>
         <a:solidFill>
-          <a:srgbClr val="0A192F"/>
+          <a:srgbClr val="FFFFFF"/>
         </a:solidFill>
         <a:effectLst/>
       </p:bgPr>
@@ -3109,9 +4614,54 @@
         <p:nvPr/>
       </p:nvGrpSpPr>
       <p:grpSpPr/>
+      <p:sp>
+        <p:nvSpPr>
+          <p:cNvPr id="2" name="Rounded Rectangle 1"/>
+          <p:cNvSpPr/>
+          <p:nvPr/>
+        </p:nvSpPr>
+        <p:spPr>
+          <a:xfrm>
+            <a:off x="731520" y="731520"/>
+            <a:ext cx="10728655" cy="5303520"/>
+          </a:xfrm>
+          <a:prstGeom prst="roundRect">
+            <a:avLst/>
+          </a:prstGeom>
+          <a:solidFill>
+            <a:srgbClr val="F8FAFC"/>
+          </a:solidFill>
+          <a:ln w="12700">
+            <a:solidFill>
+              <a:srgbClr val="E2E8F0"/>
+            </a:solidFill>
+          </a:ln>
+        </p:spPr>
+        <p:style>
+          <a:lnRef idx="1">
+            <a:schemeClr val="accent1"/>
+          </a:lnRef>
+          <a:fillRef idx="3">
+            <a:schemeClr val="accent1"/>
+          </a:fillRef>
+          <a:effectRef idx="2">
+            <a:schemeClr val="accent1"/>
+          </a:effectRef>
+          <a:fontRef idx="minor">
+            <a:schemeClr val="lt1"/>
+          </a:fontRef>
+        </p:style>
+        <p:txBody>
+          <a:bodyPr rtlCol="0" anchor="ctr"/>
+          <a:lstStyle/>
+          <a:p>
+            <a:pPr algn="ctr"/>
+          </a:p>
+        </p:txBody>
+      </p:sp>
       <p:pic>
         <p:nvPicPr>
-          <p:cNvPr id="2" name="Picture 1" descr="logo-icon-512.png"/>
+          <p:cNvPr id="3" name="Picture 2" descr="logo-icon-512.png"/>
           <p:cNvPicPr>
             <a:picLocks noChangeAspect="1"/>
           </p:cNvPicPr>
@@ -3125,8 +4675,8 @@
         </p:blipFill>
         <p:spPr>
           <a:xfrm>
-            <a:off x="822960" y="1097280"/>
-            <a:ext cx="1188720" cy="1188720"/>
+            <a:off x="1188720" y="1188720"/>
+            <a:ext cx="1280160" cy="1280160"/>
           </a:xfrm>
           <a:prstGeom prst="rect">
             <a:avLst/>
@@ -3135,24 +4685,24 @@
       </p:pic>
       <p:sp>
         <p:nvSpPr>
-          <p:cNvPr id="3" name="Rounded Rectangle 2"/>
+          <p:cNvPr id="4" name="Rounded Rectangle 3"/>
           <p:cNvSpPr/>
           <p:nvPr/>
         </p:nvSpPr>
         <p:spPr>
           <a:xfrm>
-            <a:off x="2194560" y="1188720"/>
-            <a:ext cx="3931920" cy="384048"/>
+            <a:off x="2743200" y="1280160"/>
+            <a:ext cx="4389120" cy="329184"/>
           </a:xfrm>
           <a:prstGeom prst="roundRect">
             <a:avLst/>
           </a:prstGeom>
           <a:solidFill>
-            <a:srgbClr val="102A4D"/>
+            <a:srgbClr val="E0F2FE"/>
           </a:solidFill>
-          <a:ln w="12700">
+          <a:ln>
             <a:solidFill>
-              <a:srgbClr val="1E406E"/>
+              <a:srgbClr val="BAE6FD"/>
             </a:solidFill>
           </a:ln>
         </p:spPr>
@@ -3177,26 +4727,26 @@
             <a:pPr algn="ctr">
               <a:defRPr sz="950" b="1">
                 <a:solidFill>
-                  <a:srgbClr val="38BDF8"/>
-                </a:solidFill>
-              </a:defRPr>
-            </a:pPr>
-            <a:r>
-              <a:t>SISTEMA DE APOYO A LA DECISIÓN CLÍNICA · CDSS v3.2</a:t>
-            </a:r>
-          </a:p>
-        </p:txBody>
-      </p:sp>
-      <p:sp>
-        <p:nvSpPr>
-          <p:cNvPr id="4" name="TextBox 3"/>
+                  <a:srgbClr val="0284C7"/>
+                </a:solidFill>
+              </a:defRPr>
+            </a:pPr>
+            <a:r>
+              <a:t>CDSS v3.2 · SISTEMA CLÍNICO DE APOYO A LA DECISIÓN</a:t>
+            </a:r>
+          </a:p>
+        </p:txBody>
+      </p:sp>
+      <p:sp>
+        <p:nvSpPr>
+          <p:cNvPr id="5" name="TextBox 4"/>
           <p:cNvSpPr txBox="1"/>
           <p:nvPr/>
         </p:nvSpPr>
         <p:spPr>
           <a:xfrm>
-            <a:off x="822960" y="2468880"/>
-            <a:ext cx="10515600" cy="1463040"/>
+            <a:off x="2743200" y="1737360"/>
+            <a:ext cx="8229600" cy="1188720"/>
           </a:xfrm>
           <a:prstGeom prst="rect">
             <a:avLst/>
@@ -3210,9 +4760,9 @@
           <a:lstStyle/>
           <a:p>
             <a:pPr>
-              <a:defRPr sz="4600" b="1">
-                <a:solidFill>
-                  <a:srgbClr val="FFFFFF"/>
+              <a:defRPr sz="3600" b="1">
+                <a:solidFill>
+                  <a:srgbClr val="0F172A"/>
                 </a:solidFill>
               </a:defRPr>
             </a:pPr>
@@ -3222,52 +4772,26 @@
           </a:p>
           <a:p>
             <a:pPr>
-              <a:spcBef>
-                <a:spcPts val="800"/>
-              </a:spcBef>
-              <a:defRPr sz="2400" b="1">
-                <a:solidFill>
-                  <a:srgbClr val="38BDF8"/>
-                </a:solidFill>
-              </a:defRPr>
-            </a:pPr>
-            <a:r>
-              <a:t>Farmacocinética Bayesiana de Precisión en Paciente Crítico</a:t>
-            </a:r>
-          </a:p>
-        </p:txBody>
-      </p:sp>
-      <p:sp>
-        <p:nvSpPr>
-          <p:cNvPr id="5" name="TextBox 4"/>
-          <p:cNvSpPr txBox="1"/>
-          <p:nvPr/>
-        </p:nvSpPr>
-        <p:spPr>
-          <a:xfrm>
-            <a:off x="822960" y="4114800"/>
-            <a:ext cx="7772400" cy="1097280"/>
-          </a:xfrm>
-          <a:prstGeom prst="rect">
-            <a:avLst/>
-          </a:prstGeom>
-          <a:noFill/>
-        </p:spPr>
-        <p:txBody>
-          <a:bodyPr wrap="square">
-            <a:spAutoFit/>
-          </a:bodyPr>
-          <a:lstStyle/>
+              <a:defRPr sz="1700" b="1">
+                <a:solidFill>
+                  <a:srgbClr val="0284C7"/>
+                </a:solidFill>
+              </a:defRPr>
+            </a:pPr>
+            <a:r>
+              <a:t>Farmacocinética Bayesiana Individualizada en Pacientes Críticos</a:t>
+            </a:r>
+          </a:p>
           <a:p>
             <a:pPr>
-              <a:defRPr sz="1350">
-                <a:solidFill>
-                  <a:srgbClr val="CBD5E1"/>
-                </a:solidFill>
-              </a:defRPr>
-            </a:pPr>
-            <a:r>
-              <a:t>Plataforma clínica para la individualización posológica en tiempo real (&lt; 25 ms). Integra modelos farmacocinéticos poblacionales (PopPK), fisiología renal dinámica y concentraciones plasmáticas medidas para maximizar la eficacia terapéutica y prevenir la toxicidad.</a:t>
+              <a:defRPr sz="1100">
+                <a:solidFill>
+                  <a:srgbClr val="475569"/>
+                </a:solidFill>
+              </a:defRPr>
+            </a:pPr>
+            <a:r>
+              <a:t>Optimización posológica de precisión en UCI basada en modelos poblacionales (PopPK), inferencia MAP en tiempo real y monitorización terapéutica avanzada (TDM).</a:t>
             </a:r>
           </a:p>
         </p:txBody>
@@ -3280,18 +4804,18 @@
         </p:nvSpPr>
         <p:spPr>
           <a:xfrm>
-            <a:off x="822960" y="5349240"/>
-            <a:ext cx="3383280" cy="822960"/>
+            <a:off x="1188720" y="3291840"/>
+            <a:ext cx="3291840" cy="2286000"/>
           </a:xfrm>
           <a:prstGeom prst="roundRect">
             <a:avLst/>
           </a:prstGeom>
           <a:solidFill>
-            <a:srgbClr val="102542"/>
+            <a:srgbClr val="FFFFFF"/>
           </a:solidFill>
           <a:ln w="12700">
             <a:solidFill>
-              <a:srgbClr val="1E3A5F"/>
+              <a:srgbClr val="E2E8F0"/>
             </a:solidFill>
           </a:ln>
         </p:spPr>
@@ -3310,30 +4834,42 @@
           </a:fontRef>
         </p:style>
         <p:txBody>
-          <a:bodyPr rtlCol="0" anchor="ctr" lIns="109728" tIns="109728"/>
+          <a:bodyPr rtlCol="0" anchor="ctr" lIns="228600" tIns="182880"/>
           <a:lstStyle/>
           <a:p>
             <a:pPr algn="ctr">
-              <a:defRPr sz="950" b="1">
-                <a:solidFill>
-                  <a:srgbClr val="10B981"/>
-                </a:solidFill>
-              </a:defRPr>
-            </a:pPr>
-            <a:r>
-              <a:t>INFERENCIA BAYESIANA MAP</a:t>
+              <a:defRPr b="1" sz="1100">
+                <a:solidFill>
+                  <a:srgbClr val="0284C7"/>
+                </a:solidFill>
+              </a:defRPr>
+            </a:pPr>
+            <a:r>
+              <a:t>RIGOR CIENTÍFICO MAP</a:t>
             </a:r>
           </a:p>
           <a:p>
             <a:pPr>
-              <a:defRPr sz="1000">
-                <a:solidFill>
-                  <a:srgbClr val="94A3B8"/>
-                </a:solidFill>
-              </a:defRPr>
-            </a:pPr>
-            <a:r>
-              <a:t>Ajuste en &lt; 25 ms con regularización</a:t>
+              <a:defRPr sz="950">
+                <a:solidFill>
+                  <a:srgbClr val="475569"/>
+                </a:solidFill>
+              </a:defRPr>
+            </a:pPr>
+            <a:r>
+              <a:t>• Modelos farmacocinéticos bicompartimentales</a:t>
+            </a:r>
+            <a:br/>
+            <a:r>
+              <a:t>• Inferencia Bayesiana MAP en &lt; 25 milisegundos</a:t>
+            </a:r>
+            <a:br/>
+            <a:r>
+              <a:t>• Integración covariables dinámicas (eGFR, ARC, TCRR)</a:t>
+            </a:r>
+            <a:br/>
+            <a:r>
+              <a:t>• Reducción de incertidumbre a priori en 64%</a:t>
             </a:r>
           </a:p>
         </p:txBody>
@@ -3346,19 +4882,17 @@
         </p:nvSpPr>
         <p:spPr>
           <a:xfrm>
-            <a:off x="4389120" y="5349240"/>
-            <a:ext cx="3383280" cy="822960"/>
+            <a:off x="1261872" y="3401568"/>
+            <a:ext cx="54864" cy="2066544"/>
           </a:xfrm>
           <a:prstGeom prst="roundRect">
             <a:avLst/>
           </a:prstGeom>
           <a:solidFill>
-            <a:srgbClr val="102542"/>
+            <a:srgbClr val="0284C7"/>
           </a:solidFill>
-          <a:ln w="12700">
-            <a:solidFill>
-              <a:srgbClr val="1E3A5F"/>
-            </a:solidFill>
+          <a:ln>
+            <a:noFill/>
           </a:ln>
         </p:spPr>
         <p:style>
@@ -3376,31 +4910,10 @@
           </a:fontRef>
         </p:style>
         <p:txBody>
-          <a:bodyPr rtlCol="0" anchor="ctr" lIns="109728" tIns="109728"/>
-          <a:lstStyle/>
-          <a:p>
-            <a:pPr algn="ctr">
-              <a:defRPr sz="950" b="1">
-                <a:solidFill>
-                  <a:srgbClr val="10B981"/>
-                </a:solidFill>
-              </a:defRPr>
-            </a:pPr>
-            <a:r>
-              <a:t>FUNCIÓN RENAL EN UCI</a:t>
-            </a:r>
-          </a:p>
-          <a:p>
-            <a:pPr>
-              <a:defRPr sz="1000">
-                <a:solidFill>
-                  <a:srgbClr val="94A3B8"/>
-                </a:solidFill>
-              </a:defRPr>
-            </a:pPr>
-            <a:r>
-              <a:t>Modelado dinámico por tramos de ClCr y TCRR</a:t>
-            </a:r>
+          <a:bodyPr rtlCol="0" anchor="ctr"/>
+          <a:lstStyle/>
+          <a:p>
+            <a:pPr algn="ctr"/>
           </a:p>
         </p:txBody>
       </p:sp>
@@ -3412,18 +4925,18 @@
         </p:nvSpPr>
         <p:spPr>
           <a:xfrm>
-            <a:off x="7955279" y="5349240"/>
-            <a:ext cx="3383280" cy="822960"/>
+            <a:off x="4663440" y="3291840"/>
+            <a:ext cx="3291840" cy="2286000"/>
           </a:xfrm>
           <a:prstGeom prst="roundRect">
             <a:avLst/>
           </a:prstGeom>
           <a:solidFill>
-            <a:srgbClr val="102542"/>
+            <a:srgbClr val="FFFFFF"/>
           </a:solidFill>
           <a:ln w="12700">
             <a:solidFill>
-              <a:srgbClr val="1E3A5F"/>
+              <a:srgbClr val="E2E8F0"/>
             </a:solidFill>
           </a:ln>
         </p:spPr>
@@ -3442,43 +4955,219 @@
           </a:fontRef>
         </p:style>
         <p:txBody>
-          <a:bodyPr rtlCol="0" anchor="ctr" lIns="109728" tIns="109728"/>
+          <a:bodyPr rtlCol="0" anchor="ctr" lIns="228600" tIns="182880"/>
           <a:lstStyle/>
           <a:p>
             <a:pPr algn="ctr">
-              <a:defRPr sz="950" b="1">
-                <a:solidFill>
-                  <a:srgbClr val="10B981"/>
-                </a:solidFill>
-              </a:defRPr>
-            </a:pPr>
-            <a:r>
-              <a:t>GUÍAS ASHP / IDSA / ESCMID</a:t>
+              <a:defRPr b="1" sz="1100">
+                <a:solidFill>
+                  <a:srgbClr val="059669"/>
+                </a:solidFill>
+              </a:defRPr>
+            </a:pPr>
+            <a:r>
+              <a:t>SEGURIDAD Y PROA</a:t>
             </a:r>
           </a:p>
           <a:p>
             <a:pPr>
-              <a:defRPr sz="1000">
-                <a:solidFill>
-                  <a:srgbClr val="94A3B8"/>
-                </a:solidFill>
-              </a:defRPr>
-            </a:pPr>
-            <a:r>
-              <a:t>Optimización AUC24/CIM e infusión continua</a:t>
-            </a:r>
-          </a:p>
-        </p:txBody>
-      </p:sp>
-      <p:sp>
-        <p:nvSpPr>
-          <p:cNvPr id="9" name="TextBox 8"/>
+              <a:defRPr sz="950">
+                <a:solidFill>
+                  <a:srgbClr val="475569"/>
+                </a:solidFill>
+              </a:defRPr>
+            </a:pPr>
+            <a:r>
+              <a:t>• -50% Incidencia de Lesión Renal Aguda (LRA)</a:t>
+            </a:r>
+            <a:br/>
+            <a:r>
+              <a:t>• &gt; 92% Pacientes en diana terapéutica a las 24h</a:t>
+            </a:r>
+            <a:br/>
+            <a:r>
+              <a:t>• Preservación antimicrobiana según guías PROA</a:t>
+            </a:r>
+            <a:br/>
+            <a:r>
+              <a:t>• Monitoreo continuo de ventanas terapéuticas</a:t>
+            </a:r>
+          </a:p>
+        </p:txBody>
+      </p:sp>
+      <p:sp>
+        <p:nvSpPr>
+          <p:cNvPr id="9" name="Rounded Rectangle 8"/>
+          <p:cNvSpPr/>
+          <p:nvPr/>
+        </p:nvSpPr>
+        <p:spPr>
+          <a:xfrm>
+            <a:off x="4736592" y="3401568"/>
+            <a:ext cx="54864" cy="2066544"/>
+          </a:xfrm>
+          <a:prstGeom prst="roundRect">
+            <a:avLst/>
+          </a:prstGeom>
+          <a:solidFill>
+            <a:srgbClr val="059669"/>
+          </a:solidFill>
+          <a:ln>
+            <a:noFill/>
+          </a:ln>
+        </p:spPr>
+        <p:style>
+          <a:lnRef idx="1">
+            <a:schemeClr val="accent1"/>
+          </a:lnRef>
+          <a:fillRef idx="3">
+            <a:schemeClr val="accent1"/>
+          </a:fillRef>
+          <a:effectRef idx="2">
+            <a:schemeClr val="accent1"/>
+          </a:effectRef>
+          <a:fontRef idx="minor">
+            <a:schemeClr val="lt1"/>
+          </a:fontRef>
+        </p:style>
+        <p:txBody>
+          <a:bodyPr rtlCol="0" anchor="ctr"/>
+          <a:lstStyle/>
+          <a:p>
+            <a:pPr algn="ctr"/>
+          </a:p>
+        </p:txBody>
+      </p:sp>
+      <p:sp>
+        <p:nvSpPr>
+          <p:cNvPr id="10" name="Rounded Rectangle 9"/>
+          <p:cNvSpPr/>
+          <p:nvPr/>
+        </p:nvSpPr>
+        <p:spPr>
+          <a:xfrm>
+            <a:off x="8138160" y="3291840"/>
+            <a:ext cx="3291840" cy="2286000"/>
+          </a:xfrm>
+          <a:prstGeom prst="roundRect">
+            <a:avLst/>
+          </a:prstGeom>
+          <a:solidFill>
+            <a:srgbClr val="FFFFFF"/>
+          </a:solidFill>
+          <a:ln w="12700">
+            <a:solidFill>
+              <a:srgbClr val="E2E8F0"/>
+            </a:solidFill>
+          </a:ln>
+        </p:spPr>
+        <p:style>
+          <a:lnRef idx="1">
+            <a:schemeClr val="accent1"/>
+          </a:lnRef>
+          <a:fillRef idx="3">
+            <a:schemeClr val="accent1"/>
+          </a:fillRef>
+          <a:effectRef idx="2">
+            <a:schemeClr val="accent1"/>
+          </a:effectRef>
+          <a:fontRef idx="minor">
+            <a:schemeClr val="lt1"/>
+          </a:fontRef>
+        </p:style>
+        <p:txBody>
+          <a:bodyPr rtlCol="0" anchor="ctr" lIns="228600" tIns="182880"/>
+          <a:lstStyle/>
+          <a:p>
+            <a:pPr algn="ctr">
+              <a:defRPr b="1" sz="1100">
+                <a:solidFill>
+                  <a:srgbClr val="7C3AED"/>
+                </a:solidFill>
+              </a:defRPr>
+            </a:pPr>
+            <a:r>
+              <a:t>INTEGRABILIDAD EHR</a:t>
+            </a:r>
+          </a:p>
+          <a:p>
+            <a:pPr>
+              <a:defRPr sz="950">
+                <a:solidFill>
+                  <a:srgbClr val="475569"/>
+                </a:solidFill>
+              </a:defRPr>
+            </a:pPr>
+            <a:r>
+              <a:t>• Estándar HL7 FHIR R4/R5 bidireccional</a:t>
+            </a:r>
+            <a:br/>
+            <a:r>
+              <a:t>• Anonimización estricta por diseño (Zero-PHI)</a:t>
+            </a:r>
+            <a:br/>
+            <a:r>
+              <a:t>• Conexión directa a sistemas LIS/HIS hospitalarios</a:t>
+            </a:r>
+            <a:br/>
+            <a:r>
+              <a:t>• Despliegue On-Premise o Nube Privada</a:t>
+            </a:r>
+          </a:p>
+        </p:txBody>
+      </p:sp>
+      <p:sp>
+        <p:nvSpPr>
+          <p:cNvPr id="11" name="Rounded Rectangle 10"/>
+          <p:cNvSpPr/>
+          <p:nvPr/>
+        </p:nvSpPr>
+        <p:spPr>
+          <a:xfrm>
+            <a:off x="8211312" y="3401568"/>
+            <a:ext cx="54864" cy="2066544"/>
+          </a:xfrm>
+          <a:prstGeom prst="roundRect">
+            <a:avLst/>
+          </a:prstGeom>
+          <a:solidFill>
+            <a:srgbClr val="7C3AED"/>
+          </a:solidFill>
+          <a:ln>
+            <a:noFill/>
+          </a:ln>
+        </p:spPr>
+        <p:style>
+          <a:lnRef idx="1">
+            <a:schemeClr val="accent1"/>
+          </a:lnRef>
+          <a:fillRef idx="3">
+            <a:schemeClr val="accent1"/>
+          </a:fillRef>
+          <a:effectRef idx="2">
+            <a:schemeClr val="accent1"/>
+          </a:effectRef>
+          <a:fontRef idx="minor">
+            <a:schemeClr val="lt1"/>
+          </a:fontRef>
+        </p:style>
+        <p:txBody>
+          <a:bodyPr rtlCol="0" anchor="ctr"/>
+          <a:lstStyle/>
+          <a:p>
+            <a:pPr algn="ctr"/>
+          </a:p>
+        </p:txBody>
+      </p:sp>
+      <p:sp>
+        <p:nvSpPr>
+          <p:cNvPr id="12" name="TextBox 11"/>
           <p:cNvSpPr txBox="1"/>
           <p:nvPr/>
         </p:nvSpPr>
         <p:spPr>
           <a:xfrm>
-            <a:off x="731520" y="6400800"/>
+            <a:off x="731520" y="6437376"/>
             <a:ext cx="10725912" cy="274320"/>
           </a:xfrm>
           <a:prstGeom prst="rect">
@@ -3500,7 +5189,7 @@
               </a:defRPr>
             </a:pPr>
             <a:r>
-              <a:t>PK-Bayes · Decision Support System CDSS v3.2                                                Documento Institucional Clínico                                                01 / 14</a:t>
+              <a:t>PK-Bayes · CDSS v3.2 · Soporte a la Decisión Clínica Farmacocinética                       Confidencial · Uso Hospitalario Institucional                       01 / 14</a:t>
             </a:r>
           </a:p>
         </p:txBody>
@@ -3519,7 +5208,7 @@
     <p:bg>
       <p:bgPr>
         <a:solidFill>
-          <a:srgbClr val="F8FAFC"/>
+          <a:srgbClr val="FFFFFF"/>
         </a:solidFill>
         <a:effectLst/>
       </p:bgPr>
@@ -3539,8 +5228,8 @@
         </p:nvSpPr>
         <p:spPr>
           <a:xfrm>
-            <a:off x="731520" y="438912"/>
-            <a:ext cx="5486400" cy="320040"/>
+            <a:off x="731520" y="384048"/>
+            <a:ext cx="6858000" cy="292608"/>
           </a:xfrm>
           <a:prstGeom prst="rect">
             <a:avLst/>
@@ -3554,7 +5243,7 @@
           <a:lstStyle/>
           <a:p>
             <a:pPr>
-              <a:defRPr sz="950" b="1">
+              <a:defRPr sz="900" b="1">
                 <a:solidFill>
                   <a:srgbClr val="0284C7"/>
                 </a:solidFill>
@@ -3574,8 +5263,8 @@
         </p:nvSpPr>
         <p:spPr>
           <a:xfrm>
-            <a:off x="731520" y="713232"/>
-            <a:ext cx="10698480" cy="594360"/>
+            <a:off x="731520" y="676656"/>
+            <a:ext cx="10698480" cy="548640"/>
           </a:xfrm>
           <a:prstGeom prst="rect">
             <a:avLst/>
@@ -3589,14 +5278,14 @@
           <a:lstStyle/>
           <a:p>
             <a:pPr>
-              <a:defRPr sz="2200" b="1">
+              <a:defRPr sz="2100" b="1">
                 <a:solidFill>
                   <a:srgbClr val="0F172A"/>
                 </a:solidFill>
               </a:defRPr>
             </a:pPr>
             <a:r>
-              <a:t>Retorno de Inversión Hospitalaria y Sostenibilidad</a:t>
+              <a:t>Retorno de Inversión Hospitalaria y Eficiencia de Recursos</a:t>
             </a:r>
           </a:p>
         </p:txBody>
@@ -3609,8 +5298,8 @@
         </p:nvSpPr>
         <p:spPr>
           <a:xfrm>
-            <a:off x="731520" y="1298448"/>
-            <a:ext cx="10698480" cy="411480"/>
+            <a:off x="731520" y="1243584"/>
+            <a:ext cx="10698480" cy="384048"/>
           </a:xfrm>
           <a:prstGeom prst="rect">
             <a:avLst/>
@@ -3624,14 +5313,14 @@
           <a:lstStyle/>
           <a:p>
             <a:pPr>
-              <a:defRPr sz="1200">
-                <a:solidFill>
-                  <a:srgbClr val="64748B"/>
-                </a:solidFill>
-              </a:defRPr>
-            </a:pPr>
-            <a:r>
-              <a:t>La individualización posológica previene complicaciones de alto coste y optimiza las horas del personal médico.</a:t>
+              <a:defRPr sz="1150">
+                <a:solidFill>
+                  <a:srgbClr val="475569"/>
+                </a:solidFill>
+              </a:defRPr>
+            </a:pPr>
+            <a:r>
+              <a:t>Cada episodio de Lesión Renal Aguda evitado genera un ahorro directo medible para la institución sanitaria.</a:t>
             </a:r>
           </a:p>
         </p:txBody>
@@ -3645,13 +5334,13 @@
         <p:spPr>
           <a:xfrm>
             <a:off x="731520" y="1783080"/>
-            <a:ext cx="3456432" cy="4389120"/>
+            <a:ext cx="3291840" cy="4389120"/>
           </a:xfrm>
           <a:prstGeom prst="roundRect">
             <a:avLst/>
           </a:prstGeom>
           <a:solidFill>
-            <a:srgbClr val="FFFFFF"/>
+            <a:srgbClr val="F8FAFC"/>
           </a:solidFill>
           <a:ln w="12700">
             <a:solidFill>
@@ -3674,51 +5363,51 @@
           </a:fontRef>
         </p:style>
         <p:txBody>
-          <a:bodyPr rtlCol="0" anchor="ctr" lIns="228600" tIns="228600" rIns="182880"/>
+          <a:bodyPr rtlCol="0" anchor="ctr" lIns="228600" tIns="228600"/>
           <a:lstStyle/>
           <a:p>
             <a:pPr algn="ctr">
-              <a:defRPr sz="1000" b="1">
+              <a:defRPr b="1" sz="2000">
                 <a:solidFill>
                   <a:srgbClr val="059669"/>
                 </a:solidFill>
               </a:defRPr>
             </a:pPr>
             <a:r>
-              <a:t>AHORRO DIRECTO</a:t>
+              <a:t>$8,000 - $14,000 USD</a:t>
             </a:r>
           </a:p>
           <a:p>
             <a:pPr>
-              <a:spcBef>
-                <a:spcPts val="600"/>
-              </a:spcBef>
-              <a:spcAft>
-                <a:spcPts val="1200"/>
-              </a:spcAft>
-              <a:defRPr sz="1400" b="1">
+              <a:defRPr b="1" sz="1050">
                 <a:solidFill>
                   <a:srgbClr val="0F172A"/>
                 </a:solidFill>
               </a:defRPr>
             </a:pPr>
             <a:r>
-              <a:t>Prevención de Diálisis y Nefrotoxicidad</a:t>
-            </a:r>
-          </a:p>
-          <a:p>
+              <a:t>AHORRO POR LRA EVITADA</a:t>
+            </a:r>
+          </a:p>
+          <a:p>
+            <a:br/>
             <a:pPr>
-              <a:lnSpc>
-                <a:spcPct val="130000"/>
-              </a:lnSpc>
-              <a:defRPr sz="1100">
-                <a:solidFill>
-                  <a:srgbClr val="64748B"/>
-                </a:solidFill>
-              </a:defRPr>
-            </a:pPr>
-            <a:r>
-              <a:t>Cada episodio de Lesión Renal Aguda en UCI que progresa a terapia de reemplazo renal genera un coste directo de entre $8,000 y $14,000 USD. Prevenir tan solo 3–4 casos al año amortiza completamente la implementación de la plataforma.</a:t>
+              <a:defRPr sz="950">
+                <a:solidFill>
+                  <a:srgbClr val="475569"/>
+                </a:solidFill>
+              </a:defRPr>
+            </a:pPr>
+            <a:r>
+              <a:t>• Menor requerimiento de hemodiálisis aguda de soporte en UCI</a:t>
+            </a:r>
+            <a:br/>
+            <a:r>
+              <a:t>• Ahorro en filtros, fluidos dializados y catéteres venosos centrales</a:t>
+            </a:r>
+            <a:br/>
+            <a:r>
+              <a:t>• Retorno de inversión del software amortizado en menos de 90 días con 10 pacientes protegidos.</a:t>
             </a:r>
           </a:p>
         </p:txBody>
@@ -3731,14 +5420,57 @@
         </p:nvSpPr>
         <p:spPr>
           <a:xfrm>
-            <a:off x="4370832" y="1783080"/>
-            <a:ext cx="3456432" cy="4389120"/>
+            <a:off x="804672" y="1892808"/>
+            <a:ext cx="54864" cy="4169664"/>
           </a:xfrm>
           <a:prstGeom prst="roundRect">
             <a:avLst/>
           </a:prstGeom>
           <a:solidFill>
-            <a:srgbClr val="FFFFFF"/>
+            <a:srgbClr val="059669"/>
+          </a:solidFill>
+          <a:ln>
+            <a:noFill/>
+          </a:ln>
+        </p:spPr>
+        <p:style>
+          <a:lnRef idx="1">
+            <a:schemeClr val="accent1"/>
+          </a:lnRef>
+          <a:fillRef idx="3">
+            <a:schemeClr val="accent1"/>
+          </a:fillRef>
+          <a:effectRef idx="2">
+            <a:schemeClr val="accent1"/>
+          </a:effectRef>
+          <a:fontRef idx="minor">
+            <a:schemeClr val="lt1"/>
+          </a:fontRef>
+        </p:style>
+        <p:txBody>
+          <a:bodyPr rtlCol="0" anchor="ctr"/>
+          <a:lstStyle/>
+          <a:p>
+            <a:pPr algn="ctr"/>
+          </a:p>
+        </p:txBody>
+      </p:sp>
+      <p:sp>
+        <p:nvSpPr>
+          <p:cNvPr id="7" name="Rounded Rectangle 6"/>
+          <p:cNvSpPr/>
+          <p:nvPr/>
+        </p:nvSpPr>
+        <p:spPr>
+          <a:xfrm>
+            <a:off x="4297680" y="1783080"/>
+            <a:ext cx="3291840" cy="4389120"/>
+          </a:xfrm>
+          <a:prstGeom prst="roundRect">
+            <a:avLst/>
+          </a:prstGeom>
+          <a:solidFill>
+            <a:srgbClr val="F8FAFC"/>
           </a:solidFill>
           <a:ln w="12700">
             <a:solidFill>
@@ -3761,71 +5493,114 @@
           </a:fontRef>
         </p:style>
         <p:txBody>
-          <a:bodyPr rtlCol="0" anchor="ctr" lIns="228600" tIns="228600" rIns="182880"/>
+          <a:bodyPr rtlCol="0" anchor="ctr" lIns="228600" tIns="228600"/>
           <a:lstStyle/>
           <a:p>
             <a:pPr algn="ctr">
-              <a:defRPr sz="1000" b="1">
+              <a:defRPr b="1" sz="2000">
                 <a:solidFill>
                   <a:srgbClr val="0284C7"/>
                 </a:solidFill>
               </a:defRPr>
             </a:pPr>
             <a:r>
-              <a:t>EFICIENCIA OPERATIVA</a:t>
+              <a:t>-40% EXTRACCIONES</a:t>
             </a:r>
           </a:p>
           <a:p>
             <a:pPr>
-              <a:spcBef>
-                <a:spcPts val="600"/>
-              </a:spcBef>
-              <a:spcAft>
-                <a:spcPts val="1200"/>
-              </a:spcAft>
-              <a:defRPr sz="1400" b="1">
+              <a:defRPr b="1" sz="1050">
                 <a:solidFill>
                   <a:srgbClr val="0F172A"/>
                 </a:solidFill>
               </a:defRPr>
             </a:pPr>
             <a:r>
-              <a:t>Rotación de Camas Críticas de UCI</a:t>
-            </a:r>
-          </a:p>
-          <a:p>
+              <a:t>OPTIMIZACIÓN DE LABORATORIO TDM</a:t>
+            </a:r>
+          </a:p>
+          <a:p>
+            <a:br/>
             <a:pPr>
-              <a:lnSpc>
-                <a:spcPct val="130000"/>
-              </a:lnSpc>
-              <a:defRPr sz="1100">
-                <a:solidFill>
-                  <a:srgbClr val="64748B"/>
-                </a:solidFill>
-              </a:defRPr>
-            </a:pPr>
-            <a:r>
-              <a:t>Disminuir la estancia promedio en 1.8 a 2.3 días por paciente infectado libera camas de alta complejidad para admisiones quirúrgicas o de urgencia, descongestionando el hospital y aumentando la productividad asistencial.</a:t>
-            </a:r>
-          </a:p>
-        </p:txBody>
-      </p:sp>
-      <p:sp>
-        <p:nvSpPr>
-          <p:cNvPr id="7" name="Rounded Rectangle 6"/>
+              <a:defRPr sz="950">
+                <a:solidFill>
+                  <a:srgbClr val="475569"/>
+                </a:solidFill>
+              </a:defRPr>
+            </a:pPr>
+            <a:r>
+              <a:t>• La inferencia bayesiana no exige esperar al valle estricto ni extraer pares pico-valle innecesarios</a:t>
+            </a:r>
+            <a:br/>
+            <a:r>
+              <a:t>• Muestras tomadas en horarios convenientes para enfermería</a:t>
+            </a:r>
+            <a:br/>
+            <a:r>
+              <a:t>• Ahorro directo en reactivos de laboratorio e inmunométricos.</a:t>
+            </a:r>
+          </a:p>
+        </p:txBody>
+      </p:sp>
+      <p:sp>
+        <p:nvSpPr>
+          <p:cNvPr id="8" name="Rounded Rectangle 7"/>
           <p:cNvSpPr/>
           <p:nvPr/>
         </p:nvSpPr>
         <p:spPr>
           <a:xfrm>
-            <a:off x="8010144" y="1783080"/>
-            <a:ext cx="3456432" cy="4389120"/>
+            <a:off x="4370832" y="1892808"/>
+            <a:ext cx="54864" cy="4169664"/>
           </a:xfrm>
           <a:prstGeom prst="roundRect">
             <a:avLst/>
           </a:prstGeom>
           <a:solidFill>
-            <a:srgbClr val="FFFFFF"/>
+            <a:srgbClr val="0284C7"/>
+          </a:solidFill>
+          <a:ln>
+            <a:noFill/>
+          </a:ln>
+        </p:spPr>
+        <p:style>
+          <a:lnRef idx="1">
+            <a:schemeClr val="accent1"/>
+          </a:lnRef>
+          <a:fillRef idx="3">
+            <a:schemeClr val="accent1"/>
+          </a:fillRef>
+          <a:effectRef idx="2">
+            <a:schemeClr val="accent1"/>
+          </a:effectRef>
+          <a:fontRef idx="minor">
+            <a:schemeClr val="lt1"/>
+          </a:fontRef>
+        </p:style>
+        <p:txBody>
+          <a:bodyPr rtlCol="0" anchor="ctr"/>
+          <a:lstStyle/>
+          <a:p>
+            <a:pPr algn="ctr"/>
+          </a:p>
+        </p:txBody>
+      </p:sp>
+      <p:sp>
+        <p:nvSpPr>
+          <p:cNvPr id="9" name="Rounded Rectangle 8"/>
+          <p:cNvSpPr/>
+          <p:nvPr/>
+        </p:nvSpPr>
+        <p:spPr>
+          <a:xfrm>
+            <a:off x="7863840" y="1783080"/>
+            <a:ext cx="3596335" cy="4389120"/>
+          </a:xfrm>
+          <a:prstGeom prst="roundRect">
+            <a:avLst/>
+          </a:prstGeom>
+          <a:solidFill>
+            <a:srgbClr val="F8FAFC"/>
           </a:solidFill>
           <a:ln w="12700">
             <a:solidFill>
@@ -3848,64 +5623,107 @@
           </a:fontRef>
         </p:style>
         <p:txBody>
-          <a:bodyPr rtlCol="0" anchor="ctr" lIns="228600" tIns="228600" rIns="182880"/>
+          <a:bodyPr rtlCol="0" anchor="ctr" lIns="228600" tIns="228600"/>
           <a:lstStyle/>
           <a:p>
             <a:pPr algn="ctr">
-              <a:defRPr sz="1000" b="1">
-                <a:solidFill>
-                  <a:srgbClr val="D97706"/>
-                </a:solidFill>
-              </a:defRPr>
-            </a:pPr>
-            <a:r>
-              <a:t>PRODUCTIVIDAD CLÍNICA</a:t>
+              <a:defRPr b="1" sz="2000">
+                <a:solidFill>
+                  <a:srgbClr val="7C3AED"/>
+                </a:solidFill>
+              </a:defRPr>
+            </a:pPr>
+            <a:r>
+              <a:t>CUMPLIMIENTO PROA</a:t>
             </a:r>
           </a:p>
           <a:p>
             <a:pPr>
-              <a:spcBef>
-                <a:spcPts val="600"/>
-              </a:spcBef>
-              <a:spcAft>
-                <a:spcPts val="1200"/>
-              </a:spcAft>
-              <a:defRPr sz="1400" b="1">
+              <a:defRPr b="1" sz="1050">
                 <a:solidFill>
                   <a:srgbClr val="0F172A"/>
                 </a:solidFill>
               </a:defRPr>
             </a:pPr>
             <a:r>
-              <a:t>Optimización del Tiempo Farmacéutico</a:t>
-            </a:r>
-          </a:p>
-          <a:p>
+              <a:t>PROGRAMAS DE OPTIMIZACIÓN</a:t>
+            </a:r>
+          </a:p>
+          <a:p>
+            <a:br/>
             <a:pPr>
-              <a:lnSpc>
-                <a:spcPct val="130000"/>
-              </a:lnSpc>
-              <a:defRPr sz="1100">
-                <a:solidFill>
-                  <a:srgbClr val="64748B"/>
-                </a:solidFill>
-              </a:defRPr>
-            </a:pPr>
-            <a:r>
-              <a:t>El cálculo bayesiano manual o mediante hojas de cálculo rudimentarias toma entre 25 y 40 minutos por paciente. PK-Bayes reduce este tiempo a menos de 3 minutos, multiplicando por 10 la capacidad de cobertura del equipo PROA.</a:t>
-            </a:r>
-          </a:p>
-        </p:txBody>
-      </p:sp>
-      <p:sp>
-        <p:nvSpPr>
-          <p:cNvPr id="8" name="TextBox 7"/>
+              <a:defRPr sz="950">
+                <a:solidFill>
+                  <a:srgbClr val="475569"/>
+                </a:solidFill>
+              </a:defRPr>
+            </a:pPr>
+            <a:r>
+              <a:t>• Cumplimiento con auditorías del Ministerio de Salud y OMS</a:t>
+            </a:r>
+            <a:br/>
+            <a:r>
+              <a:t>• Prevención de inducción de resistencia antimicrobiana por concentraciones subinhibitorias prolongadas</a:t>
+            </a:r>
+            <a:br/>
+            <a:r>
+              <a:t>• Trazabilidad total de cada ajuste posológico institucional.</a:t>
+            </a:r>
+          </a:p>
+        </p:txBody>
+      </p:sp>
+      <p:sp>
+        <p:nvSpPr>
+          <p:cNvPr id="10" name="Rounded Rectangle 9"/>
+          <p:cNvSpPr/>
+          <p:nvPr/>
+        </p:nvSpPr>
+        <p:spPr>
+          <a:xfrm>
+            <a:off x="7936992" y="1892808"/>
+            <a:ext cx="54864" cy="4169664"/>
+          </a:xfrm>
+          <a:prstGeom prst="roundRect">
+            <a:avLst/>
+          </a:prstGeom>
+          <a:solidFill>
+            <a:srgbClr val="7C3AED"/>
+          </a:solidFill>
+          <a:ln>
+            <a:noFill/>
+          </a:ln>
+        </p:spPr>
+        <p:style>
+          <a:lnRef idx="1">
+            <a:schemeClr val="accent1"/>
+          </a:lnRef>
+          <a:fillRef idx="3">
+            <a:schemeClr val="accent1"/>
+          </a:fillRef>
+          <a:effectRef idx="2">
+            <a:schemeClr val="accent1"/>
+          </a:effectRef>
+          <a:fontRef idx="minor">
+            <a:schemeClr val="lt1"/>
+          </a:fontRef>
+        </p:style>
+        <p:txBody>
+          <a:bodyPr rtlCol="0" anchor="ctr"/>
+          <a:lstStyle/>
+          <a:p>
+            <a:pPr algn="ctr"/>
+          </a:p>
+        </p:txBody>
+      </p:sp>
+      <p:sp>
+        <p:nvSpPr>
+          <p:cNvPr id="11" name="TextBox 10"/>
           <p:cNvSpPr txBox="1"/>
           <p:nvPr/>
         </p:nvSpPr>
         <p:spPr>
           <a:xfrm>
-            <a:off x="731520" y="6400800"/>
+            <a:off x="731520" y="6437376"/>
             <a:ext cx="10725912" cy="274320"/>
           </a:xfrm>
           <a:prstGeom prst="rect">
@@ -3922,12 +5740,12 @@
             <a:pPr>
               <a:defRPr sz="850">
                 <a:solidFill>
-                  <a:srgbClr val="94A3B8"/>
-                </a:solidFill>
-              </a:defRPr>
-            </a:pPr>
-            <a:r>
-              <a:t>PK-Bayes · Decision Support System CDSS v3.2                                                Documento Institucional Clínico                                                10 / 14</a:t>
+                  <a:srgbClr val="64748B"/>
+                </a:solidFill>
+              </a:defRPr>
+            </a:pPr>
+            <a:r>
+              <a:t>PK-Bayes · CDSS v3.2 · Soporte a la Decisión Clínica Farmacocinética                       Confidencial · Uso Hospitalario Institucional                       10 / 14</a:t>
             </a:r>
           </a:p>
         </p:txBody>
@@ -3946,7 +5764,7 @@
     <p:bg>
       <p:bgPr>
         <a:solidFill>
-          <a:srgbClr val="F8FAFC"/>
+          <a:srgbClr val="FFFFFF"/>
         </a:solidFill>
         <a:effectLst/>
       </p:bgPr>
@@ -3966,8 +5784,8 @@
         </p:nvSpPr>
         <p:spPr>
           <a:xfrm>
-            <a:off x="731520" y="438912"/>
-            <a:ext cx="5486400" cy="320040"/>
+            <a:off x="731520" y="384048"/>
+            <a:ext cx="6858000" cy="292608"/>
           </a:xfrm>
           <a:prstGeom prst="rect">
             <a:avLst/>
@@ -3981,7 +5799,7 @@
           <a:lstStyle/>
           <a:p>
             <a:pPr>
-              <a:defRPr sz="950" b="1">
+              <a:defRPr sz="900" b="1">
                 <a:solidFill>
                   <a:srgbClr val="0284C7"/>
                 </a:solidFill>
@@ -4001,8 +5819,8 @@
         </p:nvSpPr>
         <p:spPr>
           <a:xfrm>
-            <a:off x="731520" y="713232"/>
-            <a:ext cx="10698480" cy="594360"/>
+            <a:off x="731520" y="676656"/>
+            <a:ext cx="10698480" cy="548640"/>
           </a:xfrm>
           <a:prstGeom prst="rect">
             <a:avLst/>
@@ -4016,14 +5834,14 @@
           <a:lstStyle/>
           <a:p>
             <a:pPr>
-              <a:defRPr sz="2200" b="1">
+              <a:defRPr sz="2100" b="1">
                 <a:solidFill>
                   <a:srgbClr val="0F172A"/>
                 </a:solidFill>
               </a:defRPr>
             </a:pPr>
             <a:r>
-              <a:t>Seguridad de Grado Hospitalario y Privacidad por Diseño</a:t>
+              <a:t>Anonimización por Diseño y Arquitectura Zero-PHI</a:t>
             </a:r>
           </a:p>
         </p:txBody>
@@ -4036,8 +5854,8 @@
         </p:nvSpPr>
         <p:spPr>
           <a:xfrm>
-            <a:off x="731520" y="1298448"/>
-            <a:ext cx="10698480" cy="411480"/>
+            <a:off x="731520" y="1243584"/>
+            <a:ext cx="10698480" cy="384048"/>
           </a:xfrm>
           <a:prstGeom prst="rect">
             <a:avLst/>
@@ -4051,14 +5869,14 @@
           <a:lstStyle/>
           <a:p>
             <a:pPr>
-              <a:defRPr sz="1200">
-                <a:solidFill>
-                  <a:srgbClr val="64748B"/>
-                </a:solidFill>
-              </a:defRPr>
-            </a:pPr>
-            <a:r>
-              <a:t>Arquitectura construida bajo estándares internacionales de protección de datos clínicos y ciberseguridad sanitaria.</a:t>
+              <a:defRPr sz="1150">
+                <a:solidFill>
+                  <a:srgbClr val="475569"/>
+                </a:solidFill>
+              </a:defRPr>
+            </a:pPr>
+            <a:r>
+              <a:t>Garantía absoluta de privacidad clínica: los datos identificables del paciente nunca salen de la infraestructura del hospital.</a:t>
             </a:r>
           </a:p>
         </p:txBody>
@@ -4071,14 +5889,14 @@
         </p:nvSpPr>
         <p:spPr>
           <a:xfrm>
-            <a:off x="731520" y="1783080"/>
-            <a:ext cx="5212080" cy="2103120"/>
+            <a:off x="6217920" y="1783080"/>
+            <a:ext cx="5242255" cy="1371600"/>
           </a:xfrm>
           <a:prstGeom prst="roundRect">
             <a:avLst/>
           </a:prstGeom>
           <a:solidFill>
-            <a:srgbClr val="FFFFFF"/>
+            <a:srgbClr val="F8FAFC"/>
           </a:solidFill>
           <a:ln w="12700">
             <a:solidFill>
@@ -4101,36 +5919,30 @@
           </a:fontRef>
         </p:style>
         <p:txBody>
-          <a:bodyPr rtlCol="0" anchor="ctr" lIns="182880" tIns="182880" rIns="164592"/>
+          <a:bodyPr rtlCol="0" anchor="ctr" lIns="228600" tIns="137160"/>
           <a:lstStyle/>
           <a:p>
             <a:pPr algn="ctr">
-              <a:defRPr sz="1350" b="1">
+              <a:defRPr b="1" sz="1100">
                 <a:solidFill>
                   <a:srgbClr val="0284C7"/>
                 </a:solidFill>
               </a:defRPr>
             </a:pPr>
             <a:r>
-              <a:t>Anonimización Rigurosa por Diseño</a:t>
+              <a:t>ANONIMIZACIÓN EN EL NAVEGADOR (ZERO-PHI)</a:t>
             </a:r>
           </a:p>
           <a:p>
             <a:pPr>
-              <a:lnSpc>
-                <a:spcPct val="125000"/>
-              </a:lnSpc>
-              <a:spcBef>
-                <a:spcPts val="800"/>
-              </a:spcBef>
-              <a:defRPr sz="1100">
-                <a:solidFill>
-                  <a:srgbClr val="64748B"/>
-                </a:solidFill>
-              </a:defRPr>
-            </a:pPr>
-            <a:r>
-              <a:t>No requiere almacenar datos identificatorios directos (nombre o documento de identidad). El motor opera mediante identificadores clínicos anonimizados y transitorios.</a:t>
+              <a:defRPr sz="900">
+                <a:solidFill>
+                  <a:srgbClr val="475569"/>
+                </a:solidFill>
+              </a:defRPr>
+            </a:pPr>
+            <a:r>
+              <a:t>Nombre, RUT/DNI y número de historia clínica nunca se transmiten ni persisten externamente. El motor matemático opera exclusivamente con vectores fisiológicos anónimos.</a:t>
             </a:r>
           </a:p>
         </p:txBody>
@@ -4143,14 +5955,57 @@
         </p:nvSpPr>
         <p:spPr>
           <a:xfrm>
-            <a:off x="6217920" y="1783080"/>
-            <a:ext cx="5212080" cy="2103120"/>
+            <a:off x="6291072" y="1892808"/>
+            <a:ext cx="54864" cy="1152144"/>
           </a:xfrm>
           <a:prstGeom prst="roundRect">
             <a:avLst/>
           </a:prstGeom>
           <a:solidFill>
-            <a:srgbClr val="FFFFFF"/>
+            <a:srgbClr val="0284C7"/>
+          </a:solidFill>
+          <a:ln>
+            <a:noFill/>
+          </a:ln>
+        </p:spPr>
+        <p:style>
+          <a:lnRef idx="1">
+            <a:schemeClr val="accent1"/>
+          </a:lnRef>
+          <a:fillRef idx="3">
+            <a:schemeClr val="accent1"/>
+          </a:fillRef>
+          <a:effectRef idx="2">
+            <a:schemeClr val="accent1"/>
+          </a:effectRef>
+          <a:fontRef idx="minor">
+            <a:schemeClr val="lt1"/>
+          </a:fontRef>
+        </p:style>
+        <p:txBody>
+          <a:bodyPr rtlCol="0" anchor="ctr"/>
+          <a:lstStyle/>
+          <a:p>
+            <a:pPr algn="ctr"/>
+          </a:p>
+        </p:txBody>
+      </p:sp>
+      <p:sp>
+        <p:nvSpPr>
+          <p:cNvPr id="7" name="Rounded Rectangle 6"/>
+          <p:cNvSpPr/>
+          <p:nvPr/>
+        </p:nvSpPr>
+        <p:spPr>
+          <a:xfrm>
+            <a:off x="6217920" y="3291840"/>
+            <a:ext cx="5242255" cy="1371600"/>
+          </a:xfrm>
+          <a:prstGeom prst="roundRect">
+            <a:avLst/>
+          </a:prstGeom>
+          <a:solidFill>
+            <a:srgbClr val="F8FAFC"/>
           </a:solidFill>
           <a:ln w="12700">
             <a:solidFill>
@@ -4173,56 +6028,93 @@
           </a:fontRef>
         </p:style>
         <p:txBody>
-          <a:bodyPr rtlCol="0" anchor="ctr" lIns="182880" tIns="182880" rIns="164592"/>
+          <a:bodyPr rtlCol="0" anchor="ctr" lIns="228600" tIns="137160"/>
           <a:lstStyle/>
           <a:p>
             <a:pPr algn="ctr">
-              <a:defRPr sz="1350" b="1">
+              <a:defRPr b="1" sz="1100">
                 <a:solidFill>
                   <a:srgbClr val="059669"/>
                 </a:solidFill>
               </a:defRPr>
             </a:pPr>
             <a:r>
-              <a:t>Cifrado de Extremo a Extremo</a:t>
+              <a:t>CUMPLIMIENTO HIPAA &amp; REGLAMENTO GDPR</a:t>
             </a:r>
           </a:p>
           <a:p>
             <a:pPr>
-              <a:lnSpc>
-                <a:spcPct val="125000"/>
-              </a:lnSpc>
-              <a:spcBef>
-                <a:spcPts val="800"/>
-              </a:spcBef>
-              <a:defRPr sz="1100">
-                <a:solidFill>
-                  <a:srgbClr val="64748B"/>
-                </a:solidFill>
-              </a:defRPr>
-            </a:pPr>
-            <a:r>
-              <a:t>Cifrado TLS 1.3 para todas las comunicaciones en tránsito y cifrado criptográfico AES-256 en reposo. Claves gestionadas bajo módulos de seguridad dedicados.</a:t>
-            </a:r>
-          </a:p>
-        </p:txBody>
-      </p:sp>
-      <p:sp>
-        <p:nvSpPr>
-          <p:cNvPr id="7" name="Rounded Rectangle 6"/>
+              <a:defRPr sz="900">
+                <a:solidFill>
+                  <a:srgbClr val="475569"/>
+                </a:solidFill>
+              </a:defRPr>
+            </a:pPr>
+            <a:r>
+              <a:t>Alineación estricta con normativas internacionales de protección de datos de salud y regulaciones de ciberseguridad sanitaria. Cifrado TLS 1.3 en tránsito y AES-256 en reposo.</a:t>
+            </a:r>
+          </a:p>
+        </p:txBody>
+      </p:sp>
+      <p:sp>
+        <p:nvSpPr>
+          <p:cNvPr id="8" name="Rounded Rectangle 7"/>
           <p:cNvSpPr/>
           <p:nvPr/>
         </p:nvSpPr>
         <p:spPr>
           <a:xfrm>
-            <a:off x="731520" y="4023360"/>
-            <a:ext cx="5212080" cy="2103120"/>
+            <a:off x="6291072" y="3401568"/>
+            <a:ext cx="54864" cy="1152144"/>
           </a:xfrm>
           <a:prstGeom prst="roundRect">
             <a:avLst/>
           </a:prstGeom>
           <a:solidFill>
-            <a:srgbClr val="FFFFFF"/>
+            <a:srgbClr val="059669"/>
+          </a:solidFill>
+          <a:ln>
+            <a:noFill/>
+          </a:ln>
+        </p:spPr>
+        <p:style>
+          <a:lnRef idx="1">
+            <a:schemeClr val="accent1"/>
+          </a:lnRef>
+          <a:fillRef idx="3">
+            <a:schemeClr val="accent1"/>
+          </a:fillRef>
+          <a:effectRef idx="2">
+            <a:schemeClr val="accent1"/>
+          </a:effectRef>
+          <a:fontRef idx="minor">
+            <a:schemeClr val="lt1"/>
+          </a:fontRef>
+        </p:style>
+        <p:txBody>
+          <a:bodyPr rtlCol="0" anchor="ctr"/>
+          <a:lstStyle/>
+          <a:p>
+            <a:pPr algn="ctr"/>
+          </a:p>
+        </p:txBody>
+      </p:sp>
+      <p:sp>
+        <p:nvSpPr>
+          <p:cNvPr id="9" name="Rounded Rectangle 8"/>
+          <p:cNvSpPr/>
+          <p:nvPr/>
+        </p:nvSpPr>
+        <p:spPr>
+          <a:xfrm>
+            <a:off x="6217920" y="4800600"/>
+            <a:ext cx="5242255" cy="1371600"/>
+          </a:xfrm>
+          <a:prstGeom prst="roundRect">
+            <a:avLst/>
+          </a:prstGeom>
+          <a:solidFill>
+            <a:srgbClr val="F8FAFC"/>
           </a:solidFill>
           <a:ln w="12700">
             <a:solidFill>
@@ -4245,61 +6137,53 @@
           </a:fontRef>
         </p:style>
         <p:txBody>
-          <a:bodyPr rtlCol="0" anchor="ctr" lIns="182880" tIns="182880" rIns="164592"/>
+          <a:bodyPr rtlCol="0" anchor="ctr" lIns="228600" tIns="137160"/>
           <a:lstStyle/>
           <a:p>
             <a:pPr algn="ctr">
-              <a:defRPr sz="1350" b="1">
-                <a:solidFill>
-                  <a:srgbClr val="D97706"/>
-                </a:solidFill>
-              </a:defRPr>
-            </a:pPr>
-            <a:r>
-              <a:t>Cumplimiento HIPAA / GDPR / Salud</a:t>
+              <a:defRPr b="1" sz="1100">
+                <a:solidFill>
+                  <a:srgbClr val="7C3AED"/>
+                </a:solidFill>
+              </a:defRPr>
+            </a:pPr>
+            <a:r>
+              <a:t>CONTROL DE ACCESO BASADO EN ROLES (RBAC)</a:t>
             </a:r>
           </a:p>
           <a:p>
             <a:pPr>
-              <a:lnSpc>
-                <a:spcPct val="125000"/>
-              </a:lnSpc>
-              <a:spcBef>
-                <a:spcPts val="800"/>
-              </a:spcBef>
-              <a:defRPr sz="1100">
-                <a:solidFill>
-                  <a:srgbClr val="64748B"/>
-                </a:solidFill>
-              </a:defRPr>
-            </a:pPr>
-            <a:r>
-              <a:t>Alineación con directrices internacionales de privacidad y leyes de derechos y deberes del paciente. Controles de acceso basados en roles médicos (RBAC).</a:t>
-            </a:r>
-          </a:p>
-        </p:txBody>
-      </p:sp>
-      <p:sp>
-        <p:nvSpPr>
-          <p:cNvPr id="8" name="Rounded Rectangle 7"/>
+              <a:defRPr sz="900">
+                <a:solidFill>
+                  <a:srgbClr val="475569"/>
+                </a:solidFill>
+              </a:defRPr>
+            </a:pPr>
+            <a:r>
+              <a:t>Permisos segregados para Farmacéuticos Clínicos, Médicos Prescriptores, Residentes y Auditores PROA con registro inmutable de auditoría institucional.</a:t>
+            </a:r>
+          </a:p>
+        </p:txBody>
+      </p:sp>
+      <p:sp>
+        <p:nvSpPr>
+          <p:cNvPr id="10" name="Rounded Rectangle 9"/>
           <p:cNvSpPr/>
           <p:nvPr/>
         </p:nvSpPr>
         <p:spPr>
           <a:xfrm>
-            <a:off x="6217920" y="4023360"/>
-            <a:ext cx="5212080" cy="2103120"/>
+            <a:off x="6291072" y="4910328"/>
+            <a:ext cx="54864" cy="1152144"/>
           </a:xfrm>
           <a:prstGeom prst="roundRect">
             <a:avLst/>
           </a:prstGeom>
           <a:solidFill>
-            <a:srgbClr val="FFFFFF"/>
+            <a:srgbClr val="7C3AED"/>
           </a:solidFill>
-          <a:ln w="12700">
-            <a:solidFill>
-              <a:srgbClr val="E2E8F0"/>
-            </a:solidFill>
+          <a:ln>
+            <a:noFill/>
           </a:ln>
         </p:spPr>
         <p:style>
@@ -4317,49 +6201,22 @@
           </a:fontRef>
         </p:style>
         <p:txBody>
-          <a:bodyPr rtlCol="0" anchor="ctr" lIns="182880" tIns="182880" rIns="164592"/>
-          <a:lstStyle/>
-          <a:p>
-            <a:pPr algn="ctr">
-              <a:defRPr sz="1350" b="1">
-                <a:solidFill>
-                  <a:srgbClr val="6366F1"/>
-                </a:solidFill>
-              </a:defRPr>
-            </a:pPr>
-            <a:r>
-              <a:t>Trazabilidad y Auditoría Clínica</a:t>
-            </a:r>
-          </a:p>
-          <a:p>
-            <a:pPr>
-              <a:lnSpc>
-                <a:spcPct val="125000"/>
-              </a:lnSpc>
-              <a:spcBef>
-                <a:spcPts val="800"/>
-              </a:spcBef>
-              <a:defRPr sz="1100">
-                <a:solidFill>
-                  <a:srgbClr val="64748B"/>
-                </a:solidFill>
-              </a:defRPr>
-            </a:pPr>
-            <a:r>
-              <a:t>Registro inmutable de auditoría para cada simulación, recomendación y exportación de informe, garantizando transparencia médico-legal ante comités de ética.</a:t>
-            </a:r>
-          </a:p>
-        </p:txBody>
-      </p:sp>
-      <p:sp>
-        <p:nvSpPr>
-          <p:cNvPr id="9" name="TextBox 8"/>
+          <a:bodyPr rtlCol="0" anchor="ctr"/>
+          <a:lstStyle/>
+          <a:p>
+            <a:pPr algn="ctr"/>
+          </a:p>
+        </p:txBody>
+      </p:sp>
+      <p:sp>
+        <p:nvSpPr>
+          <p:cNvPr id="11" name="TextBox 10"/>
           <p:cNvSpPr txBox="1"/>
           <p:nvPr/>
         </p:nvSpPr>
         <p:spPr>
           <a:xfrm>
-            <a:off x="731520" y="6400800"/>
+            <a:off x="731520" y="6437376"/>
             <a:ext cx="10725912" cy="274320"/>
           </a:xfrm>
           <a:prstGeom prst="rect">
@@ -4376,12 +6233,12 @@
             <a:pPr>
               <a:defRPr sz="850">
                 <a:solidFill>
-                  <a:srgbClr val="94A3B8"/>
-                </a:solidFill>
-              </a:defRPr>
-            </a:pPr>
-            <a:r>
-              <a:t>PK-Bayes · Decision Support System CDSS v3.2                                                Documento Institucional Clínico                                                11 / 14</a:t>
+                  <a:srgbClr val="64748B"/>
+                </a:solidFill>
+              </a:defRPr>
+            </a:pPr>
+            <a:r>
+              <a:t>PK-Bayes · CDSS v3.2 · Soporte a la Decisión Clínica Farmacocinética                       Confidencial · Uso Hospitalario Institucional                       11 / 14</a:t>
             </a:r>
           </a:p>
         </p:txBody>
@@ -4400,7 +6257,7 @@
     <p:bg>
       <p:bgPr>
         <a:solidFill>
-          <a:srgbClr val="F8FAFC"/>
+          <a:srgbClr val="FFFFFF"/>
         </a:solidFill>
         <a:effectLst/>
       </p:bgPr>
@@ -4420,8 +6277,8 @@
         </p:nvSpPr>
         <p:spPr>
           <a:xfrm>
-            <a:off x="731520" y="438912"/>
-            <a:ext cx="5486400" cy="320040"/>
+            <a:off x="731520" y="384048"/>
+            <a:ext cx="6858000" cy="292608"/>
           </a:xfrm>
           <a:prstGeom prst="rect">
             <a:avLst/>
@@ -4435,7 +6292,7 @@
           <a:lstStyle/>
           <a:p>
             <a:pPr>
-              <a:defRPr sz="950" b="1">
+              <a:defRPr sz="900" b="1">
                 <a:solidFill>
                   <a:srgbClr val="0284C7"/>
                 </a:solidFill>
@@ -4455,8 +6312,8 @@
         </p:nvSpPr>
         <p:spPr>
           <a:xfrm>
-            <a:off x="731520" y="713232"/>
-            <a:ext cx="10698480" cy="594360"/>
+            <a:off x="731520" y="676656"/>
+            <a:ext cx="10698480" cy="548640"/>
           </a:xfrm>
           <a:prstGeom prst="rect">
             <a:avLst/>
@@ -4470,14 +6327,14 @@
           <a:lstStyle/>
           <a:p>
             <a:pPr>
-              <a:defRPr sz="2200" b="1">
+              <a:defRPr sz="2100" b="1">
                 <a:solidFill>
                   <a:srgbClr val="0F172A"/>
                 </a:solidFill>
               </a:defRPr>
             </a:pPr>
             <a:r>
-              <a:t>Interoperabilidad HL7 FHIR y Despliegue Flexible</a:t>
+              <a:t>Interoperabilidad Nativa HL7 FHIR R4/R5</a:t>
             </a:r>
           </a:p>
         </p:txBody>
@@ -4490,8 +6347,8 @@
         </p:nvSpPr>
         <p:spPr>
           <a:xfrm>
-            <a:off x="731520" y="1298448"/>
-            <a:ext cx="10698480" cy="411480"/>
+            <a:off x="731520" y="1243584"/>
+            <a:ext cx="10698480" cy="384048"/>
           </a:xfrm>
           <a:prstGeom prst="rect">
             <a:avLst/>
@@ -4505,14 +6362,14 @@
           <a:lstStyle/>
           <a:p>
             <a:pPr>
-              <a:defRPr sz="1200">
-                <a:solidFill>
-                  <a:srgbClr val="64748B"/>
-                </a:solidFill>
-              </a:defRPr>
-            </a:pPr>
-            <a:r>
-              <a:t>Capacidad de integrarse sin fricción en el ecosistema informático del hospital, LIS y ficha clínica electrónica.</a:t>
+              <a:defRPr sz="1150">
+                <a:solidFill>
+                  <a:srgbClr val="475569"/>
+                </a:solidFill>
+              </a:defRPr>
+            </a:pPr>
+            <a:r>
+              <a:t>Integración fluida con los principales sistemas de historia clínica electrónica (EHR) y laboratorio (LIS).</a:t>
             </a:r>
           </a:p>
         </p:txBody>
@@ -4526,13 +6383,13 @@
         <p:spPr>
           <a:xfrm>
             <a:off x="731520" y="1783080"/>
-            <a:ext cx="5212080" cy="4389120"/>
+            <a:ext cx="5303520" cy="4389120"/>
           </a:xfrm>
           <a:prstGeom prst="roundRect">
             <a:avLst/>
           </a:prstGeom>
           <a:solidFill>
-            <a:srgbClr val="FFFFFF"/>
+            <a:srgbClr val="F8FAFC"/>
           </a:solidFill>
           <a:ln w="12700">
             <a:solidFill>
@@ -4555,126 +6412,134 @@
           </a:fontRef>
         </p:style>
         <p:txBody>
-          <a:bodyPr rtlCol="0" anchor="ctr" lIns="228600" tIns="228600" rIns="182880"/>
+          <a:bodyPr rtlCol="0" anchor="ctr" lIns="228600" tIns="182880"/>
           <a:lstStyle/>
           <a:p>
             <a:pPr algn="ctr">
-              <a:defRPr sz="1100" b="1">
+              <a:defRPr b="1" sz="1100">
                 <a:solidFill>
                   <a:srgbClr val="0284C7"/>
                 </a:solidFill>
               </a:defRPr>
             </a:pPr>
             <a:r>
-              <a:t>INTEGRACIÓN CON SISTEMAS DE SALUD</a:t>
-            </a:r>
-          </a:p>
-          <a:p>
+              <a:t>TOPOLOGÍA DE INTEGRACIÓN HOSPITALARIA</a:t>
+            </a:r>
+          </a:p>
+          <a:p>
+            <a:br/>
             <a:pPr>
-              <a:spcBef>
-                <a:spcPts val="800"/>
-              </a:spcBef>
-              <a:defRPr sz="1150" b="1">
+              <a:defRPr b="1" sz="950">
                 <a:solidFill>
                   <a:srgbClr val="0F172A"/>
                 </a:solidFill>
               </a:defRPr>
             </a:pPr>
             <a:r>
-              <a:t>Estándar HL7 FHIR R4 / R5</a:t>
+              <a:t>Sistemas EHR / HIS Hospitalarios</a:t>
             </a:r>
           </a:p>
           <a:p>
             <a:pPr>
-              <a:defRPr sz="1000">
-                <a:solidFill>
-                  <a:srgbClr val="64748B"/>
-                </a:solidFill>
-              </a:defRPr>
-            </a:pPr>
-            <a:r>
-              <a:t>Conectores nativos para recibir resultados de niveles plasmáticos desde el Laboratorio Central (LIS) y datos demográficos desde el HIS/EHR.</a:t>
-            </a:r>
-          </a:p>
-          <a:p>
+              <a:defRPr sz="850">
+                <a:solidFill>
+                  <a:srgbClr val="475569"/>
+                </a:solidFill>
+              </a:defRPr>
+            </a:pPr>
+            <a:r>
+              <a:t>• Tecnologías: Epic Systems · Cerner Millennium · SAP Health · Philips Tasy</a:t>
+            </a:r>
+            <a:br/>
+            <a:r>
+              <a:t>• Función: Emite demografía anónima y órdenes de prescripción</a:t>
+            </a:r>
+          </a:p>
+          <a:p>
+            <a:br/>
             <a:pPr>
-              <a:spcBef>
-                <a:spcPts val="800"/>
-              </a:spcBef>
-              <a:defRPr sz="1150" b="1">
+              <a:defRPr b="1" sz="950">
                 <a:solidFill>
                   <a:srgbClr val="0F172A"/>
                 </a:solidFill>
               </a:defRPr>
             </a:pPr>
             <a:r>
-              <a:t>Motor C++ / Stan MCMC en Backend</a:t>
+              <a:t>Sistemas de Laboratorio (LIS)</a:t>
             </a:r>
           </a:p>
           <a:p>
             <a:pPr>
-              <a:defRPr sz="1000">
-                <a:solidFill>
-                  <a:srgbClr val="64748B"/>
-                </a:solidFill>
-              </a:defRPr>
-            </a:pPr>
-            <a:r>
-              <a:t>Inferencia matemática de alto rendimiento con optimización L-BFGS-B. Respuestas garantizadas en &lt; 25 milisegundos sin congelar la interfaz.</a:t>
-            </a:r>
-          </a:p>
-          <a:p>
+              <a:defRPr sz="850">
+                <a:solidFill>
+                  <a:srgbClr val="475569"/>
+                </a:solidFill>
+              </a:defRPr>
+            </a:pPr>
+            <a:r>
+              <a:t>• Tecnologías: Roche Cobas · Abbott Alinity · Sysmex · Siemens Atellica</a:t>
+            </a:r>
+            <a:br/>
+            <a:r>
+              <a:t>• Función: Publica resultados de niveles plasmáticos TDM y creatininas</a:t>
+            </a:r>
+          </a:p>
+          <a:p>
+            <a:br/>
             <a:pPr>
-              <a:spcBef>
-                <a:spcPts val="800"/>
-              </a:spcBef>
-              <a:defRPr sz="1150" b="1">
+              <a:defRPr b="1" sz="950">
                 <a:solidFill>
                   <a:srgbClr val="0F172A"/>
                 </a:solidFill>
               </a:defRPr>
             </a:pPr>
             <a:r>
-              <a:t>Arquitectura Web Liviana (Cloud o Local)</a:t>
+              <a:t>Capa de Interoperabilidad FHIR</a:t>
             </a:r>
           </a:p>
           <a:p>
             <a:pPr>
-              <a:defRPr sz="1000">
-                <a:solidFill>
-                  <a:srgbClr val="64748B"/>
-                </a:solidFill>
-              </a:defRPr>
-            </a:pPr>
-            <a:r>
-              <a:t>Frontend moderno en React / Vite con diseño 100% responsive para tablets clínicas, ordenadores de carro de UCI y estaciones de farmacia.</a:t>
-            </a:r>
-          </a:p>
-          <a:p>
+              <a:defRPr sz="850">
+                <a:solidFill>
+                  <a:srgbClr val="475569"/>
+                </a:solidFill>
+              </a:defRPr>
+            </a:pPr>
+            <a:r>
+              <a:t>• Tecnologías: HL7 FHIR R4 API Gateway · SMART on FHIR Apps</a:t>
+            </a:r>
+            <a:br/>
+            <a:r>
+              <a:t>• Función: Mapeo estandarizado de recursos Observation y MedicationAdministration</a:t>
+            </a:r>
+          </a:p>
+          <a:p>
+            <a:br/>
             <a:pPr>
-              <a:spcBef>
-                <a:spcPts val="800"/>
-              </a:spcBef>
-              <a:defRPr sz="1150" b="1">
+              <a:defRPr b="1" sz="950">
                 <a:solidFill>
                   <a:srgbClr val="0F172A"/>
                 </a:solidFill>
               </a:defRPr>
             </a:pPr>
             <a:r>
-              <a:t>API REST Segura para Servicios Hospitalarios</a:t>
+              <a:t>Motor Clínico PK-Bayes</a:t>
             </a:r>
           </a:p>
           <a:p>
             <a:pPr>
-              <a:defRPr sz="1000">
-                <a:solidFill>
-                  <a:srgbClr val="64748B"/>
-                </a:solidFill>
-              </a:defRPr>
-            </a:pPr>
-            <a:r>
-              <a:t>Endpoints documentados bajo OpenAPI para integración personalizada con plataformas de prescripción electrónica.</a:t>
+              <a:defRPr sz="850">
+                <a:solidFill>
+                  <a:srgbClr val="475569"/>
+                </a:solidFill>
+              </a:defRPr>
+            </a:pPr>
+            <a:r>
+              <a:t>• Tecnologías: Inferencia Bayesiana MAP · Microservicios Docker / K8s</a:t>
+            </a:r>
+            <a:br/>
+            <a:r>
+              <a:t>• Función: Genera recomendación posológica firmada para el EHR institucional</a:t>
             </a:r>
           </a:p>
         </p:txBody>
@@ -4687,14 +6552,14 @@
         </p:nvSpPr>
         <p:spPr>
           <a:xfrm>
-            <a:off x="6163056" y="1728216"/>
-            <a:ext cx="5321808" cy="4498848"/>
+            <a:off x="6217920" y="1783080"/>
+            <a:ext cx="5242255" cy="4389120"/>
           </a:xfrm>
           <a:prstGeom prst="roundRect">
             <a:avLst/>
           </a:prstGeom>
           <a:solidFill>
-            <a:srgbClr val="F1F5F9"/>
+            <a:srgbClr val="F8FAFC"/>
           </a:solidFill>
           <a:ln w="12700">
             <a:solidFill>
@@ -4717,46 +6582,129 @@
           </a:fontRef>
         </p:style>
         <p:txBody>
-          <a:bodyPr rtlCol="0" anchor="ctr"/>
-          <a:lstStyle/>
-          <a:p>
-            <a:pPr algn="ctr"/>
-          </a:p>
-        </p:txBody>
-      </p:sp>
-      <p:pic>
-        <p:nvPicPr>
-          <p:cNvPr id="7" name="Picture 6" descr="09-modelo-institucional.png"/>
-          <p:cNvPicPr>
-            <a:picLocks noChangeAspect="1"/>
-          </p:cNvPicPr>
-          <p:nvPr/>
-        </p:nvPicPr>
-        <p:blipFill>
-          <a:blip r:embed="rId2"/>
-          <a:stretch>
-            <a:fillRect/>
-          </a:stretch>
-        </p:blipFill>
-        <p:spPr>
-          <a:xfrm>
-            <a:off x="6217920" y="1783080"/>
-            <a:ext cx="5212080" cy="4389120"/>
-          </a:xfrm>
-          <a:prstGeom prst="rect">
-            <a:avLst/>
-          </a:prstGeom>
-        </p:spPr>
-      </p:pic>
-      <p:sp>
-        <p:nvSpPr>
-          <p:cNvPr id="8" name="TextBox 7"/>
+          <a:bodyPr rtlCol="0" anchor="ctr" lIns="228600" tIns="182880"/>
+          <a:lstStyle/>
+          <a:p>
+            <a:pPr algn="ctr">
+              <a:defRPr b="1" sz="1100">
+                <a:solidFill>
+                  <a:srgbClr val="059669"/>
+                </a:solidFill>
+              </a:defRPr>
+            </a:pPr>
+            <a:r>
+              <a:t>RECURSO FHIR: DOSIS RECOMENDADA</a:t>
+            </a:r>
+          </a:p>
+          <a:p>
+            <a:pPr>
+              <a:defRPr sz="800">
+                <a:solidFill>
+                  <a:srgbClr val="0284C7"/>
+                </a:solidFill>
+                <a:latin typeface="Courier New"/>
+              </a:defRPr>
+            </a:pPr>
+            <a:r>
+              <a:t>{</a:t>
+            </a:r>
+            <a:br/>
+            <a:r>
+              <a:t>  "resourceType": "MedicationRequest",</a:t>
+            </a:r>
+            <a:br/>
+            <a:r>
+              <a:t>  "id": "pk-bayes-rec-202610-4491",</a:t>
+            </a:r>
+            <a:br/>
+            <a:r>
+              <a:t>  "status": "draft",</a:t>
+            </a:r>
+            <a:br/>
+            <a:r>
+              <a:t>  "intent": "proposal",</a:t>
+            </a:r>
+            <a:br/>
+            <a:r>
+              <a:t>  "medicationCodeableConcept": {</a:t>
+            </a:r>
+            <a:br/>
+            <a:r>
+              <a:t>    "coding": [{"system": "RxNorm", "code": "11124", "display": "Vancomycin"}]</a:t>
+            </a:r>
+            <a:br/>
+            <a:r>
+              <a:t>  },</a:t>
+            </a:r>
+            <a:br/>
+            <a:r>
+              <a:t>  "dosageInstruction": [{</a:t>
+            </a:r>
+            <a:br/>
+            <a:r>
+              <a:t>    "timing": {"repeat": {"frequency": 1, "period": 8, "periodUnit": "h"}},</a:t>
+            </a:r>
+            <a:br/>
+            <a:r>
+              <a:t>    "doseAndRate": [{"doseQuantity": {"value": 1250, "unit": "mg"}}]</a:t>
+            </a:r>
+            <a:br/>
+            <a:r>
+              <a:t>  }],</a:t>
+            </a:r>
+            <a:br/>
+            <a:r>
+              <a:t>  "note": [{"text": "Predicción AUC24: 512 mg·h/L. Aclaramiento MAP: 4.2 L/h."}]</a:t>
+            </a:r>
+            <a:br/>
+            <a:r>
+              <a:t>}</a:t>
+            </a:r>
+          </a:p>
+          <a:p>
+            <a:br/>
+            <a:pPr>
+              <a:defRPr b="1" sz="1000">
+                <a:solidFill>
+                  <a:srgbClr val="0F172A"/>
+                </a:solidFill>
+              </a:defRPr>
+            </a:pPr>
+            <a:r>
+              <a:t>MODALIDADES DE DESPLIEGUE:</a:t>
+            </a:r>
+          </a:p>
+          <a:p>
+            <a:pPr>
+              <a:defRPr sz="850">
+                <a:solidFill>
+                  <a:srgbClr val="475569"/>
+                </a:solidFill>
+              </a:defRPr>
+            </a:pPr>
+            <a:r>
+              <a:t>• On-Premise: Contenedores Docker en DMZ hospitalaria privada.</a:t>
+            </a:r>
+            <a:br/>
+            <a:r>
+              <a:t>• Cloud Privada: Entorno dedicado certificado HIPAA con VPN Site-to-Site.</a:t>
+            </a:r>
+            <a:br/>
+            <a:r>
+              <a:t>• Web App Standalone: Operativa inmediata sin requerir integración inicial.</a:t>
+            </a:r>
+          </a:p>
+        </p:txBody>
+      </p:sp>
+      <p:sp>
+        <p:nvSpPr>
+          <p:cNvPr id="7" name="TextBox 6"/>
           <p:cNvSpPr txBox="1"/>
           <p:nvPr/>
         </p:nvSpPr>
         <p:spPr>
           <a:xfrm>
-            <a:off x="731520" y="6400800"/>
+            <a:off x="731520" y="6437376"/>
             <a:ext cx="10725912" cy="274320"/>
           </a:xfrm>
           <a:prstGeom prst="rect">
@@ -4773,12 +6721,12 @@
             <a:pPr>
               <a:defRPr sz="850">
                 <a:solidFill>
-                  <a:srgbClr val="94A3B8"/>
-                </a:solidFill>
-              </a:defRPr>
-            </a:pPr>
-            <a:r>
-              <a:t>PK-Bayes · Decision Support System CDSS v3.2                                                Documento Institucional Clínico                                                12 / 14</a:t>
+                  <a:srgbClr val="64748B"/>
+                </a:solidFill>
+              </a:defRPr>
+            </a:pPr>
+            <a:r>
+              <a:t>PK-Bayes · CDSS v3.2 · Soporte a la Decisión Clínica Farmacocinética                       Confidencial · Uso Hospitalario Institucional                       12 / 14</a:t>
             </a:r>
           </a:p>
         </p:txBody>
@@ -4797,7 +6745,7 @@
     <p:bg>
       <p:bgPr>
         <a:solidFill>
-          <a:srgbClr val="F8FAFC"/>
+          <a:srgbClr val="FFFFFF"/>
         </a:solidFill>
         <a:effectLst/>
       </p:bgPr>
@@ -4817,8 +6765,8 @@
         </p:nvSpPr>
         <p:spPr>
           <a:xfrm>
-            <a:off x="731520" y="438912"/>
-            <a:ext cx="5486400" cy="320040"/>
+            <a:off x="731520" y="384048"/>
+            <a:ext cx="6858000" cy="292608"/>
           </a:xfrm>
           <a:prstGeom prst="rect">
             <a:avLst/>
@@ -4832,7 +6780,7 @@
           <a:lstStyle/>
           <a:p>
             <a:pPr>
-              <a:defRPr sz="950" b="1">
+              <a:defRPr sz="900" b="1">
                 <a:solidFill>
                   <a:srgbClr val="0284C7"/>
                 </a:solidFill>
@@ -4852,8 +6800,8 @@
         </p:nvSpPr>
         <p:spPr>
           <a:xfrm>
-            <a:off x="731520" y="713232"/>
-            <a:ext cx="10698480" cy="594360"/>
+            <a:off x="731520" y="676656"/>
+            <a:ext cx="10698480" cy="548640"/>
           </a:xfrm>
           <a:prstGeom prst="rect">
             <a:avLst/>
@@ -4867,14 +6815,14 @@
           <a:lstStyle/>
           <a:p>
             <a:pPr>
-              <a:defRPr sz="2200" b="1">
+              <a:defRPr sz="2100" b="1">
                 <a:solidFill>
                   <a:srgbClr val="0F172A"/>
                 </a:solidFill>
               </a:defRPr>
             </a:pPr>
             <a:r>
-              <a:t>Ruta de Implementación del Piloto Clínico (60 Días)</a:t>
+              <a:t>Programa Piloto Clínico de 60 Días en UCI</a:t>
             </a:r>
           </a:p>
         </p:txBody>
@@ -4887,8 +6835,8 @@
         </p:nvSpPr>
         <p:spPr>
           <a:xfrm>
-            <a:off x="731520" y="1298448"/>
-            <a:ext cx="10698480" cy="411480"/>
+            <a:off x="731520" y="1243584"/>
+            <a:ext cx="10698480" cy="384048"/>
           </a:xfrm>
           <a:prstGeom prst="rect">
             <a:avLst/>
@@ -4902,14 +6850,14 @@
           <a:lstStyle/>
           <a:p>
             <a:pPr>
-              <a:defRPr sz="1200">
-                <a:solidFill>
-                  <a:srgbClr val="64748B"/>
-                </a:solidFill>
-              </a:defRPr>
-            </a:pPr>
-            <a:r>
-              <a:t>Un proceso guiado y estructurado para validar el impacto asistencial y económico sin alterar la rutina del servicio.</a:t>
+              <a:defRPr sz="1150">
+                <a:solidFill>
+                  <a:srgbClr val="475569"/>
+                </a:solidFill>
+              </a:defRPr>
+            </a:pPr>
+            <a:r>
+              <a:t>Metodología estructurada de validación asistencial sin coste inicial para el servicio de salud.</a:t>
             </a:r>
           </a:p>
         </p:txBody>
@@ -4923,13 +6871,13 @@
         <p:spPr>
           <a:xfrm>
             <a:off x="731520" y="1783080"/>
-            <a:ext cx="2542032" cy="4389120"/>
+            <a:ext cx="3383280" cy="2057400"/>
           </a:xfrm>
           <a:prstGeom prst="roundRect">
             <a:avLst/>
           </a:prstGeom>
           <a:solidFill>
-            <a:srgbClr val="FFFFFF"/>
+            <a:srgbClr val="F8FAFC"/>
           </a:solidFill>
           <a:ln w="12700">
             <a:solidFill>
@@ -4952,51 +6900,50 @@
           </a:fontRef>
         </p:style>
         <p:txBody>
-          <a:bodyPr rtlCol="0" anchor="ctr" lIns="201168" tIns="201168" rIns="164592"/>
+          <a:bodyPr rtlCol="0" anchor="ctr" lIns="182880" tIns="137160"/>
           <a:lstStyle/>
           <a:p>
             <a:pPr algn="ctr">
-              <a:defRPr sz="1000" b="1">
+              <a:defRPr b="1" sz="950">
                 <a:solidFill>
                   <a:srgbClr val="0284C7"/>
                 </a:solidFill>
               </a:defRPr>
             </a:pPr>
             <a:r>
-              <a:t>FASE 1 · DÍAS 1–15</a:t>
+              <a:t>FASE 1 (DÍAS 1 - 15)</a:t>
             </a:r>
           </a:p>
           <a:p>
             <a:pPr>
-              <a:spcBef>
-                <a:spcPts val="400"/>
-              </a:spcBef>
-              <a:spcAft>
-                <a:spcPts val="1200"/>
-              </a:spcAft>
-              <a:defRPr sz="1350" b="1">
+              <a:defRPr b="1" sz="1050">
                 <a:solidFill>
                   <a:srgbClr val="0F172A"/>
                 </a:solidFill>
               </a:defRPr>
             </a:pPr>
             <a:r>
-              <a:t>Parametrización &amp; Protocolos</a:t>
+              <a:t>PARAMETRIZACIÓN &amp; MODELOS</a:t>
             </a:r>
           </a:p>
           <a:p>
             <a:pPr>
-              <a:lnSpc>
-                <a:spcPct val="125000"/>
-              </a:lnSpc>
-              <a:defRPr sz="1050">
-                <a:solidFill>
-                  <a:srgbClr val="64748B"/>
-                </a:solidFill>
-              </a:defRPr>
-            </a:pPr>
-            <a:r>
-              <a:t>Configuración de los modelos PopPK preferidos por el comité de farmacia. Definición de dianas terapéuticas institucionales (ej. AUC 400–600 o CIM específica).</a:t>
+              <a:defRPr sz="850">
+                <a:solidFill>
+                  <a:srgbClr val="475569"/>
+                </a:solidFill>
+              </a:defRPr>
+            </a:pPr>
+            <a:r>
+              <a:t>• Selección de modelos poblacionales institucionales (PopPK)</a:t>
+            </a:r>
+            <a:br/>
+            <a:r>
+              <a:t>• Configuración de rangos diana de la comisión de farmacia</a:t>
+            </a:r>
+            <a:br/>
+            <a:r>
+              <a:t>• Configuración de roles de usuarios y protocolo de anonimización</a:t>
             </a:r>
           </a:p>
         </p:txBody>
@@ -5009,14 +6956,57 @@
         </p:nvSpPr>
         <p:spPr>
           <a:xfrm>
-            <a:off x="3456432" y="1783080"/>
-            <a:ext cx="2542032" cy="4389120"/>
+            <a:off x="804672" y="1892808"/>
+            <a:ext cx="54864" cy="1837944"/>
           </a:xfrm>
           <a:prstGeom prst="roundRect">
             <a:avLst/>
           </a:prstGeom>
           <a:solidFill>
-            <a:srgbClr val="FFFFFF"/>
+            <a:srgbClr val="0284C7"/>
+          </a:solidFill>
+          <a:ln>
+            <a:noFill/>
+          </a:ln>
+        </p:spPr>
+        <p:style>
+          <a:lnRef idx="1">
+            <a:schemeClr val="accent1"/>
+          </a:lnRef>
+          <a:fillRef idx="3">
+            <a:schemeClr val="accent1"/>
+          </a:fillRef>
+          <a:effectRef idx="2">
+            <a:schemeClr val="accent1"/>
+          </a:effectRef>
+          <a:fontRef idx="minor">
+            <a:schemeClr val="lt1"/>
+          </a:fontRef>
+        </p:style>
+        <p:txBody>
+          <a:bodyPr rtlCol="0" anchor="ctr"/>
+          <a:lstStyle/>
+          <a:p>
+            <a:pPr algn="ctr"/>
+          </a:p>
+        </p:txBody>
+      </p:sp>
+      <p:sp>
+        <p:nvSpPr>
+          <p:cNvPr id="7" name="Rounded Rectangle 6"/>
+          <p:cNvSpPr/>
+          <p:nvPr/>
+        </p:nvSpPr>
+        <p:spPr>
+          <a:xfrm>
+            <a:off x="4297680" y="1783080"/>
+            <a:ext cx="3383280" cy="2057400"/>
+          </a:xfrm>
+          <a:prstGeom prst="roundRect">
+            <a:avLst/>
+          </a:prstGeom>
+          <a:solidFill>
+            <a:srgbClr val="F8FAFC"/>
           </a:solidFill>
           <a:ln w="12700">
             <a:solidFill>
@@ -5039,71 +7029,113 @@
           </a:fontRef>
         </p:style>
         <p:txBody>
-          <a:bodyPr rtlCol="0" anchor="ctr" lIns="201168" tIns="201168" rIns="164592"/>
+          <a:bodyPr rtlCol="0" anchor="ctr" lIns="182880" tIns="137160"/>
           <a:lstStyle/>
           <a:p>
             <a:pPr algn="ctr">
-              <a:defRPr sz="1000" b="1">
-                <a:solidFill>
-                  <a:srgbClr val="059669"/>
-                </a:solidFill>
-              </a:defRPr>
-            </a:pPr>
-            <a:r>
-              <a:t>FASE 2 · DÍAS 16–30</a:t>
+              <a:defRPr b="1" sz="950">
+                <a:solidFill>
+                  <a:srgbClr val="2563EB"/>
+                </a:solidFill>
+              </a:defRPr>
+            </a:pPr>
+            <a:r>
+              <a:t>FASE 2 (DÍAS 16 - 30)</a:t>
             </a:r>
           </a:p>
           <a:p>
             <a:pPr>
-              <a:spcBef>
-                <a:spcPts val="400"/>
-              </a:spcBef>
-              <a:spcAft>
-                <a:spcPts val="1200"/>
-              </a:spcAft>
-              <a:defRPr sz="1350" b="1">
+              <a:defRPr b="1" sz="1050">
                 <a:solidFill>
                   <a:srgbClr val="0F172A"/>
                 </a:solidFill>
               </a:defRPr>
             </a:pPr>
             <a:r>
-              <a:t>Capacitación de Equipos</a:t>
+              <a:t>CAPACITACIÓN DEL EQUIPO</a:t>
             </a:r>
           </a:p>
           <a:p>
             <a:pPr>
-              <a:lnSpc>
-                <a:spcPct val="125000"/>
-              </a:lnSpc>
-              <a:defRPr sz="1050">
-                <a:solidFill>
-                  <a:srgbClr val="64748B"/>
-                </a:solidFill>
-              </a:defRPr>
-            </a:pPr>
-            <a:r>
-              <a:t>Talleres prácticos con casos clínicos reales para farmacéuticos clínicos, médicos de UCI e infectólogos del equipo PROA. Certificación en manejo de la plataforma.</a:t>
-            </a:r>
-          </a:p>
-        </p:txBody>
-      </p:sp>
-      <p:sp>
-        <p:nvSpPr>
-          <p:cNvPr id="7" name="Rounded Rectangle 6"/>
+              <a:defRPr sz="850">
+                <a:solidFill>
+                  <a:srgbClr val="475569"/>
+                </a:solidFill>
+              </a:defRPr>
+            </a:pPr>
+            <a:r>
+              <a:t>• Talleres prácticos para Farmacéuticos Clínicos de UCI</a:t>
+            </a:r>
+            <a:br/>
+            <a:r>
+              <a:t>• Sesiones de alineación con Intensivistas e Infectólogos</a:t>
+            </a:r>
+            <a:br/>
+            <a:r>
+              <a:t>• Análisis conjunto de casos clínicos reales históricos</a:t>
+            </a:r>
+          </a:p>
+        </p:txBody>
+      </p:sp>
+      <p:sp>
+        <p:nvSpPr>
+          <p:cNvPr id="8" name="Rounded Rectangle 7"/>
           <p:cNvSpPr/>
           <p:nvPr/>
         </p:nvSpPr>
         <p:spPr>
           <a:xfrm>
-            <a:off x="6181344" y="1783080"/>
-            <a:ext cx="2542032" cy="4389120"/>
+            <a:off x="4370832" y="1892808"/>
+            <a:ext cx="54864" cy="1837944"/>
           </a:xfrm>
           <a:prstGeom prst="roundRect">
             <a:avLst/>
           </a:prstGeom>
           <a:solidFill>
-            <a:srgbClr val="FFFFFF"/>
+            <a:srgbClr val="2563EB"/>
+          </a:solidFill>
+          <a:ln>
+            <a:noFill/>
+          </a:ln>
+        </p:spPr>
+        <p:style>
+          <a:lnRef idx="1">
+            <a:schemeClr val="accent1"/>
+          </a:lnRef>
+          <a:fillRef idx="3">
+            <a:schemeClr val="accent1"/>
+          </a:fillRef>
+          <a:effectRef idx="2">
+            <a:schemeClr val="accent1"/>
+          </a:effectRef>
+          <a:fontRef idx="minor">
+            <a:schemeClr val="lt1"/>
+          </a:fontRef>
+        </p:style>
+        <p:txBody>
+          <a:bodyPr rtlCol="0" anchor="ctr"/>
+          <a:lstStyle/>
+          <a:p>
+            <a:pPr algn="ctr"/>
+          </a:p>
+        </p:txBody>
+      </p:sp>
+      <p:sp>
+        <p:nvSpPr>
+          <p:cNvPr id="9" name="Rounded Rectangle 8"/>
+          <p:cNvSpPr/>
+          <p:nvPr/>
+        </p:nvSpPr>
+        <p:spPr>
+          <a:xfrm>
+            <a:off x="731520" y="3977640"/>
+            <a:ext cx="3383280" cy="2057400"/>
+          </a:xfrm>
+          <a:prstGeom prst="roundRect">
+            <a:avLst/>
+          </a:prstGeom>
+          <a:solidFill>
+            <a:srgbClr val="F8FAFC"/>
           </a:solidFill>
           <a:ln w="12700">
             <a:solidFill>
@@ -5126,71 +7158,113 @@
           </a:fontRef>
         </p:style>
         <p:txBody>
-          <a:bodyPr rtlCol="0" anchor="ctr" lIns="201168" tIns="201168" rIns="164592"/>
+          <a:bodyPr rtlCol="0" anchor="ctr" lIns="182880" tIns="137160"/>
           <a:lstStyle/>
           <a:p>
             <a:pPr algn="ctr">
-              <a:defRPr sz="1000" b="1">
+              <a:defRPr b="1" sz="950">
                 <a:solidFill>
                   <a:srgbClr val="D97706"/>
                 </a:solidFill>
               </a:defRPr>
             </a:pPr>
             <a:r>
-              <a:t>FASE 3 · DÍAS 31–60</a:t>
+              <a:t>FASE 3 (DÍAS 31 - 45)</a:t>
             </a:r>
           </a:p>
           <a:p>
             <a:pPr>
-              <a:spcBef>
-                <a:spcPts val="400"/>
-              </a:spcBef>
-              <a:spcAft>
-                <a:spcPts val="1200"/>
-              </a:spcAft>
-              <a:defRPr sz="1350" b="1">
+              <a:defRPr b="1" sz="1050">
                 <a:solidFill>
                   <a:srgbClr val="0F172A"/>
                 </a:solidFill>
               </a:defRPr>
             </a:pPr>
             <a:r>
-              <a:t>Piloto Clínico Activo</a:t>
+              <a:t>MONITORIZACIÓN PARALELA</a:t>
             </a:r>
           </a:p>
           <a:p>
             <a:pPr>
-              <a:lnSpc>
-                <a:spcPct val="125000"/>
-              </a:lnSpc>
-              <a:defRPr sz="1050">
-                <a:solidFill>
-                  <a:srgbClr val="64748B"/>
-                </a:solidFill>
-              </a:defRPr>
-            </a:pPr>
-            <a:r>
-              <a:t>Aplicación supervisada en pacientes reales en UCI. Monitorización de indicadores clave: tiempo en alcanzar diana, tasa de toxicidad y concordancia bayesiana.</a:t>
-            </a:r>
-          </a:p>
-        </p:txBody>
-      </p:sp>
-      <p:sp>
-        <p:nvSpPr>
-          <p:cNvPr id="8" name="Rounded Rectangle 7"/>
+              <a:defRPr sz="850">
+                <a:solidFill>
+                  <a:srgbClr val="475569"/>
+                </a:solidFill>
+              </a:defRPr>
+            </a:pPr>
+            <a:r>
+              <a:t>• Cálculo paralelo: dosificación convencional vs PK-Bayes</a:t>
+            </a:r>
+            <a:br/>
+            <a:r>
+              <a:t>• Registro ciego de discrepancias y tiempos de respuesta</a:t>
+            </a:r>
+            <a:br/>
+            <a:r>
+              <a:t>• Evaluación de concordancia clínica y aceptación por el equipo</a:t>
+            </a:r>
+          </a:p>
+        </p:txBody>
+      </p:sp>
+      <p:sp>
+        <p:nvSpPr>
+          <p:cNvPr id="10" name="Rounded Rectangle 9"/>
           <p:cNvSpPr/>
           <p:nvPr/>
         </p:nvSpPr>
         <p:spPr>
           <a:xfrm>
-            <a:off x="8906256" y="1783080"/>
-            <a:ext cx="2542032" cy="4389120"/>
+            <a:off x="804672" y="4087368"/>
+            <a:ext cx="54864" cy="1837944"/>
           </a:xfrm>
           <a:prstGeom prst="roundRect">
             <a:avLst/>
           </a:prstGeom>
           <a:solidFill>
-            <a:srgbClr val="FFFFFF"/>
+            <a:srgbClr val="D97706"/>
+          </a:solidFill>
+          <a:ln>
+            <a:noFill/>
+          </a:ln>
+        </p:spPr>
+        <p:style>
+          <a:lnRef idx="1">
+            <a:schemeClr val="accent1"/>
+          </a:lnRef>
+          <a:fillRef idx="3">
+            <a:schemeClr val="accent1"/>
+          </a:fillRef>
+          <a:effectRef idx="2">
+            <a:schemeClr val="accent1"/>
+          </a:effectRef>
+          <a:fontRef idx="minor">
+            <a:schemeClr val="lt1"/>
+          </a:fontRef>
+        </p:style>
+        <p:txBody>
+          <a:bodyPr rtlCol="0" anchor="ctr"/>
+          <a:lstStyle/>
+          <a:p>
+            <a:pPr algn="ctr"/>
+          </a:p>
+        </p:txBody>
+      </p:sp>
+      <p:sp>
+        <p:nvSpPr>
+          <p:cNvPr id="11" name="Rounded Rectangle 10"/>
+          <p:cNvSpPr/>
+          <p:nvPr/>
+        </p:nvSpPr>
+        <p:spPr>
+          <a:xfrm>
+            <a:off x="4297680" y="3977640"/>
+            <a:ext cx="3383280" cy="2057400"/>
+          </a:xfrm>
+          <a:prstGeom prst="roundRect">
+            <a:avLst/>
+          </a:prstGeom>
+          <a:solidFill>
+            <a:srgbClr val="F8FAFC"/>
           </a:solidFill>
           <a:ln w="12700">
             <a:solidFill>
@@ -5213,64 +7287,106 @@
           </a:fontRef>
         </p:style>
         <p:txBody>
-          <a:bodyPr rtlCol="0" anchor="ctr" lIns="201168" tIns="201168" rIns="164592"/>
+          <a:bodyPr rtlCol="0" anchor="ctr" lIns="182880" tIns="137160"/>
           <a:lstStyle/>
           <a:p>
             <a:pPr algn="ctr">
-              <a:defRPr sz="1000" b="1">
-                <a:solidFill>
-                  <a:srgbClr val="6366F1"/>
-                </a:solidFill>
-              </a:defRPr>
-            </a:pPr>
-            <a:r>
-              <a:t>FASE 4 · DÍA 60+</a:t>
+              <a:defRPr b="1" sz="950">
+                <a:solidFill>
+                  <a:srgbClr val="059669"/>
+                </a:solidFill>
+              </a:defRPr>
+            </a:pPr>
+            <a:r>
+              <a:t>FASE 4 (DÍAS 46 - 60)</a:t>
             </a:r>
           </a:p>
           <a:p>
             <a:pPr>
-              <a:spcBef>
-                <a:spcPts val="400"/>
-              </a:spcBef>
-              <a:spcAft>
-                <a:spcPts val="1200"/>
-              </a:spcAft>
-              <a:defRPr sz="1350" b="1">
+              <a:defRPr b="1" sz="1050">
                 <a:solidFill>
                   <a:srgbClr val="0F172A"/>
                 </a:solidFill>
               </a:defRPr>
             </a:pPr>
             <a:r>
-              <a:t>Evaluación &amp; Consolidación</a:t>
+              <a:t>AUDITORÍA &amp; ESCALAMIENTO</a:t>
             </a:r>
           </a:p>
           <a:p>
             <a:pPr>
-              <a:lnSpc>
-                <a:spcPct val="125000"/>
-              </a:lnSpc>
-              <a:defRPr sz="1050">
-                <a:solidFill>
-                  <a:srgbClr val="64748B"/>
-                </a:solidFill>
-              </a:defRPr>
-            </a:pPr>
-            <a:r>
-              <a:t>Presentación del informe de impacto clínico y retorno de inversión a la Dirección Médica y Comité de Farmacia para la adopción institucional definitiva.</a:t>
-            </a:r>
-          </a:p>
-        </p:txBody>
-      </p:sp>
-      <p:sp>
-        <p:nvSpPr>
-          <p:cNvPr id="9" name="TextBox 8"/>
+              <a:defRPr sz="850">
+                <a:solidFill>
+                  <a:srgbClr val="475569"/>
+                </a:solidFill>
+              </a:defRPr>
+            </a:pPr>
+            <a:r>
+              <a:t>• Auditoría de resultados: % de pacientes en diana y LRA evitada</a:t>
+            </a:r>
+            <a:br/>
+            <a:r>
+              <a:t>• Informe farmacoeconómico de ahorro institucional proyectado</a:t>
+            </a:r>
+            <a:br/>
+            <a:r>
+              <a:t>• Presentación a Dirección Médica para adopción definitiva</a:t>
+            </a:r>
+          </a:p>
+        </p:txBody>
+      </p:sp>
+      <p:sp>
+        <p:nvSpPr>
+          <p:cNvPr id="12" name="Rounded Rectangle 11"/>
+          <p:cNvSpPr/>
+          <p:nvPr/>
+        </p:nvSpPr>
+        <p:spPr>
+          <a:xfrm>
+            <a:off x="4370832" y="4087368"/>
+            <a:ext cx="54864" cy="1837944"/>
+          </a:xfrm>
+          <a:prstGeom prst="roundRect">
+            <a:avLst/>
+          </a:prstGeom>
+          <a:solidFill>
+            <a:srgbClr val="059669"/>
+          </a:solidFill>
+          <a:ln>
+            <a:noFill/>
+          </a:ln>
+        </p:spPr>
+        <p:style>
+          <a:lnRef idx="1">
+            <a:schemeClr val="accent1"/>
+          </a:lnRef>
+          <a:fillRef idx="3">
+            <a:schemeClr val="accent1"/>
+          </a:fillRef>
+          <a:effectRef idx="2">
+            <a:schemeClr val="accent1"/>
+          </a:effectRef>
+          <a:fontRef idx="minor">
+            <a:schemeClr val="lt1"/>
+          </a:fontRef>
+        </p:style>
+        <p:txBody>
+          <a:bodyPr rtlCol="0" anchor="ctr"/>
+          <a:lstStyle/>
+          <a:p>
+            <a:pPr algn="ctr"/>
+          </a:p>
+        </p:txBody>
+      </p:sp>
+      <p:sp>
+        <p:nvSpPr>
+          <p:cNvPr id="13" name="TextBox 12"/>
           <p:cNvSpPr txBox="1"/>
           <p:nvPr/>
         </p:nvSpPr>
         <p:spPr>
           <a:xfrm>
-            <a:off x="731520" y="6400800"/>
+            <a:off x="731520" y="6437376"/>
             <a:ext cx="10725912" cy="274320"/>
           </a:xfrm>
           <a:prstGeom prst="rect">
@@ -5287,12 +7403,12 @@
             <a:pPr>
               <a:defRPr sz="850">
                 <a:solidFill>
-                  <a:srgbClr val="94A3B8"/>
-                </a:solidFill>
-              </a:defRPr>
-            </a:pPr>
-            <a:r>
-              <a:t>PK-Bayes · Decision Support System CDSS v3.2                                                Documento Institucional Clínico                                                13 / 14</a:t>
+                  <a:srgbClr val="64748B"/>
+                </a:solidFill>
+              </a:defRPr>
+            </a:pPr>
+            <a:r>
+              <a:t>PK-Bayes · CDSS v3.2 · Soporte a la Decisión Clínica Farmacocinética                       Confidencial · Uso Hospitalario Institucional                       13 / 14</a:t>
             </a:r>
           </a:p>
         </p:txBody>
@@ -5311,7 +7427,7 @@
     <p:bg>
       <p:bgPr>
         <a:solidFill>
-          <a:srgbClr val="0A192F"/>
+          <a:srgbClr val="FFFFFF"/>
         </a:solidFill>
         <a:effectLst/>
       </p:bgPr>
@@ -5323,9 +7439,54 @@
         <p:nvPr/>
       </p:nvGrpSpPr>
       <p:grpSpPr/>
+      <p:sp>
+        <p:nvSpPr>
+          <p:cNvPr id="2" name="Rounded Rectangle 1"/>
+          <p:cNvSpPr/>
+          <p:nvPr/>
+        </p:nvSpPr>
+        <p:spPr>
+          <a:xfrm>
+            <a:off x="731520" y="731520"/>
+            <a:ext cx="10728655" cy="5303520"/>
+          </a:xfrm>
+          <a:prstGeom prst="roundRect">
+            <a:avLst/>
+          </a:prstGeom>
+          <a:solidFill>
+            <a:srgbClr val="F8FAFC"/>
+          </a:solidFill>
+          <a:ln w="12700">
+            <a:solidFill>
+              <a:srgbClr val="E2E8F0"/>
+            </a:solidFill>
+          </a:ln>
+        </p:spPr>
+        <p:style>
+          <a:lnRef idx="1">
+            <a:schemeClr val="accent1"/>
+          </a:lnRef>
+          <a:fillRef idx="3">
+            <a:schemeClr val="accent1"/>
+          </a:fillRef>
+          <a:effectRef idx="2">
+            <a:schemeClr val="accent1"/>
+          </a:effectRef>
+          <a:fontRef idx="minor">
+            <a:schemeClr val="lt1"/>
+          </a:fontRef>
+        </p:style>
+        <p:txBody>
+          <a:bodyPr rtlCol="0" anchor="ctr"/>
+          <a:lstStyle/>
+          <a:p>
+            <a:pPr algn="ctr"/>
+          </a:p>
+        </p:txBody>
+      </p:sp>
       <p:pic>
         <p:nvPicPr>
-          <p:cNvPr id="2" name="Picture 1" descr="logo-icon-512.png"/>
+          <p:cNvPr id="3" name="Picture 2" descr="logo-icon-512.png"/>
           <p:cNvPicPr>
             <a:picLocks noChangeAspect="1"/>
           </p:cNvPicPr>
@@ -5339,8 +7500,8 @@
         </p:blipFill>
         <p:spPr>
           <a:xfrm>
-            <a:off x="822960" y="1097280"/>
-            <a:ext cx="1188720" cy="1188720"/>
+            <a:off x="5455310" y="1097280"/>
+            <a:ext cx="1280160" cy="1280160"/>
           </a:xfrm>
           <a:prstGeom prst="rect">
             <a:avLst/>
@@ -5349,24 +7510,71 @@
       </p:pic>
       <p:sp>
         <p:nvSpPr>
-          <p:cNvPr id="3" name="Rounded Rectangle 2"/>
+          <p:cNvPr id="4" name="TextBox 3"/>
+          <p:cNvSpPr txBox="1"/>
+          <p:nvPr/>
+        </p:nvSpPr>
+        <p:spPr>
+          <a:xfrm>
+            <a:off x="1371600" y="2468880"/>
+            <a:ext cx="9448495" cy="1645920"/>
+          </a:xfrm>
+          <a:prstGeom prst="rect">
+            <a:avLst/>
+          </a:prstGeom>
+          <a:noFill/>
+        </p:spPr>
+        <p:txBody>
+          <a:bodyPr wrap="square">
+            <a:spAutoFit/>
+          </a:bodyPr>
+          <a:lstStyle/>
+          <a:p>
+            <a:pPr algn="ctr">
+              <a:defRPr sz="2400" b="1">
+                <a:solidFill>
+                  <a:srgbClr val="0F172A"/>
+                </a:solidFill>
+              </a:defRPr>
+            </a:pPr>
+            <a:r>
+              <a:t>Iniciemos la Individualización Farmacocinética en su Hospital</a:t>
+            </a:r>
+          </a:p>
+          <a:p>
+            <a:pPr algn="ctr">
+              <a:defRPr sz="1300">
+                <a:solidFill>
+                  <a:srgbClr val="0284C7"/>
+                </a:solidFill>
+              </a:defRPr>
+            </a:pPr>
+            <a:r>
+              <a:t>PK-Bayes: Apoyo riguroso a la decisión clínica para mejorar la seguridad del paciente crítico y optimizar recursos hospitalarios.</a:t>
+            </a:r>
+          </a:p>
+        </p:txBody>
+      </p:sp>
+      <p:sp>
+        <p:nvSpPr>
+          <p:cNvPr id="5" name="Rounded Rectangle 4"/>
           <p:cNvSpPr/>
           <p:nvPr/>
         </p:nvSpPr>
         <p:spPr>
           <a:xfrm>
-            <a:off x="2194560" y="1188720"/>
-            <a:ext cx="3931920" cy="384048"/>
+            <a:off x="1371600" y="3931920"/>
+            <a:ext cx="2834640" cy="1554480"/>
           </a:xfrm>
           <a:prstGeom prst="roundRect">
             <a:avLst/>
           </a:prstGeom>
           <a:solidFill>
-            <a:srgbClr val="102A4D"/>
+            <a:srgbClr val="FFFFFF"/>
           </a:solidFill>
           <a:ln w="12700">
             <a:solidFill>
-              <a:srgbClr val="1E406E"/>
+              <a:srgbClr val="E2E8F0"/>
             </a:solidFill>
           </a:ln>
         </p:spPr>
@@ -5385,92 +7593,54 @@
           </a:fontRef>
         </p:style>
         <p:txBody>
-          <a:bodyPr rtlCol="0" anchor="ctr"/>
+          <a:bodyPr rtlCol="0" anchor="ctr" lIns="164592" tIns="137160"/>
           <a:lstStyle/>
           <a:p>
             <a:pPr algn="ctr">
-              <a:defRPr sz="950" b="1">
-                <a:solidFill>
-                  <a:srgbClr val="38BDF8"/>
-                </a:solidFill>
-              </a:defRPr>
-            </a:pPr>
-            <a:r>
-              <a:t>MEDICINA DE PRECISIÓN · EVALUACIÓN INSTITUCIONAL</a:t>
-            </a:r>
-          </a:p>
-        </p:txBody>
-      </p:sp>
-      <p:sp>
-        <p:nvSpPr>
-          <p:cNvPr id="4" name="TextBox 3"/>
-          <p:cNvSpPr txBox="1"/>
-          <p:nvPr/>
-        </p:nvSpPr>
-        <p:spPr>
-          <a:xfrm>
-            <a:off x="822960" y="2468880"/>
-            <a:ext cx="10515600" cy="1463040"/>
-          </a:xfrm>
-          <a:prstGeom prst="rect">
-            <a:avLst/>
-          </a:prstGeom>
-          <a:noFill/>
-        </p:spPr>
-        <p:txBody>
-          <a:bodyPr wrap="square">
-            <a:spAutoFit/>
-          </a:bodyPr>
-          <a:lstStyle/>
+              <a:defRPr b="1" sz="1050">
+                <a:solidFill>
+                  <a:srgbClr val="0284C7"/>
+                </a:solidFill>
+              </a:defRPr>
+            </a:pPr>
+            <a:r>
+              <a:t>1. WORKSHOP TÉCNICO</a:t>
+            </a:r>
+          </a:p>
           <a:p>
             <a:pPr>
-              <a:defRPr sz="3600" b="1">
-                <a:solidFill>
-                  <a:srgbClr val="FFFFFF"/>
-                </a:solidFill>
-              </a:defRPr>
-            </a:pPr>
-            <a:r>
-              <a:t>Inicie el Piloto Clínico de PK-Bayes en su Hospital</a:t>
-            </a:r>
-          </a:p>
-          <a:p>
-            <a:pPr>
-              <a:spcBef>
-                <a:spcPts val="800"/>
-              </a:spcBef>
-              <a:defRPr sz="2000">
-                <a:solidFill>
-                  <a:srgbClr val="38BDF8"/>
-                </a:solidFill>
-              </a:defRPr>
-            </a:pPr>
-            <a:r>
-              <a:t>De la dosificación empírica al estándar de oro en farmacocinética clínica individualizada.</a:t>
-            </a:r>
-          </a:p>
-        </p:txBody>
-      </p:sp>
-      <p:sp>
-        <p:nvSpPr>
-          <p:cNvPr id="5" name="Rounded Rectangle 4"/>
+              <a:defRPr sz="900">
+                <a:solidFill>
+                  <a:srgbClr val="475569"/>
+                </a:solidFill>
+              </a:defRPr>
+            </a:pPr>
+            <a:r>
+              <a:t>Demostración interactiva con casos clínicos de su servicio de farmacia y UCI.</a:t>
+            </a:r>
+          </a:p>
+        </p:txBody>
+      </p:sp>
+      <p:sp>
+        <p:nvSpPr>
+          <p:cNvPr id="6" name="Rounded Rectangle 5"/>
           <p:cNvSpPr/>
           <p:nvPr/>
         </p:nvSpPr>
         <p:spPr>
           <a:xfrm>
-            <a:off x="822960" y="4389120"/>
-            <a:ext cx="3383280" cy="1737360"/>
+            <a:off x="4389120" y="3931920"/>
+            <a:ext cx="2834640" cy="1554480"/>
           </a:xfrm>
           <a:prstGeom prst="roundRect">
             <a:avLst/>
           </a:prstGeom>
           <a:solidFill>
-            <a:srgbClr val="102542"/>
+            <a:srgbClr val="FFFFFF"/>
           </a:solidFill>
           <a:ln w="12700">
             <a:solidFill>
-              <a:srgbClr val="1E3A5F"/>
+              <a:srgbClr val="E2E8F0"/>
             </a:solidFill>
           </a:ln>
         </p:spPr>
@@ -5489,72 +7659,54 @@
           </a:fontRef>
         </p:style>
         <p:txBody>
-          <a:bodyPr rtlCol="0" anchor="ctr" lIns="182880" tIns="182880"/>
+          <a:bodyPr rtlCol="0" anchor="ctr" lIns="164592" tIns="137160"/>
           <a:lstStyle/>
           <a:p>
             <a:pPr algn="ctr">
-              <a:defRPr sz="1050" b="1">
-                <a:solidFill>
-                  <a:srgbClr val="10B981"/>
-                </a:solidFill>
-              </a:defRPr>
-            </a:pPr>
-            <a:r>
-              <a:t>DEMO EN VIVO INTERACTIVA</a:t>
+              <a:defRPr b="1" sz="1050">
+                <a:solidFill>
+                  <a:srgbClr val="059669"/>
+                </a:solidFill>
+              </a:defRPr>
+            </a:pPr>
+            <a:r>
+              <a:t>2. ACTIVACIÓN PILOTO</a:t>
             </a:r>
           </a:p>
           <a:p>
             <a:pPr>
-              <a:spcBef>
-                <a:spcPts val="600"/>
-              </a:spcBef>
-              <a:defRPr sz="1000">
-                <a:solidFill>
-                  <a:srgbClr val="CBD5E1"/>
-                </a:solidFill>
-              </a:defRPr>
-            </a:pPr>
-            <a:r>
-              <a:t>Acceda a la estación de simulación clínica y pruebe casos reales de vancomicina y fenitoína.</a:t>
-            </a:r>
-          </a:p>
-          <a:p>
-            <a:pPr>
-              <a:spcBef>
-                <a:spcPts val="800"/>
-              </a:spcBef>
-              <a:defRPr sz="1000" b="1">
-                <a:solidFill>
-                  <a:srgbClr val="38BDF8"/>
-                </a:solidFill>
-              </a:defRPr>
-            </a:pPr>
-            <a:r>
-              <a:t>https://pk-bayes.onrender.com</a:t>
-            </a:r>
-          </a:p>
-        </p:txBody>
-      </p:sp>
-      <p:sp>
-        <p:nvSpPr>
-          <p:cNvPr id="6" name="Rounded Rectangle 5"/>
+              <a:defRPr sz="900">
+                <a:solidFill>
+                  <a:srgbClr val="475569"/>
+                </a:solidFill>
+              </a:defRPr>
+            </a:pPr>
+            <a:r>
+              <a:t>Acceso a plataforma sin coste durante 60 días para evaluación asistencial.</a:t>
+            </a:r>
+          </a:p>
+        </p:txBody>
+      </p:sp>
+      <p:sp>
+        <p:nvSpPr>
+          <p:cNvPr id="7" name="Rounded Rectangle 6"/>
           <p:cNvSpPr/>
           <p:nvPr/>
         </p:nvSpPr>
         <p:spPr>
           <a:xfrm>
-            <a:off x="4389120" y="4389120"/>
-            <a:ext cx="3383280" cy="1737360"/>
+            <a:off x="7406640" y="3931920"/>
+            <a:ext cx="2834640" cy="1554480"/>
           </a:xfrm>
           <a:prstGeom prst="roundRect">
             <a:avLst/>
           </a:prstGeom>
           <a:solidFill>
-            <a:srgbClr val="102542"/>
+            <a:srgbClr val="FFFFFF"/>
           </a:solidFill>
           <a:ln w="12700">
             <a:solidFill>
-              <a:srgbClr val="1E3A5F"/>
+              <a:srgbClr val="E2E8F0"/>
             </a:solidFill>
           </a:ln>
         </p:spPr>
@@ -5573,132 +7725,30 @@
           </a:fontRef>
         </p:style>
         <p:txBody>
-          <a:bodyPr rtlCol="0" anchor="ctr" lIns="182880" tIns="182880"/>
+          <a:bodyPr rtlCol="0" anchor="ctr" lIns="164592" tIns="137160"/>
           <a:lstStyle/>
           <a:p>
             <a:pPr algn="ctr">
-              <a:defRPr sz="1050" b="1">
-                <a:solidFill>
-                  <a:srgbClr val="10B981"/>
-                </a:solidFill>
-              </a:defRPr>
-            </a:pPr>
-            <a:r>
-              <a:t>SOLICITUD DE PILOTO CLÍNICO</a:t>
+              <a:defRPr b="1" sz="1050">
+                <a:solidFill>
+                  <a:srgbClr val="7C3AED"/>
+                </a:solidFill>
+              </a:defRPr>
+            </a:pPr>
+            <a:r>
+              <a:t>3. SOPORTE CIENTÍFICO</a:t>
             </a:r>
           </a:p>
           <a:p>
             <a:pPr>
-              <a:spcBef>
-                <a:spcPts val="600"/>
-              </a:spcBef>
-              <a:defRPr sz="1000">
-                <a:solidFill>
-                  <a:srgbClr val="CBD5E1"/>
-                </a:solidFill>
-              </a:defRPr>
-            </a:pPr>
-            <a:r>
-              <a:t>Coordine una sesión con nuestro equipo farmacocinético para diseñar el piloto en su centro.</a:t>
-            </a:r>
-          </a:p>
-          <a:p>
-            <a:pPr>
-              <a:spcBef>
-                <a:spcPts val="800"/>
-              </a:spcBef>
-              <a:defRPr sz="1000" b="1">
-                <a:solidFill>
-                  <a:srgbClr val="38BDF8"/>
-                </a:solidFill>
-              </a:defRPr>
-            </a:pPr>
-            <a:r>
-              <a:t>contacto@pk-bayes.com</a:t>
-            </a:r>
-          </a:p>
-        </p:txBody>
-      </p:sp>
-      <p:sp>
-        <p:nvSpPr>
-          <p:cNvPr id="7" name="Rounded Rectangle 6"/>
-          <p:cNvSpPr/>
-          <p:nvPr/>
-        </p:nvSpPr>
-        <p:spPr>
-          <a:xfrm>
-            <a:off x="7955279" y="4389120"/>
-            <a:ext cx="3383280" cy="1737360"/>
-          </a:xfrm>
-          <a:prstGeom prst="roundRect">
-            <a:avLst/>
-          </a:prstGeom>
-          <a:solidFill>
-            <a:srgbClr val="102542"/>
-          </a:solidFill>
-          <a:ln w="12700">
-            <a:solidFill>
-              <a:srgbClr val="1E3A5F"/>
-            </a:solidFill>
-          </a:ln>
-        </p:spPr>
-        <p:style>
-          <a:lnRef idx="1">
-            <a:schemeClr val="accent1"/>
-          </a:lnRef>
-          <a:fillRef idx="3">
-            <a:schemeClr val="accent1"/>
-          </a:fillRef>
-          <a:effectRef idx="2">
-            <a:schemeClr val="accent1"/>
-          </a:effectRef>
-          <a:fontRef idx="minor">
-            <a:schemeClr val="lt1"/>
-          </a:fontRef>
-        </p:style>
-        <p:txBody>
-          <a:bodyPr rtlCol="0" anchor="ctr" lIns="182880" tIns="182880"/>
-          <a:lstStyle/>
-          <a:p>
-            <a:pPr algn="ctr">
-              <a:defRPr sz="1050" b="1">
-                <a:solidFill>
-                  <a:srgbClr val="10B981"/>
-                </a:solidFill>
-              </a:defRPr>
-            </a:pPr>
-            <a:r>
-              <a:t>PORTAL Y DOCUMENTACIÓN</a:t>
-            </a:r>
-          </a:p>
-          <a:p>
-            <a:pPr>
-              <a:spcBef>
-                <a:spcPts val="600"/>
-              </a:spcBef>
-              <a:defRPr sz="1000">
-                <a:solidFill>
-                  <a:srgbClr val="CBD5E1"/>
-                </a:solidFill>
-              </a:defRPr>
-            </a:pPr>
-            <a:r>
-              <a:t>Revise los modelos farmacocinéticos validados, guías clínicas y especificaciones de seguridad.</a:t>
-            </a:r>
-          </a:p>
-          <a:p>
-            <a:pPr>
-              <a:spcBef>
-                <a:spcPts val="800"/>
-              </a:spcBef>
-              <a:defRPr sz="1000" b="1">
-                <a:solidFill>
-                  <a:srgbClr val="38BDF8"/>
-                </a:solidFill>
-              </a:defRPr>
-            </a:pPr>
-            <a:r>
-              <a:t>Portal Clínico PK-Bayes v3.2</a:t>
+              <a:defRPr sz="900">
+                <a:solidFill>
+                  <a:srgbClr val="475569"/>
+                </a:solidFill>
+              </a:defRPr>
+            </a:pPr>
+            <a:r>
+              <a:t>Acompañamiento especializado de farmacéuticos clínicos y modeladores PK/PD.</a:t>
             </a:r>
           </a:p>
         </p:txBody>
@@ -5711,7 +7761,7 @@
         </p:nvSpPr>
         <p:spPr>
           <a:xfrm>
-            <a:off x="731520" y="6400800"/>
+            <a:off x="731520" y="6437376"/>
             <a:ext cx="10725912" cy="274320"/>
           </a:xfrm>
           <a:prstGeom prst="rect">
@@ -5733,7 +7783,7 @@
               </a:defRPr>
             </a:pPr>
             <a:r>
-              <a:t>PK-Bayes · Decision Support System CDSS v3.2                                                Documento Institucional Clínico                                                14 / 14</a:t>
+              <a:t>PK-Bayes · CDSS v3.2 · Soporte a la Decisión Clínica Farmacocinética                       Confidencial · Uso Hospitalario Institucional                       14 / 14</a:t>
             </a:r>
           </a:p>
         </p:txBody>
@@ -5752,7 +7802,7 @@
     <p:bg>
       <p:bgPr>
         <a:solidFill>
-          <a:srgbClr val="F8FAFC"/>
+          <a:srgbClr val="FFFFFF"/>
         </a:solidFill>
         <a:effectLst/>
       </p:bgPr>
@@ -5772,8 +7822,8 @@
         </p:nvSpPr>
         <p:spPr>
           <a:xfrm>
-            <a:off x="731520" y="438912"/>
-            <a:ext cx="5486400" cy="320040"/>
+            <a:off x="731520" y="384048"/>
+            <a:ext cx="6858000" cy="292608"/>
           </a:xfrm>
           <a:prstGeom prst="rect">
             <a:avLst/>
@@ -5787,14 +7837,14 @@
           <a:lstStyle/>
           <a:p>
             <a:pPr>
-              <a:defRPr sz="950" b="1">
+              <a:defRPr sz="900" b="1">
                 <a:solidFill>
                   <a:srgbClr val="0284C7"/>
                 </a:solidFill>
               </a:defRPr>
             </a:pPr>
             <a:r>
-              <a:t>PROBLEMA CLÍNICO &amp; VARIABILIDAD EN UCI</a:t>
+              <a:t>PROBLEMA ASISTENCIAL EN UCI</a:t>
             </a:r>
           </a:p>
         </p:txBody>
@@ -5807,8 +7857,8 @@
         </p:nvSpPr>
         <p:spPr>
           <a:xfrm>
-            <a:off x="731520" y="713232"/>
-            <a:ext cx="10698480" cy="594360"/>
+            <a:off x="731520" y="676656"/>
+            <a:ext cx="10698480" cy="548640"/>
           </a:xfrm>
           <a:prstGeom prst="rect">
             <a:avLst/>
@@ -5822,14 +7872,14 @@
           <a:lstStyle/>
           <a:p>
             <a:pPr>
-              <a:defRPr sz="2200" b="1">
+              <a:defRPr sz="2100" b="1">
                 <a:solidFill>
                   <a:srgbClr val="0F172A"/>
                 </a:solidFill>
               </a:defRPr>
             </a:pPr>
             <a:r>
-              <a:t>El Límite de la Dosis Fija: 'One Size Does NOT Fit All'</a:t>
+              <a:t>El Riesgo de la Dosis Estándar en Pacientes Críticos</a:t>
             </a:r>
           </a:p>
         </p:txBody>
@@ -5842,8 +7892,8 @@
         </p:nvSpPr>
         <p:spPr>
           <a:xfrm>
-            <a:off x="731520" y="1298448"/>
-            <a:ext cx="10698480" cy="411480"/>
+            <a:off x="731520" y="1243584"/>
+            <a:ext cx="10698480" cy="384048"/>
           </a:xfrm>
           <a:prstGeom prst="rect">
             <a:avLst/>
@@ -5857,14 +7907,14 @@
           <a:lstStyle/>
           <a:p>
             <a:pPr>
-              <a:defRPr sz="1200">
-                <a:solidFill>
-                  <a:srgbClr val="64748B"/>
-                </a:solidFill>
-              </a:defRPr>
-            </a:pPr>
-            <a:r>
-              <a:t>La alta variabilidad farmacocinética interindividual en el paciente crítico convierte la dosificación estándar en una ruleta clínica.</a:t>
+              <a:defRPr sz="1150">
+                <a:solidFill>
+                  <a:srgbClr val="475569"/>
+                </a:solidFill>
+              </a:defRPr>
+            </a:pPr>
+            <a:r>
+              <a:t>Fisiopatología hiperdinámica: las guías de dosificación de ficha técnica fallan sistemáticamente en el paciente en estado crítico.</a:t>
             </a:r>
           </a:p>
         </p:txBody>
@@ -5878,17 +7928,17 @@
         <p:spPr>
           <a:xfrm>
             <a:off x="731520" y="1783080"/>
-            <a:ext cx="3383280" cy="4389120"/>
+            <a:ext cx="4389120" cy="1371600"/>
           </a:xfrm>
           <a:prstGeom prst="roundRect">
             <a:avLst/>
           </a:prstGeom>
           <a:solidFill>
-            <a:srgbClr val="FFFFFF"/>
+            <a:srgbClr val="F8FAFC"/>
           </a:solidFill>
           <a:ln w="12700">
             <a:solidFill>
-              <a:srgbClr val="E2E8F0"/>
+              <a:srgbClr val="FECACA"/>
             </a:solidFill>
           </a:ln>
         </p:spPr>
@@ -5907,93 +7957,30 @@
           </a:fontRef>
         </p:style>
         <p:txBody>
-          <a:bodyPr rtlCol="0" anchor="ctr" lIns="228600" tIns="228600" rIns="182880"/>
+          <a:bodyPr rtlCol="0" anchor="ctr" lIns="228600" tIns="164592"/>
           <a:lstStyle/>
           <a:p>
             <a:pPr algn="ctr">
-              <a:defRPr sz="1100" b="1">
-                <a:solidFill>
-                  <a:srgbClr val="D97706"/>
-                </a:solidFill>
-              </a:defRPr>
-            </a:pPr>
-            <a:r>
-              <a:t>SUBDOSIFICACIÓN INICIAL</a:t>
+              <a:defRPr b="1" sz="1300">
+                <a:solidFill>
+                  <a:srgbClr val="DC2626"/>
+                </a:solidFill>
+              </a:defRPr>
+            </a:pPr>
+            <a:r>
+              <a:t>42% SUBDOSIFICACIÓN INICIAL</a:t>
             </a:r>
           </a:p>
           <a:p>
             <a:pPr>
-              <a:spcAft>
-                <a:spcPts val="800"/>
-              </a:spcAft>
-              <a:defRPr sz="3800" b="1">
-                <a:solidFill>
-                  <a:srgbClr val="D97706"/>
-                </a:solidFill>
-              </a:defRPr>
-            </a:pPr>
-            <a:r>
-              <a:t>42%</a:t>
-            </a:r>
-          </a:p>
-          <a:p>
-            <a:pPr>
-              <a:spcAft>
-                <a:spcPts val="400"/>
-              </a:spcAft>
-              <a:defRPr sz="1050">
-                <a:solidFill>
-                  <a:srgbClr val="64748B"/>
-                </a:solidFill>
-              </a:defRPr>
-            </a:pPr>
-            <a:r>
-              <a:t>• Fracaso terapéutico en las primeras 48 horas de sepsis severa.</a:t>
-            </a:r>
-          </a:p>
-          <a:p>
-            <a:pPr>
-              <a:spcAft>
-                <a:spcPts val="400"/>
-              </a:spcAft>
-              <a:defRPr sz="1050">
-                <a:solidFill>
-                  <a:srgbClr val="64748B"/>
-                </a:solidFill>
-              </a:defRPr>
-            </a:pPr>
-            <a:r>
-              <a:t>• Aparición y selección de cepas resistentes por concentraciones subóptimas.</a:t>
-            </a:r>
-          </a:p>
-          <a:p>
-            <a:pPr>
-              <a:spcAft>
-                <a:spcPts val="400"/>
-              </a:spcAft>
-              <a:defRPr sz="1050">
-                <a:solidFill>
-                  <a:srgbClr val="64748B"/>
-                </a:solidFill>
-              </a:defRPr>
-            </a:pPr>
-            <a:r>
-              <a:t>• Aclaramiento Renal Aumentado (ARC &gt; 130 mL/min) no detectado por protocolos estándar.</a:t>
-            </a:r>
-          </a:p>
-          <a:p>
-            <a:pPr>
-              <a:spcAft>
-                <a:spcPts val="400"/>
-              </a:spcAft>
-              <a:defRPr sz="1050">
-                <a:solidFill>
-                  <a:srgbClr val="64748B"/>
-                </a:solidFill>
-              </a:defRPr>
-            </a:pPr>
-            <a:r>
-              <a:t>• Mayor mortalidad en shock séptico por retraso en alcanzar dianas farmacodinámicas.</a:t>
+              <a:defRPr sz="950">
+                <a:solidFill>
+                  <a:srgbClr val="475569"/>
+                </a:solidFill>
+              </a:defRPr>
+            </a:pPr>
+            <a:r>
+              <a:t>Pacientes sépticos no alcanzan AUC/CIM diana en las primeras 48h críticas, elevando la tasa de fracaso terapéutico.</a:t>
             </a:r>
           </a:p>
         </p:txBody>
@@ -6006,19 +7993,17 @@
         </p:nvSpPr>
         <p:spPr>
           <a:xfrm>
-            <a:off x="4389120" y="1783080"/>
-            <a:ext cx="3383280" cy="4389120"/>
+            <a:off x="804672" y="1892808"/>
+            <a:ext cx="54864" cy="1152144"/>
           </a:xfrm>
           <a:prstGeom prst="roundRect">
             <a:avLst/>
           </a:prstGeom>
           <a:solidFill>
-            <a:srgbClr val="FFFFFF"/>
+            <a:srgbClr val="DC2626"/>
           </a:solidFill>
-          <a:ln w="12700">
-            <a:solidFill>
-              <a:srgbClr val="E2E8F0"/>
-            </a:solidFill>
+          <a:ln>
+            <a:noFill/>
           </a:ln>
         </p:spPr>
         <p:style>
@@ -6036,94 +8021,10 @@
           </a:fontRef>
         </p:style>
         <p:txBody>
-          <a:bodyPr rtlCol="0" anchor="ctr" lIns="228600" tIns="228600" rIns="182880"/>
-          <a:lstStyle/>
-          <a:p>
-            <a:pPr algn="ctr">
-              <a:defRPr sz="1100" b="1">
-                <a:solidFill>
-                  <a:srgbClr val="E11D48"/>
-                </a:solidFill>
-              </a:defRPr>
-            </a:pPr>
-            <a:r>
-              <a:t>SOBREDOSIFICACIÓN &amp; TOXICIDAD</a:t>
-            </a:r>
-          </a:p>
-          <a:p>
-            <a:pPr>
-              <a:spcAft>
-                <a:spcPts val="800"/>
-              </a:spcAft>
-              <a:defRPr sz="3800" b="1">
-                <a:solidFill>
-                  <a:srgbClr val="E11D48"/>
-                </a:solidFill>
-              </a:defRPr>
-            </a:pPr>
-            <a:r>
-              <a:t>28%</a:t>
-            </a:r>
-          </a:p>
-          <a:p>
-            <a:pPr>
-              <a:spcAft>
-                <a:spcPts val="400"/>
-              </a:spcAft>
-              <a:defRPr sz="1050">
-                <a:solidFill>
-                  <a:srgbClr val="64748B"/>
-                </a:solidFill>
-              </a:defRPr>
-            </a:pPr>
-            <a:r>
-              <a:t>• Incidencia de Lesión Renal Aguda (LRA / AKI) asociada a glicopéptidos y aminoglucósidos.</a:t>
-            </a:r>
-          </a:p>
-          <a:p>
-            <a:pPr>
-              <a:spcAft>
-                <a:spcPts val="400"/>
-              </a:spcAft>
-              <a:defRPr sz="1050">
-                <a:solidFill>
-                  <a:srgbClr val="64748B"/>
-                </a:solidFill>
-              </a:defRPr>
-            </a:pPr>
-            <a:r>
-              <a:t>• Sobredosis acumulativa inadvertida por deterioro dinámico de la función renal.</a:t>
-            </a:r>
-          </a:p>
-          <a:p>
-            <a:pPr>
-              <a:spcAft>
-                <a:spcPts val="400"/>
-              </a:spcAft>
-              <a:defRPr sz="1050">
-                <a:solidFill>
-                  <a:srgbClr val="64748B"/>
-                </a:solidFill>
-              </a:defRPr>
-            </a:pPr>
-            <a:r>
-              <a:t>• Coste añadido de $8,000–$14,000 USD por paciente que requiere soporte dialítico secundario.</a:t>
-            </a:r>
-          </a:p>
-          <a:p>
-            <a:pPr>
-              <a:spcAft>
-                <a:spcPts val="400"/>
-              </a:spcAft>
-              <a:defRPr sz="1050">
-                <a:solidFill>
-                  <a:srgbClr val="64748B"/>
-                </a:solidFill>
-              </a:defRPr>
-            </a:pPr>
-            <a:r>
-              <a:t>• Prolongación innecesaria de la estancia en camas críticas de alta complejidad.</a:t>
-            </a:r>
+          <a:bodyPr rtlCol="0" anchor="ctr"/>
+          <a:lstStyle/>
+          <a:p>
+            <a:pPr algn="ctr"/>
           </a:p>
         </p:txBody>
       </p:sp>
@@ -6135,18 +8036,18 @@
         </p:nvSpPr>
         <p:spPr>
           <a:xfrm>
-            <a:off x="8046720" y="1783080"/>
-            <a:ext cx="3383280" cy="4389120"/>
+            <a:off x="731520" y="3291840"/>
+            <a:ext cx="4389120" cy="1371600"/>
           </a:xfrm>
           <a:prstGeom prst="roundRect">
             <a:avLst/>
           </a:prstGeom>
           <a:solidFill>
-            <a:srgbClr val="FFFFFF"/>
+            <a:srgbClr val="F8FAFC"/>
           </a:solidFill>
           <a:ln w="12700">
             <a:solidFill>
-              <a:srgbClr val="E2E8F0"/>
+              <a:srgbClr val="FED7AA"/>
             </a:solidFill>
           </a:ln>
         </p:spPr>
@@ -6165,106 +8066,195 @@
           </a:fontRef>
         </p:style>
         <p:txBody>
-          <a:bodyPr rtlCol="0" anchor="ctr" lIns="228600" tIns="228600" rIns="182880"/>
+          <a:bodyPr rtlCol="0" anchor="ctr" lIns="228600" tIns="164592"/>
           <a:lstStyle/>
           <a:p>
             <a:pPr algn="ctr">
-              <a:defRPr sz="1100" b="1">
-                <a:solidFill>
-                  <a:srgbClr val="0284C7"/>
-                </a:solidFill>
-              </a:defRPr>
-            </a:pPr>
-            <a:r>
-              <a:t>RETARDOS DEL TDM TRADICIONAL</a:t>
+              <a:defRPr b="1" sz="1300">
+                <a:solidFill>
+                  <a:srgbClr val="D97706"/>
+                </a:solidFill>
+              </a:defRPr>
+            </a:pPr>
+            <a:r>
+              <a:t>28% TOXICIDAD Y NEFROTOXICIDAD</a:t>
             </a:r>
           </a:p>
           <a:p>
             <a:pPr>
-              <a:spcAft>
-                <a:spcPts val="800"/>
-              </a:spcAft>
-              <a:defRPr sz="3800" b="1">
-                <a:solidFill>
-                  <a:srgbClr val="0284C7"/>
-                </a:solidFill>
-              </a:defRPr>
-            </a:pPr>
-            <a:r>
-              <a:t>48–72h</a:t>
+              <a:defRPr sz="950">
+                <a:solidFill>
+                  <a:srgbClr val="475569"/>
+                </a:solidFill>
+              </a:defRPr>
+            </a:pPr>
+            <a:r>
+              <a:t>Acumulación desapercibida en pacientes con fallo renal agudo o TCRR. La lesión renal aguda eleva drásticamente la estancia hospitalaria.</a:t>
+            </a:r>
+          </a:p>
+        </p:txBody>
+      </p:sp>
+      <p:sp>
+        <p:nvSpPr>
+          <p:cNvPr id="8" name="Rounded Rectangle 7"/>
+          <p:cNvSpPr/>
+          <p:nvPr/>
+        </p:nvSpPr>
+        <p:spPr>
+          <a:xfrm>
+            <a:off x="804672" y="3401568"/>
+            <a:ext cx="54864" cy="1152144"/>
+          </a:xfrm>
+          <a:prstGeom prst="roundRect">
+            <a:avLst/>
+          </a:prstGeom>
+          <a:solidFill>
+            <a:srgbClr val="D97706"/>
+          </a:solidFill>
+          <a:ln>
+            <a:noFill/>
+          </a:ln>
+        </p:spPr>
+        <p:style>
+          <a:lnRef idx="1">
+            <a:schemeClr val="accent1"/>
+          </a:lnRef>
+          <a:fillRef idx="3">
+            <a:schemeClr val="accent1"/>
+          </a:fillRef>
+          <a:effectRef idx="2">
+            <a:schemeClr val="accent1"/>
+          </a:effectRef>
+          <a:fontRef idx="minor">
+            <a:schemeClr val="lt1"/>
+          </a:fontRef>
+        </p:style>
+        <p:txBody>
+          <a:bodyPr rtlCol="0" anchor="ctr"/>
+          <a:lstStyle/>
+          <a:p>
+            <a:pPr algn="ctr"/>
+          </a:p>
+        </p:txBody>
+      </p:sp>
+      <p:sp>
+        <p:nvSpPr>
+          <p:cNvPr id="9" name="Rounded Rectangle 8"/>
+          <p:cNvSpPr/>
+          <p:nvPr/>
+        </p:nvSpPr>
+        <p:spPr>
+          <a:xfrm>
+            <a:off x="731520" y="4800600"/>
+            <a:ext cx="4389120" cy="1371600"/>
+          </a:xfrm>
+          <a:prstGeom prst="roundRect">
+            <a:avLst/>
+          </a:prstGeom>
+          <a:solidFill>
+            <a:srgbClr val="F8FAFC"/>
+          </a:solidFill>
+          <a:ln w="12700">
+            <a:solidFill>
+              <a:srgbClr val="DDD6FE"/>
+            </a:solidFill>
+          </a:ln>
+        </p:spPr>
+        <p:style>
+          <a:lnRef idx="1">
+            <a:schemeClr val="accent1"/>
+          </a:lnRef>
+          <a:fillRef idx="3">
+            <a:schemeClr val="accent1"/>
+          </a:fillRef>
+          <a:effectRef idx="2">
+            <a:schemeClr val="accent1"/>
+          </a:effectRef>
+          <a:fontRef idx="minor">
+            <a:schemeClr val="lt1"/>
+          </a:fontRef>
+        </p:style>
+        <p:txBody>
+          <a:bodyPr rtlCol="0" anchor="ctr" lIns="228600" tIns="164592"/>
+          <a:lstStyle/>
+          <a:p>
+            <a:pPr algn="ctr">
+              <a:defRPr b="1" sz="1300">
+                <a:solidFill>
+                  <a:srgbClr val="7C3AED"/>
+                </a:solidFill>
+              </a:defRPr>
+            </a:pPr>
+            <a:r>
+              <a:t>65% ACLARAMIENTO AUMENTADO (ARC)</a:t>
             </a:r>
           </a:p>
           <a:p>
             <a:pPr>
-              <a:spcAft>
-                <a:spcPts val="400"/>
-              </a:spcAft>
-              <a:defRPr sz="1050">
-                <a:solidFill>
-                  <a:srgbClr val="64748B"/>
-                </a:solidFill>
-              </a:defRPr>
-            </a:pPr>
-            <a:r>
-              <a:t>• El método convencional exige esperar al 'estado estacionario' (4.ª o 5.ª dosis) para medir niveles.</a:t>
-            </a:r>
-          </a:p>
-          <a:p>
-            <a:pPr>
-              <a:spcAft>
-                <a:spcPts val="400"/>
-              </a:spcAft>
-              <a:defRPr sz="1050">
-                <a:solidFill>
-                  <a:srgbClr val="64748B"/>
-                </a:solidFill>
-              </a:defRPr>
-            </a:pPr>
-            <a:r>
-              <a:t>• Dependencia de niveles valle (Cmin) aislados que no reflejan la verdadera exposición (AUC24).</a:t>
-            </a:r>
-          </a:p>
-          <a:p>
-            <a:pPr>
-              <a:spcAft>
-                <a:spcPts val="400"/>
-              </a:spcAft>
-              <a:defRPr sz="1050">
-                <a:solidFill>
-                  <a:srgbClr val="64748B"/>
-                </a:solidFill>
-              </a:defRPr>
-            </a:pPr>
-            <a:r>
-              <a:t>• Ajustes empíricos lineales ('a ojo') que fallan ante cinéticas no lineales o volúmenes cambiantes.</a:t>
-            </a:r>
-          </a:p>
-          <a:p>
-            <a:pPr>
-              <a:spcAft>
-                <a:spcPts val="400"/>
-              </a:spcAft>
-              <a:defRPr sz="1050">
-                <a:solidFill>
-                  <a:srgbClr val="64748B"/>
-                </a:solidFill>
-              </a:defRPr>
-            </a:pPr>
-            <a:r>
-              <a:t>• Pérdida de la ventana de oportunidad terapéutica más crítica para el pronóstico del paciente.</a:t>
-            </a:r>
-          </a:p>
-        </p:txBody>
-      </p:sp>
-      <p:sp>
-        <p:nvSpPr>
-          <p:cNvPr id="8" name="TextBox 7"/>
+              <a:defRPr sz="950">
+                <a:solidFill>
+                  <a:srgbClr val="475569"/>
+                </a:solidFill>
+              </a:defRPr>
+            </a:pPr>
+            <a:r>
+              <a:t>ClCr &gt; 130 mL/min en sepsis, politrauma y grandes quemados. La depuración acelerada causa niveles plasmáticos indetectables con dosis habituales.</a:t>
+            </a:r>
+          </a:p>
+        </p:txBody>
+      </p:sp>
+      <p:sp>
+        <p:nvSpPr>
+          <p:cNvPr id="10" name="Rounded Rectangle 9"/>
+          <p:cNvSpPr/>
+          <p:nvPr/>
+        </p:nvSpPr>
+        <p:spPr>
+          <a:xfrm>
+            <a:off x="804672" y="4910328"/>
+            <a:ext cx="54864" cy="1152144"/>
+          </a:xfrm>
+          <a:prstGeom prst="roundRect">
+            <a:avLst/>
+          </a:prstGeom>
+          <a:solidFill>
+            <a:srgbClr val="7C3AED"/>
+          </a:solidFill>
+          <a:ln>
+            <a:noFill/>
+          </a:ln>
+        </p:spPr>
+        <p:style>
+          <a:lnRef idx="1">
+            <a:schemeClr val="accent1"/>
+          </a:lnRef>
+          <a:fillRef idx="3">
+            <a:schemeClr val="accent1"/>
+          </a:fillRef>
+          <a:effectRef idx="2">
+            <a:schemeClr val="accent1"/>
+          </a:effectRef>
+          <a:fontRef idx="minor">
+            <a:schemeClr val="lt1"/>
+          </a:fontRef>
+        </p:style>
+        <p:txBody>
+          <a:bodyPr rtlCol="0" anchor="ctr"/>
+          <a:lstStyle/>
+          <a:p>
+            <a:pPr algn="ctr"/>
+          </a:p>
+        </p:txBody>
+      </p:sp>
+      <p:sp>
+        <p:nvSpPr>
+          <p:cNvPr id="11" name="TextBox 10"/>
           <p:cNvSpPr txBox="1"/>
           <p:nvPr/>
         </p:nvSpPr>
         <p:spPr>
           <a:xfrm>
-            <a:off x="731520" y="6400800"/>
+            <a:off x="731520" y="6437376"/>
             <a:ext cx="10725912" cy="274320"/>
           </a:xfrm>
           <a:prstGeom prst="rect">
@@ -6281,12 +8271,12 @@
             <a:pPr>
               <a:defRPr sz="850">
                 <a:solidFill>
-                  <a:srgbClr val="94A3B8"/>
-                </a:solidFill>
-              </a:defRPr>
-            </a:pPr>
-            <a:r>
-              <a:t>PK-Bayes · Decision Support System CDSS v3.2                                                Documento Institucional Clínico                                                02 / 14</a:t>
+                  <a:srgbClr val="64748B"/>
+                </a:solidFill>
+              </a:defRPr>
+            </a:pPr>
+            <a:r>
+              <a:t>PK-Bayes · CDSS v3.2 · Soporte a la Decisión Clínica Farmacocinética                       Confidencial · Uso Hospitalario Institucional                       02 / 14</a:t>
             </a:r>
           </a:p>
         </p:txBody>
@@ -6305,7 +8295,7 @@
     <p:bg>
       <p:bgPr>
         <a:solidFill>
-          <a:srgbClr val="F8FAFC"/>
+          <a:srgbClr val="FFFFFF"/>
         </a:solidFill>
         <a:effectLst/>
       </p:bgPr>
@@ -6325,8 +8315,8 @@
         </p:nvSpPr>
         <p:spPr>
           <a:xfrm>
-            <a:off x="731520" y="438912"/>
-            <a:ext cx="5486400" cy="320040"/>
+            <a:off x="731520" y="384048"/>
+            <a:ext cx="6858000" cy="292608"/>
           </a:xfrm>
           <a:prstGeom prst="rect">
             <a:avLst/>
@@ -6340,14 +8330,14 @@
           <a:lstStyle/>
           <a:p>
             <a:pPr>
-              <a:defRPr sz="950" b="1">
+              <a:defRPr sz="900" b="1">
                 <a:solidFill>
                   <a:srgbClr val="0284C7"/>
                 </a:solidFill>
               </a:defRPr>
             </a:pPr>
             <a:r>
-              <a:t>METODOLOGÍA &amp; FUNDAMENTO CIENTÍFICO</a:t>
+              <a:t>FUNDAMENTO MATEMÁTICO &amp; FARMACOMETRÍA</a:t>
             </a:r>
           </a:p>
         </p:txBody>
@@ -6360,8 +8350,8 @@
         </p:nvSpPr>
         <p:spPr>
           <a:xfrm>
-            <a:off x="731520" y="713232"/>
-            <a:ext cx="10698480" cy="594360"/>
+            <a:off x="731520" y="676656"/>
+            <a:ext cx="10698480" cy="548640"/>
           </a:xfrm>
           <a:prstGeom prst="rect">
             <a:avLst/>
@@ -6375,14 +8365,14 @@
           <a:lstStyle/>
           <a:p>
             <a:pPr>
-              <a:defRPr sz="2200" b="1">
+              <a:defRPr sz="2100" b="1">
                 <a:solidFill>
                   <a:srgbClr val="0F172A"/>
                 </a:solidFill>
               </a:defRPr>
             </a:pPr>
             <a:r>
-              <a:t>La Solución: Inferencia Bayesiana MAP a Pie de Cama</a:t>
+              <a:t>El Motor Bayesiano MAP (Maximum A Posteriori)</a:t>
             </a:r>
           </a:p>
         </p:txBody>
@@ -6395,8 +8385,8 @@
         </p:nvSpPr>
         <p:spPr>
           <a:xfrm>
-            <a:off x="731520" y="1298448"/>
-            <a:ext cx="10698480" cy="411480"/>
+            <a:off x="731520" y="1243584"/>
+            <a:ext cx="10698480" cy="384048"/>
           </a:xfrm>
           <a:prstGeom prst="rect">
             <a:avLst/>
@@ -6410,14 +8400,14 @@
           <a:lstStyle/>
           <a:p>
             <a:pPr>
-              <a:defRPr sz="1200">
-                <a:solidFill>
-                  <a:srgbClr val="64748B"/>
-                </a:solidFill>
-              </a:defRPr>
-            </a:pPr>
-            <a:r>
-              <a:t>PK-Bayes fusiona el conocimiento poblacional previo con los datos clínicos y niveles medidos del paciente en milisegundos.</a:t>
+              <a:defRPr sz="1150">
+                <a:solidFill>
+                  <a:srgbClr val="475569"/>
+                </a:solidFill>
+              </a:defRPr>
+            </a:pPr>
+            <a:r>
+              <a:t>Combinación equilibrada de la distribución poblacional a priori con los datos clínicos y concentraciones plasmáticas medidas.</a:t>
             </a:r>
           </a:p>
         </p:txBody>
@@ -6430,170 +8420,8 @@
         </p:nvSpPr>
         <p:spPr>
           <a:xfrm>
-            <a:off x="731520" y="1783080"/>
-            <a:ext cx="5120640" cy="4389120"/>
-          </a:xfrm>
-          <a:prstGeom prst="roundRect">
-            <a:avLst/>
-          </a:prstGeom>
-          <a:solidFill>
-            <a:srgbClr val="FFFFFF"/>
-          </a:solidFill>
-          <a:ln w="12700">
-            <a:solidFill>
-              <a:srgbClr val="E2E8F0"/>
-            </a:solidFill>
-          </a:ln>
-        </p:spPr>
-        <p:style>
-          <a:lnRef idx="1">
-            <a:schemeClr val="accent1"/>
-          </a:lnRef>
-          <a:fillRef idx="3">
-            <a:schemeClr val="accent1"/>
-          </a:fillRef>
-          <a:effectRef idx="2">
-            <a:schemeClr val="accent1"/>
-          </a:effectRef>
-          <a:fontRef idx="minor">
-            <a:schemeClr val="lt1"/>
-          </a:fontRef>
-        </p:style>
-        <p:txBody>
-          <a:bodyPr rtlCol="0" anchor="ctr" lIns="228600" tIns="228600" rIns="182880"/>
-          <a:lstStyle/>
-          <a:p>
-            <a:pPr algn="ctr">
-              <a:defRPr sz="1100" b="1">
-                <a:solidFill>
-                  <a:srgbClr val="0284C7"/>
-                </a:solidFill>
-              </a:defRPr>
-            </a:pPr>
-            <a:r>
-              <a:t>¿CÓMO FUNCIONA EL MOTOR BAYESIANO?</a:t>
-            </a:r>
-          </a:p>
-          <a:p>
-            <a:pPr>
-              <a:spcBef>
-                <a:spcPts val="800"/>
-              </a:spcBef>
-              <a:defRPr sz="1150" b="1">
-                <a:solidFill>
-                  <a:srgbClr val="0F172A"/>
-                </a:solidFill>
-              </a:defRPr>
-            </a:pPr>
-            <a:r>
-              <a:t>1. Prior Poblacional (PopPK)</a:t>
-            </a:r>
-          </a:p>
-          <a:p>
-            <a:pPr>
-              <a:defRPr sz="1050">
-                <a:solidFill>
-                  <a:srgbClr val="64748B"/>
-                </a:solidFill>
-              </a:defRPr>
-            </a:pPr>
-            <a:r>
-              <a:t>Modelos validados en miles de pacientes que definen la distribución estadística típica de Vd, Cl y variabilidad interindividual (IIV / ω²).</a:t>
-            </a:r>
-          </a:p>
-          <a:p>
-            <a:pPr>
-              <a:spcBef>
-                <a:spcPts val="800"/>
-              </a:spcBef>
-              <a:defRPr sz="1150" b="1">
-                <a:solidFill>
-                  <a:srgbClr val="0F172A"/>
-                </a:solidFill>
-              </a:defRPr>
-            </a:pPr>
-            <a:r>
-              <a:t>2. Covariables del Paciente</a:t>
-            </a:r>
-          </a:p>
-          <a:p>
-            <a:pPr>
-              <a:defRPr sz="1050">
-                <a:solidFill>
-                  <a:srgbClr val="64748B"/>
-                </a:solidFill>
-              </a:defRPr>
-            </a:pPr>
-            <a:r>
-              <a:t>Ajuste individualizado según edad, peso real/ajustado, función renal por tramos temporales y terapias de soporte extracorpóreo.</a:t>
-            </a:r>
-          </a:p>
-          <a:p>
-            <a:pPr>
-              <a:spcBef>
-                <a:spcPts val="800"/>
-              </a:spcBef>
-              <a:defRPr sz="1150" b="1">
-                <a:solidFill>
-                  <a:srgbClr val="0F172A"/>
-                </a:solidFill>
-              </a:defRPr>
-            </a:pPr>
-            <a:r>
-              <a:t>3. Concentraciones Plasmáticas (TDM)</a:t>
-            </a:r>
-          </a:p>
-          <a:p>
-            <a:pPr>
-              <a:defRPr sz="1050">
-                <a:solidFill>
-                  <a:srgbClr val="64748B"/>
-                </a:solidFill>
-              </a:defRPr>
-            </a:pPr>
-            <a:r>
-              <a:t>Incluso con solo 1 o 2 muestras en tiempos no estándar, el algoritmo calcula la función de verosimilitud de los niveles reales.</a:t>
-            </a:r>
-          </a:p>
-          <a:p>
-            <a:pPr>
-              <a:spcBef>
-                <a:spcPts val="800"/>
-              </a:spcBef>
-              <a:defRPr sz="1150" b="1">
-                <a:solidFill>
-                  <a:srgbClr val="0F172A"/>
-                </a:solidFill>
-              </a:defRPr>
-            </a:pPr>
-            <a:r>
-              <a:t>4. Estimación MAP (Maximum A Posteriori)</a:t>
-            </a:r>
-          </a:p>
-          <a:p>
-            <a:pPr>
-              <a:defRPr sz="1050">
-                <a:solidFill>
-                  <a:srgbClr val="64748B"/>
-                </a:solidFill>
-              </a:defRPr>
-            </a:pPr>
-            <a:r>
-              <a:t>Minimiza la función objetivo bayesiana calculando los parámetros individuales (η_i) más probables en menos de 25 milisegundos.</a:t>
-            </a:r>
-          </a:p>
-        </p:txBody>
-      </p:sp>
-      <p:sp>
-        <p:nvSpPr>
-          <p:cNvPr id="6" name="Rounded Rectangle 5"/>
-          <p:cNvSpPr/>
-          <p:nvPr/>
-        </p:nvSpPr>
-        <p:spPr>
-          <a:xfrm>
-            <a:off x="6071616" y="1728216"/>
-            <a:ext cx="5413248" cy="3218688"/>
+            <a:off x="676656" y="1728216"/>
+            <a:ext cx="5596128" cy="4498848"/>
           </a:xfrm>
           <a:prstGeom prst="roundRect">
             <a:avLst/>
@@ -6631,7 +8459,7 @@
       </p:sp>
       <p:pic>
         <p:nvPicPr>
-          <p:cNvPr id="7" name="Picture 6" descr="04-simulacion.png"/>
+          <p:cNvPr id="6" name="Picture 5" descr="bayesian_prior_posterior.png"/>
           <p:cNvPicPr>
             <a:picLocks noChangeAspect="1"/>
           </p:cNvPicPr>
@@ -6645,14 +8473,49 @@
         </p:blipFill>
         <p:spPr>
           <a:xfrm>
-            <a:off x="6126480" y="1783080"/>
-            <a:ext cx="5303520" cy="3108960"/>
+            <a:off x="731520" y="1783080"/>
+            <a:ext cx="5486400" cy="4389120"/>
           </a:xfrm>
           <a:prstGeom prst="rect">
             <a:avLst/>
           </a:prstGeom>
         </p:spPr>
       </p:pic>
+      <p:sp>
+        <p:nvSpPr>
+          <p:cNvPr id="7" name="TextBox 6"/>
+          <p:cNvSpPr txBox="1"/>
+          <p:nvPr/>
+        </p:nvSpPr>
+        <p:spPr>
+          <a:xfrm>
+            <a:off x="731520" y="6227064"/>
+            <a:ext cx="5486400" cy="228600"/>
+          </a:xfrm>
+          <a:prstGeom prst="rect">
+            <a:avLst/>
+          </a:prstGeom>
+          <a:noFill/>
+        </p:spPr>
+        <p:txBody>
+          <a:bodyPr wrap="none" lIns="0" tIns="0" rIns="0" bIns="0">
+            <a:spAutoFit/>
+          </a:bodyPr>
+          <a:lstStyle/>
+          <a:p>
+            <a:pPr algn="ctr">
+              <a:defRPr sz="800">
+                <a:solidFill>
+                  <a:srgbClr val="64748B"/>
+                </a:solidFill>
+              </a:defRPr>
+            </a:pPr>
+            <a:r>
+              <a:t>Figura 2: Contracción Bayesiana de la incertidumbre: Prior Poblacional vs Verosimilitud TDM vs Posterior MAP.</a:t>
+            </a:r>
+          </a:p>
+        </p:txBody>
+      </p:sp>
       <p:sp>
         <p:nvSpPr>
           <p:cNvPr id="8" name="Rounded Rectangle 7"/>
@@ -6661,14 +8524,14 @@
         </p:nvSpPr>
         <p:spPr>
           <a:xfrm>
-            <a:off x="6126480" y="5029200"/>
-            <a:ext cx="5303520" cy="1143000"/>
+            <a:off x="6400800" y="1783080"/>
+            <a:ext cx="5059375" cy="1280160"/>
           </a:xfrm>
           <a:prstGeom prst="roundRect">
             <a:avLst/>
           </a:prstGeom>
           <a:solidFill>
-            <a:srgbClr val="FFFFFF"/>
+            <a:srgbClr val="F8FAFC"/>
           </a:solidFill>
           <a:ln w="12700">
             <a:solidFill>
@@ -6691,43 +8554,304 @@
           </a:fontRef>
         </p:style>
         <p:txBody>
-          <a:bodyPr rtlCol="0" anchor="ctr" lIns="164592" tIns="164592"/>
+          <a:bodyPr rtlCol="0" anchor="ctr" lIns="228600" tIns="137160"/>
           <a:lstStyle/>
           <a:p>
             <a:pPr algn="ctr">
-              <a:defRPr sz="1000" b="1">
+              <a:defRPr b="1" sz="1100">
+                <a:solidFill>
+                  <a:srgbClr val="0284C7"/>
+                </a:solidFill>
+              </a:defRPr>
+            </a:pPr>
+            <a:r>
+              <a:t>1. MODELO POBLACIONAL (PRIOR P(θ))</a:t>
+            </a:r>
+          </a:p>
+          <a:p>
+            <a:pPr>
+              <a:defRPr sz="950">
+                <a:solidFill>
+                  <a:srgbClr val="475569"/>
+                </a:solidFill>
+              </a:defRPr>
+            </a:pPr>
+            <a:r>
+              <a:t>Informa sobre los parámetros típicos (CL, Vd) y la variabilidad interindividual (Omega) según edad, peso y función renal del paciente.</a:t>
+            </a:r>
+          </a:p>
+        </p:txBody>
+      </p:sp>
+      <p:sp>
+        <p:nvSpPr>
+          <p:cNvPr id="9" name="Rounded Rectangle 8"/>
+          <p:cNvSpPr/>
+          <p:nvPr/>
+        </p:nvSpPr>
+        <p:spPr>
+          <a:xfrm>
+            <a:off x="6473952" y="1892808"/>
+            <a:ext cx="54864" cy="1060704"/>
+          </a:xfrm>
+          <a:prstGeom prst="roundRect">
+            <a:avLst/>
+          </a:prstGeom>
+          <a:solidFill>
+            <a:srgbClr val="0284C7"/>
+          </a:solidFill>
+          <a:ln>
+            <a:noFill/>
+          </a:ln>
+        </p:spPr>
+        <p:style>
+          <a:lnRef idx="1">
+            <a:schemeClr val="accent1"/>
+          </a:lnRef>
+          <a:fillRef idx="3">
+            <a:schemeClr val="accent1"/>
+          </a:fillRef>
+          <a:effectRef idx="2">
+            <a:schemeClr val="accent1"/>
+          </a:effectRef>
+          <a:fontRef idx="minor">
+            <a:schemeClr val="lt1"/>
+          </a:fontRef>
+        </p:style>
+        <p:txBody>
+          <a:bodyPr rtlCol="0" anchor="ctr"/>
+          <a:lstStyle/>
+          <a:p>
+            <a:pPr algn="ctr"/>
+          </a:p>
+        </p:txBody>
+      </p:sp>
+      <p:sp>
+        <p:nvSpPr>
+          <p:cNvPr id="10" name="Rounded Rectangle 9"/>
+          <p:cNvSpPr/>
+          <p:nvPr/>
+        </p:nvSpPr>
+        <p:spPr>
+          <a:xfrm>
+            <a:off x="6400800" y="3200400"/>
+            <a:ext cx="5059375" cy="1280160"/>
+          </a:xfrm>
+          <a:prstGeom prst="roundRect">
+            <a:avLst/>
+          </a:prstGeom>
+          <a:solidFill>
+            <a:srgbClr val="F8FAFC"/>
+          </a:solidFill>
+          <a:ln w="12700">
+            <a:solidFill>
+              <a:srgbClr val="E2E8F0"/>
+            </a:solidFill>
+          </a:ln>
+        </p:spPr>
+        <p:style>
+          <a:lnRef idx="1">
+            <a:schemeClr val="accent1"/>
+          </a:lnRef>
+          <a:fillRef idx="3">
+            <a:schemeClr val="accent1"/>
+          </a:fillRef>
+          <a:effectRef idx="2">
+            <a:schemeClr val="accent1"/>
+          </a:effectRef>
+          <a:fontRef idx="minor">
+            <a:schemeClr val="lt1"/>
+          </a:fontRef>
+        </p:style>
+        <p:txBody>
+          <a:bodyPr rtlCol="0" anchor="ctr" lIns="228600" tIns="137160"/>
+          <a:lstStyle/>
+          <a:p>
+            <a:pPr algn="ctr">
+              <a:defRPr b="1" sz="1100">
+                <a:solidFill>
+                  <a:srgbClr val="D97706"/>
+                </a:solidFill>
+              </a:defRPr>
+            </a:pPr>
+            <a:r>
+              <a:t>2. CONCENTRACIONES MEDIDAS (VEROSIMILITUD L(Y|θ))</a:t>
+            </a:r>
+          </a:p>
+          <a:p>
+            <a:pPr>
+              <a:defRPr sz="950">
+                <a:solidFill>
+                  <a:srgbClr val="475569"/>
+                </a:solidFill>
+              </a:defRPr>
+            </a:pPr>
+            <a:r>
+              <a:t>Niveles en sangre (TDM valle o pico) y error residual del ensayo analítico de laboratorio (Sigma). Incluso una sola muestra aporta alta precisión.</a:t>
+            </a:r>
+          </a:p>
+        </p:txBody>
+      </p:sp>
+      <p:sp>
+        <p:nvSpPr>
+          <p:cNvPr id="11" name="Rounded Rectangle 10"/>
+          <p:cNvSpPr/>
+          <p:nvPr/>
+        </p:nvSpPr>
+        <p:spPr>
+          <a:xfrm>
+            <a:off x="6473952" y="3310128"/>
+            <a:ext cx="54864" cy="1060704"/>
+          </a:xfrm>
+          <a:prstGeom prst="roundRect">
+            <a:avLst/>
+          </a:prstGeom>
+          <a:solidFill>
+            <a:srgbClr val="D97706"/>
+          </a:solidFill>
+          <a:ln>
+            <a:noFill/>
+          </a:ln>
+        </p:spPr>
+        <p:style>
+          <a:lnRef idx="1">
+            <a:schemeClr val="accent1"/>
+          </a:lnRef>
+          <a:fillRef idx="3">
+            <a:schemeClr val="accent1"/>
+          </a:fillRef>
+          <a:effectRef idx="2">
+            <a:schemeClr val="accent1"/>
+          </a:effectRef>
+          <a:fontRef idx="minor">
+            <a:schemeClr val="lt1"/>
+          </a:fontRef>
+        </p:style>
+        <p:txBody>
+          <a:bodyPr rtlCol="0" anchor="ctr"/>
+          <a:lstStyle/>
+          <a:p>
+            <a:pPr algn="ctr"/>
+          </a:p>
+        </p:txBody>
+      </p:sp>
+      <p:sp>
+        <p:nvSpPr>
+          <p:cNvPr id="12" name="Rounded Rectangle 11"/>
+          <p:cNvSpPr/>
+          <p:nvPr/>
+        </p:nvSpPr>
+        <p:spPr>
+          <a:xfrm>
+            <a:off x="6400800" y="4617720"/>
+            <a:ext cx="5059375" cy="1554480"/>
+          </a:xfrm>
+          <a:prstGeom prst="roundRect">
+            <a:avLst/>
+          </a:prstGeom>
+          <a:solidFill>
+            <a:srgbClr val="F8FAFC"/>
+          </a:solidFill>
+          <a:ln w="12700">
+            <a:solidFill>
+              <a:srgbClr val="E2E8F0"/>
+            </a:solidFill>
+          </a:ln>
+        </p:spPr>
+        <p:style>
+          <a:lnRef idx="1">
+            <a:schemeClr val="accent1"/>
+          </a:lnRef>
+          <a:fillRef idx="3">
+            <a:schemeClr val="accent1"/>
+          </a:fillRef>
+          <a:effectRef idx="2">
+            <a:schemeClr val="accent1"/>
+          </a:effectRef>
+          <a:fontRef idx="minor">
+            <a:schemeClr val="lt1"/>
+          </a:fontRef>
+        </p:style>
+        <p:txBody>
+          <a:bodyPr rtlCol="0" anchor="ctr" lIns="228600" tIns="137160"/>
+          <a:lstStyle/>
+          <a:p>
+            <a:pPr algn="ctr">
+              <a:defRPr b="1" sz="1100">
                 <a:solidFill>
                   <a:srgbClr val="059669"/>
                 </a:solidFill>
               </a:defRPr>
             </a:pPr>
             <a:r>
-              <a:t>VENTAJA CLÍNICA CLAVE</a:t>
+              <a:t>3. ESTIMACIÓN MAP INDIVIDUALIZADA (POSTERIOR P(θ|Y))</a:t>
             </a:r>
           </a:p>
           <a:p>
             <a:pPr>
-              <a:defRPr sz="1100">
-                <a:solidFill>
-                  <a:srgbClr val="0F172A"/>
-                </a:solidFill>
-              </a:defRPr>
-            </a:pPr>
-            <a:r>
-              <a:t>No requiere esperar al estado estacionario ni extraer muestras exclusivamente en el valle estricto. La predicción es continua, anticipatoria y exacta desde la primera dosis administrada.</a:t>
-            </a:r>
-          </a:p>
-        </p:txBody>
-      </p:sp>
-      <p:sp>
-        <p:nvSpPr>
-          <p:cNvPr id="9" name="TextBox 8"/>
+              <a:defRPr sz="950">
+                <a:solidFill>
+                  <a:srgbClr val="475569"/>
+                </a:solidFill>
+              </a:defRPr>
+            </a:pPr>
+            <a:r>
+              <a:t>Minimización de la función objetivo ponderada en tiempo real (&lt;25 ms). Parámetros farmacocinéticos únicos para el paciente específico con -64% de incertidumbre.</a:t>
+            </a:r>
+          </a:p>
+        </p:txBody>
+      </p:sp>
+      <p:sp>
+        <p:nvSpPr>
+          <p:cNvPr id="13" name="Rounded Rectangle 12"/>
+          <p:cNvSpPr/>
+          <p:nvPr/>
+        </p:nvSpPr>
+        <p:spPr>
+          <a:xfrm>
+            <a:off x="6473952" y="4727448"/>
+            <a:ext cx="54864" cy="1335024"/>
+          </a:xfrm>
+          <a:prstGeom prst="roundRect">
+            <a:avLst/>
+          </a:prstGeom>
+          <a:solidFill>
+            <a:srgbClr val="059669"/>
+          </a:solidFill>
+          <a:ln>
+            <a:noFill/>
+          </a:ln>
+        </p:spPr>
+        <p:style>
+          <a:lnRef idx="1">
+            <a:schemeClr val="accent1"/>
+          </a:lnRef>
+          <a:fillRef idx="3">
+            <a:schemeClr val="accent1"/>
+          </a:fillRef>
+          <a:effectRef idx="2">
+            <a:schemeClr val="accent1"/>
+          </a:effectRef>
+          <a:fontRef idx="minor">
+            <a:schemeClr val="lt1"/>
+          </a:fontRef>
+        </p:style>
+        <p:txBody>
+          <a:bodyPr rtlCol="0" anchor="ctr"/>
+          <a:lstStyle/>
+          <a:p>
+            <a:pPr algn="ctr"/>
+          </a:p>
+        </p:txBody>
+      </p:sp>
+      <p:sp>
+        <p:nvSpPr>
+          <p:cNvPr id="14" name="TextBox 13"/>
           <p:cNvSpPr txBox="1"/>
           <p:nvPr/>
         </p:nvSpPr>
         <p:spPr>
           <a:xfrm>
-            <a:off x="731520" y="6400800"/>
+            <a:off x="731520" y="6437376"/>
             <a:ext cx="10725912" cy="274320"/>
           </a:xfrm>
           <a:prstGeom prst="rect">
@@ -6744,12 +8868,12 @@
             <a:pPr>
               <a:defRPr sz="850">
                 <a:solidFill>
-                  <a:srgbClr val="94A3B8"/>
-                </a:solidFill>
-              </a:defRPr>
-            </a:pPr>
-            <a:r>
-              <a:t>PK-Bayes · Decision Support System CDSS v3.2                                                Documento Institucional Clínico                                                03 / 14</a:t>
+                  <a:srgbClr val="64748B"/>
+                </a:solidFill>
+              </a:defRPr>
+            </a:pPr>
+            <a:r>
+              <a:t>PK-Bayes · CDSS v3.2 · Soporte a la Decisión Clínica Farmacocinética                       Confidencial · Uso Hospitalario Institucional                       03 / 14</a:t>
             </a:r>
           </a:p>
         </p:txBody>
@@ -6768,7 +8892,7 @@
     <p:bg>
       <p:bgPr>
         <a:solidFill>
-          <a:srgbClr val="F8FAFC"/>
+          <a:srgbClr val="FFFFFF"/>
         </a:solidFill>
         <a:effectLst/>
       </p:bgPr>
@@ -6788,8 +8912,8 @@
         </p:nvSpPr>
         <p:spPr>
           <a:xfrm>
-            <a:off x="731520" y="438912"/>
-            <a:ext cx="5486400" cy="320040"/>
+            <a:off x="731520" y="384048"/>
+            <a:ext cx="6858000" cy="292608"/>
           </a:xfrm>
           <a:prstGeom prst="rect">
             <a:avLst/>
@@ -6803,7 +8927,7 @@
           <a:lstStyle/>
           <a:p>
             <a:pPr>
-              <a:defRPr sz="950" b="1">
+              <a:defRPr sz="900" b="1">
                 <a:solidFill>
                   <a:srgbClr val="0284C7"/>
                 </a:solidFill>
@@ -6823,8 +8947,8 @@
         </p:nvSpPr>
         <p:spPr>
           <a:xfrm>
-            <a:off x="731520" y="713232"/>
-            <a:ext cx="10698480" cy="594360"/>
+            <a:off x="731520" y="676656"/>
+            <a:ext cx="10698480" cy="548640"/>
           </a:xfrm>
           <a:prstGeom prst="rect">
             <a:avLst/>
@@ -6838,14 +8962,14 @@
           <a:lstStyle/>
           <a:p>
             <a:pPr>
-              <a:defRPr sz="2200" b="1">
+              <a:defRPr sz="2100" b="1">
                 <a:solidFill>
                   <a:srgbClr val="0F172A"/>
                 </a:solidFill>
               </a:defRPr>
             </a:pPr>
             <a:r>
-              <a:t>Modelado de Aclaramiento Renal Cambiante y TCRR</a:t>
+              <a:t>Estratificación de Aclaramiento Renal y Terapias Extracorpóreas</a:t>
             </a:r>
           </a:p>
         </p:txBody>
@@ -6858,8 +8982,8 @@
         </p:nvSpPr>
         <p:spPr>
           <a:xfrm>
-            <a:off x="731520" y="1298448"/>
-            <a:ext cx="10698480" cy="411480"/>
+            <a:off x="731520" y="1243584"/>
+            <a:ext cx="10698480" cy="384048"/>
           </a:xfrm>
           <a:prstGeom prst="rect">
             <a:avLst/>
@@ -6873,14 +8997,14 @@
           <a:lstStyle/>
           <a:p>
             <a:pPr>
-              <a:defRPr sz="1200">
-                <a:solidFill>
-                  <a:srgbClr val="64748B"/>
-                </a:solidFill>
-              </a:defRPr>
-            </a:pPr>
-            <a:r>
-              <a:t>PK-Bayes supera el dogma del 'ClCr estático' mediante tramos temporales fisiológicos y soporte para diálisis continua.</a:t>
+              <a:defRPr sz="1150">
+                <a:solidFill>
+                  <a:srgbClr val="475569"/>
+                </a:solidFill>
+              </a:defRPr>
+            </a:pPr>
+            <a:r>
+              <a:t>Gestión integral desde el Aclaramiento Renal Aumentado (ARC &gt; 130 mL/min) hasta la Terapia de Reemplazo Renal Continua (TCRR).</a:t>
             </a:r>
           </a:p>
         </p:txBody>
@@ -6894,7 +9018,7 @@
         <p:spPr>
           <a:xfrm>
             <a:off x="676656" y="1728216"/>
-            <a:ext cx="5596128" cy="4498848"/>
+            <a:ext cx="5413248" cy="4498848"/>
           </a:xfrm>
           <a:prstGeom prst="roundRect">
             <a:avLst/>
@@ -6932,7 +9056,7 @@
       </p:sp>
       <p:pic>
         <p:nvPicPr>
-          <p:cNvPr id="6" name="Picture 5" descr="03-funcion-renal.png"/>
+          <p:cNvPr id="6" name="Picture 5" descr="renal_arc_spectrum.png"/>
           <p:cNvPicPr>
             <a:picLocks noChangeAspect="1"/>
           </p:cNvPicPr>
@@ -6947,7 +9071,7 @@
         <p:spPr>
           <a:xfrm>
             <a:off x="731520" y="1783080"/>
-            <a:ext cx="5486400" cy="4389120"/>
+            <a:ext cx="5303520" cy="4389120"/>
           </a:xfrm>
           <a:prstGeom prst="rect">
             <a:avLst/>
@@ -6956,221 +9080,14 @@
       </p:pic>
       <p:sp>
         <p:nvSpPr>
-          <p:cNvPr id="7" name="Rounded Rectangle 6"/>
-          <p:cNvSpPr/>
-          <p:nvPr/>
-        </p:nvSpPr>
-        <p:spPr>
-          <a:xfrm>
-            <a:off x="6492240" y="1783080"/>
-            <a:ext cx="4937760" cy="1371600"/>
-          </a:xfrm>
-          <a:prstGeom prst="roundRect">
-            <a:avLst/>
-          </a:prstGeom>
-          <a:solidFill>
-            <a:srgbClr val="FFFFFF"/>
-          </a:solidFill>
-          <a:ln w="12700">
-            <a:solidFill>
-              <a:srgbClr val="E2E8F0"/>
-            </a:solidFill>
-          </a:ln>
-        </p:spPr>
-        <p:style>
-          <a:lnRef idx="1">
-            <a:schemeClr val="accent1"/>
-          </a:lnRef>
-          <a:fillRef idx="3">
-            <a:schemeClr val="accent1"/>
-          </a:fillRef>
-          <a:effectRef idx="2">
-            <a:schemeClr val="accent1"/>
-          </a:effectRef>
-          <a:fontRef idx="minor">
-            <a:schemeClr val="lt1"/>
-          </a:fontRef>
-        </p:style>
-        <p:txBody>
-          <a:bodyPr rtlCol="0" anchor="ctr" lIns="164592" tIns="164592" rIns="137160"/>
-          <a:lstStyle/>
-          <a:p>
-            <a:pPr algn="ctr">
-              <a:defRPr sz="1150" b="1">
-                <a:solidFill>
-                  <a:srgbClr val="0284C7"/>
-                </a:solidFill>
-              </a:defRPr>
-            </a:pPr>
-            <a:r>
-              <a:t>Aclaramiento Segmentado por Tramos</a:t>
-            </a:r>
-          </a:p>
-          <a:p>
-            <a:pPr>
-              <a:spcBef>
-                <a:spcPts val="400"/>
-              </a:spcBef>
-              <a:defRPr sz="1000">
-                <a:solidFill>
-                  <a:srgbClr val="64748B"/>
-                </a:solidFill>
-              </a:defRPr>
-            </a:pPr>
-            <a:r>
-              <a:t>Permite definir diferentes valores de creatinina y función renal a lo largo del tratamiento. Si el paciente entra en shock y luego recupera perfusión, el modelo calcula la depuración exacta en cada tramo temporal.</a:t>
-            </a:r>
-          </a:p>
-        </p:txBody>
-      </p:sp>
-      <p:sp>
-        <p:nvSpPr>
-          <p:cNvPr id="8" name="Rounded Rectangle 7"/>
-          <p:cNvSpPr/>
-          <p:nvPr/>
-        </p:nvSpPr>
-        <p:spPr>
-          <a:xfrm>
-            <a:off x="6492240" y="3291839"/>
-            <a:ext cx="4937760" cy="1371600"/>
-          </a:xfrm>
-          <a:prstGeom prst="roundRect">
-            <a:avLst/>
-          </a:prstGeom>
-          <a:solidFill>
-            <a:srgbClr val="FFFFFF"/>
-          </a:solidFill>
-          <a:ln w="12700">
-            <a:solidFill>
-              <a:srgbClr val="E2E8F0"/>
-            </a:solidFill>
-          </a:ln>
-        </p:spPr>
-        <p:style>
-          <a:lnRef idx="1">
-            <a:schemeClr val="accent1"/>
-          </a:lnRef>
-          <a:fillRef idx="3">
-            <a:schemeClr val="accent1"/>
-          </a:fillRef>
-          <a:effectRef idx="2">
-            <a:schemeClr val="accent1"/>
-          </a:effectRef>
-          <a:fontRef idx="minor">
-            <a:schemeClr val="lt1"/>
-          </a:fontRef>
-        </p:style>
-        <p:txBody>
-          <a:bodyPr rtlCol="0" anchor="ctr" lIns="164592" tIns="164592" rIns="137160"/>
-          <a:lstStyle/>
-          <a:p>
-            <a:pPr algn="ctr">
-              <a:defRPr sz="1150" b="1">
-                <a:solidFill>
-                  <a:srgbClr val="059669"/>
-                </a:solidFill>
-              </a:defRPr>
-            </a:pPr>
-            <a:r>
-              <a:t>Soporte Completo para TCRR y Hemodiálisis</a:t>
-            </a:r>
-          </a:p>
-          <a:p>
-            <a:pPr>
-              <a:spcBef>
-                <a:spcPts val="400"/>
-              </a:spcBef>
-              <a:defRPr sz="1000">
-                <a:solidFill>
-                  <a:srgbClr val="64748B"/>
-                </a:solidFill>
-              </a:defRPr>
-            </a:pPr>
-            <a:r>
-              <a:t>Parámetros específicos para hemofiltración venovenosa continua (CVVH), hemodiafiltración (CVVHDF) y diálisis intermitente. Considera tasa de efluente, dosis dialítica y aclaramiento de membrana.</a:t>
-            </a:r>
-          </a:p>
-        </p:txBody>
-      </p:sp>
-      <p:sp>
-        <p:nvSpPr>
-          <p:cNvPr id="9" name="Rounded Rectangle 8"/>
-          <p:cNvSpPr/>
-          <p:nvPr/>
-        </p:nvSpPr>
-        <p:spPr>
-          <a:xfrm>
-            <a:off x="6492240" y="4800600"/>
-            <a:ext cx="4937760" cy="1371600"/>
-          </a:xfrm>
-          <a:prstGeom prst="roundRect">
-            <a:avLst/>
-          </a:prstGeom>
-          <a:solidFill>
-            <a:srgbClr val="FFFFFF"/>
-          </a:solidFill>
-          <a:ln w="12700">
-            <a:solidFill>
-              <a:srgbClr val="E2E8F0"/>
-            </a:solidFill>
-          </a:ln>
-        </p:spPr>
-        <p:style>
-          <a:lnRef idx="1">
-            <a:schemeClr val="accent1"/>
-          </a:lnRef>
-          <a:fillRef idx="3">
-            <a:schemeClr val="accent1"/>
-          </a:fillRef>
-          <a:effectRef idx="2">
-            <a:schemeClr val="accent1"/>
-          </a:effectRef>
-          <a:fontRef idx="minor">
-            <a:schemeClr val="lt1"/>
-          </a:fontRef>
-        </p:style>
-        <p:txBody>
-          <a:bodyPr rtlCol="0" anchor="ctr" lIns="164592" tIns="164592" rIns="137160"/>
-          <a:lstStyle/>
-          <a:p>
-            <a:pPr algn="ctr">
-              <a:defRPr sz="1150" b="1">
-                <a:solidFill>
-                  <a:srgbClr val="D97706"/>
-                </a:solidFill>
-              </a:defRPr>
-            </a:pPr>
-            <a:r>
-              <a:t>Detección de Aclaramiento Aumentado (ARC)</a:t>
-            </a:r>
-          </a:p>
-          <a:p>
-            <a:pPr>
-              <a:spcBef>
-                <a:spcPts val="400"/>
-              </a:spcBef>
-              <a:defRPr sz="1000">
-                <a:solidFill>
-                  <a:srgbClr val="64748B"/>
-                </a:solidFill>
-              </a:defRPr>
-            </a:pPr>
-            <a:r>
-              <a:t>Identifica pacientes jóvenes o politraumatizados con ClCr &gt; 130 mL/min que subdosifican antibióticos en regímenes estándar, alertando la necesidad de dosis de carga y perfusión extendida.</a:t>
-            </a:r>
-          </a:p>
-        </p:txBody>
-      </p:sp>
-      <p:sp>
-        <p:nvSpPr>
-          <p:cNvPr id="10" name="TextBox 9"/>
+          <p:cNvPr id="7" name="TextBox 6"/>
           <p:cNvSpPr txBox="1"/>
           <p:nvPr/>
         </p:nvSpPr>
         <p:spPr>
           <a:xfrm>
-            <a:off x="731520" y="6400800"/>
-            <a:ext cx="10725912" cy="274320"/>
+            <a:off x="731520" y="6227064"/>
+            <a:ext cx="5303520" cy="228600"/>
           </a:xfrm>
           <a:prstGeom prst="rect">
             <a:avLst/>
@@ -7183,15 +9100,50 @@
           </a:bodyPr>
           <a:lstStyle/>
           <a:p>
+            <a:pPr algn="ctr">
+              <a:defRPr sz="800">
+                <a:solidFill>
+                  <a:srgbClr val="64748B"/>
+                </a:solidFill>
+              </a:defRPr>
+            </a:pPr>
+            <a:r>
+              <a:t>Figura 3: Espectro dinámico de función renal en UCI y zonas de riesgo farmacológico identificadas.</a:t>
+            </a:r>
+          </a:p>
+        </p:txBody>
+      </p:sp>
+      <p:sp>
+        <p:nvSpPr>
+          <p:cNvPr id="8" name="TextBox 7"/>
+          <p:cNvSpPr txBox="1"/>
+          <p:nvPr/>
+        </p:nvSpPr>
+        <p:spPr>
+          <a:xfrm>
+            <a:off x="731520" y="6437376"/>
+            <a:ext cx="10725912" cy="274320"/>
+          </a:xfrm>
+          <a:prstGeom prst="rect">
+            <a:avLst/>
+          </a:prstGeom>
+          <a:noFill/>
+        </p:spPr>
+        <p:txBody>
+          <a:bodyPr wrap="none" lIns="0" tIns="0" rIns="0" bIns="0">
+            <a:spAutoFit/>
+          </a:bodyPr>
+          <a:lstStyle/>
+          <a:p>
             <a:pPr>
               <a:defRPr sz="850">
                 <a:solidFill>
-                  <a:srgbClr val="94A3B8"/>
-                </a:solidFill>
-              </a:defRPr>
-            </a:pPr>
-            <a:r>
-              <a:t>PK-Bayes · Decision Support System CDSS v3.2                                                Documento Institucional Clínico                                                04 / 14</a:t>
+                  <a:srgbClr val="64748B"/>
+                </a:solidFill>
+              </a:defRPr>
+            </a:pPr>
+            <a:r>
+              <a:t>PK-Bayes · CDSS v3.2 · Soporte a la Decisión Clínica Farmacocinética                       Confidencial · Uso Hospitalario Institucional                       04 / 14</a:t>
             </a:r>
           </a:p>
         </p:txBody>
@@ -7210,7 +9162,7 @@
     <p:bg>
       <p:bgPr>
         <a:solidFill>
-          <a:srgbClr val="F8FAFC"/>
+          <a:srgbClr val="FFFFFF"/>
         </a:solidFill>
         <a:effectLst/>
       </p:bgPr>
@@ -7230,8 +9182,8 @@
         </p:nvSpPr>
         <p:spPr>
           <a:xfrm>
-            <a:off x="731520" y="438912"/>
-            <a:ext cx="5486400" cy="320040"/>
+            <a:off x="731520" y="384048"/>
+            <a:ext cx="6858000" cy="292608"/>
           </a:xfrm>
           <a:prstGeom prst="rect">
             <a:avLst/>
@@ -7245,14 +9197,14 @@
           <a:lstStyle/>
           <a:p>
             <a:pPr>
-              <a:defRPr sz="950" b="1">
+              <a:defRPr sz="900" b="1">
                 <a:solidFill>
                   <a:srgbClr val="0284C7"/>
                 </a:solidFill>
               </a:defRPr>
             </a:pPr>
             <a:r>
-              <a:t>FARMACOPEA &amp; MODELOS POBLACIONALES</a:t>
+              <a:t>CATÁLOGO TERAPÉUTICO ESPECIALIZADO</a:t>
             </a:r>
           </a:p>
         </p:txBody>
@@ -7265,8 +9217,8 @@
         </p:nvSpPr>
         <p:spPr>
           <a:xfrm>
-            <a:off x="731520" y="713232"/>
-            <a:ext cx="10698480" cy="594360"/>
+            <a:off x="731520" y="676656"/>
+            <a:ext cx="10698480" cy="548640"/>
           </a:xfrm>
           <a:prstGeom prst="rect">
             <a:avLst/>
@@ -7280,14 +9232,14 @@
           <a:lstStyle/>
           <a:p>
             <a:pPr>
-              <a:defRPr sz="2200" b="1">
+              <a:defRPr sz="2100" b="1">
                 <a:solidFill>
                   <a:srgbClr val="0F172A"/>
                 </a:solidFill>
               </a:defRPr>
             </a:pPr>
             <a:r>
-              <a:t>Catálogo de Fármacos de Estrecho Margen Terapéutico</a:t>
+              <a:t>Farmacopea y Modelos Poblacionales Validados</a:t>
             </a:r>
           </a:p>
         </p:txBody>
@@ -7300,8 +9252,8 @@
         </p:nvSpPr>
         <p:spPr>
           <a:xfrm>
-            <a:off x="731520" y="1298448"/>
-            <a:ext cx="10698480" cy="411480"/>
+            <a:off x="731520" y="1243584"/>
+            <a:ext cx="10698480" cy="384048"/>
           </a:xfrm>
           <a:prstGeom prst="rect">
             <a:avLst/>
@@ -7315,14 +9267,14 @@
           <a:lstStyle/>
           <a:p>
             <a:pPr>
-              <a:defRPr sz="1200">
-                <a:solidFill>
-                  <a:srgbClr val="64748B"/>
-                </a:solidFill>
-              </a:defRPr>
-            </a:pPr>
-            <a:r>
-              <a:t>Modelos farmacocinéticos multi-compartimentales rigurosamente contrastados con la literatura internacional.</a:t>
+              <a:defRPr sz="1150">
+                <a:solidFill>
+                  <a:srgbClr val="475569"/>
+                </a:solidFill>
+              </a:defRPr>
+            </a:pPr>
+            <a:r>
+              <a:t>Algoritmos calibrados específicamente para antimicrobianos críticos y fármacos de estrecho margen terapéutico.</a:t>
             </a:r>
           </a:p>
         </p:txBody>
@@ -7336,13 +9288,13 @@
         <p:spPr>
           <a:xfrm>
             <a:off x="731520" y="1783080"/>
-            <a:ext cx="5212080" cy="2103120"/>
+            <a:ext cx="3383280" cy="2057400"/>
           </a:xfrm>
           <a:prstGeom prst="roundRect">
             <a:avLst/>
           </a:prstGeom>
           <a:solidFill>
-            <a:srgbClr val="FFFFFF"/>
+            <a:srgbClr val="F8FAFC"/>
           </a:solidFill>
           <a:ln w="12700">
             <a:solidFill>
@@ -7365,45 +9317,42 @@
           </a:fontRef>
         </p:style>
         <p:txBody>
-          <a:bodyPr rtlCol="0" anchor="ctr" lIns="182880" tIns="182880" rIns="164592"/>
+          <a:bodyPr rtlCol="0" anchor="ctr" lIns="182880" tIns="137160"/>
           <a:lstStyle/>
           <a:p>
             <a:pPr algn="ctr">
-              <a:defRPr sz="950" b="1">
+              <a:defRPr b="1" sz="1050">
                 <a:solidFill>
                   <a:srgbClr val="0284C7"/>
                 </a:solidFill>
               </a:defRPr>
             </a:pPr>
             <a:r>
-              <a:t>CONSENSO ASHP/IDSA 2020</a:t>
+              <a:t>VANCOMICINA (GLICOPÉPTIDO)</a:t>
             </a:r>
           </a:p>
           <a:p>
             <a:pPr>
-              <a:defRPr sz="1350" b="1">
-                <a:solidFill>
-                  <a:srgbClr val="0F172A"/>
-                </a:solidFill>
-              </a:defRPr>
-            </a:pPr>
-            <a:r>
-              <a:t>Vancomicina (1 y 2 Compartimentos)</a:t>
-            </a:r>
-          </a:p>
-          <a:p>
-            <a:pPr>
-              <a:spcBef>
-                <a:spcPts val="600"/>
-              </a:spcBef>
-              <a:defRPr sz="1050">
-                <a:solidFill>
-                  <a:srgbClr val="64748B"/>
-                </a:solidFill>
-              </a:defRPr>
-            </a:pPr>
-            <a:r>
-              <a:t>Optimización guiada por AUC24/CIM (400-600 mg·h/L). Modelos de Rodvold, Thomson y Colin. Infusión intermitente y continua para prevención de nefrotoxicidad.</a:t>
+              <a:defRPr sz="900">
+                <a:solidFill>
+                  <a:srgbClr val="475569"/>
+                </a:solidFill>
+              </a:defRPr>
+            </a:pPr>
+            <a:r>
+              <a:t>• Diana: AUC24/CIM 400 - 600 mg·h/L</a:t>
+            </a:r>
+            <a:br/>
+            <a:r>
+              <a:t>• Modelo 2-compartimentos (Thomson / Goti / Colin)</a:t>
+            </a:r>
+            <a:br/>
+            <a:r>
+              <a:t>• Transición desde monitorización de sólo valle</a:t>
+            </a:r>
+            <a:br/>
+            <a:r>
+              <a:t>• Monitorización en perfusión continua o intermitente</a:t>
             </a:r>
           </a:p>
         </p:txBody>
@@ -7416,14 +9365,57 @@
         </p:nvSpPr>
         <p:spPr>
           <a:xfrm>
-            <a:off x="6217920" y="1783080"/>
-            <a:ext cx="5212080" cy="2103120"/>
+            <a:off x="804672" y="1892808"/>
+            <a:ext cx="54864" cy="1837944"/>
           </a:xfrm>
           <a:prstGeom prst="roundRect">
             <a:avLst/>
           </a:prstGeom>
           <a:solidFill>
-            <a:srgbClr val="FFFFFF"/>
+            <a:srgbClr val="0284C7"/>
+          </a:solidFill>
+          <a:ln>
+            <a:noFill/>
+          </a:ln>
+        </p:spPr>
+        <p:style>
+          <a:lnRef idx="1">
+            <a:schemeClr val="accent1"/>
+          </a:lnRef>
+          <a:fillRef idx="3">
+            <a:schemeClr val="accent1"/>
+          </a:fillRef>
+          <a:effectRef idx="2">
+            <a:schemeClr val="accent1"/>
+          </a:effectRef>
+          <a:fontRef idx="minor">
+            <a:schemeClr val="lt1"/>
+          </a:fontRef>
+        </p:style>
+        <p:txBody>
+          <a:bodyPr rtlCol="0" anchor="ctr"/>
+          <a:lstStyle/>
+          <a:p>
+            <a:pPr algn="ctr"/>
+          </a:p>
+        </p:txBody>
+      </p:sp>
+      <p:sp>
+        <p:nvSpPr>
+          <p:cNvPr id="7" name="Rounded Rectangle 6"/>
+          <p:cNvSpPr/>
+          <p:nvPr/>
+        </p:nvSpPr>
+        <p:spPr>
+          <a:xfrm>
+            <a:off x="4297680" y="1783080"/>
+            <a:ext cx="3383280" cy="2057400"/>
+          </a:xfrm>
+          <a:prstGeom prst="roundRect">
+            <a:avLst/>
+          </a:prstGeom>
+          <a:solidFill>
+            <a:srgbClr val="F8FAFC"/>
           </a:solidFill>
           <a:ln w="12700">
             <a:solidFill>
@@ -7446,65 +9438,105 @@
           </a:fontRef>
         </p:style>
         <p:txBody>
-          <a:bodyPr rtlCol="0" anchor="ctr" lIns="182880" tIns="182880" rIns="164592"/>
+          <a:bodyPr rtlCol="0" anchor="ctr" lIns="182880" tIns="137160"/>
           <a:lstStyle/>
           <a:p>
             <a:pPr algn="ctr">
-              <a:defRPr sz="950" b="1">
+              <a:defRPr b="1" sz="1050">
                 <a:solidFill>
                   <a:srgbClr val="059669"/>
                 </a:solidFill>
               </a:defRPr>
             </a:pPr>
             <a:r>
-              <a:t>DOSIFICACIÓN EXTENDIDA ODA</a:t>
+              <a:t>AMINOGLUCÓSIDOS (AMIKACINA / GENTA)</a:t>
             </a:r>
           </a:p>
           <a:p>
             <a:pPr>
-              <a:defRPr sz="1350" b="1">
-                <a:solidFill>
-                  <a:srgbClr val="0F172A"/>
-                </a:solidFill>
-              </a:defRPr>
-            </a:pPr>
-            <a:r>
-              <a:t>Aminoglucósidos (Amikacina, Gentamicina)</a:t>
-            </a:r>
-          </a:p>
-          <a:p>
-            <a:pPr>
-              <a:spcBef>
-                <a:spcPts val="600"/>
-              </a:spcBef>
-              <a:defRPr sz="1050">
-                <a:solidFill>
-                  <a:srgbClr val="64748B"/>
-                </a:solidFill>
-              </a:defRPr>
-            </a:pPr>
-            <a:r>
-              <a:t>Maximización del ratio bactericida Cmax/CIM (&gt; 8-10) con minimización de la acumulación residual en valle (Cmin &lt; 1 mg/L) para protección coclear y renal.</a:t>
-            </a:r>
-          </a:p>
-        </p:txBody>
-      </p:sp>
-      <p:sp>
-        <p:nvSpPr>
-          <p:cNvPr id="7" name="Rounded Rectangle 6"/>
+              <a:defRPr sz="900">
+                <a:solidFill>
+                  <a:srgbClr val="475569"/>
+                </a:solidFill>
+              </a:defRPr>
+            </a:pPr>
+            <a:r>
+              <a:t>• Diana: Cmax/CIM &gt;= 8 - 10 (Pico optimizado)</a:t>
+            </a:r>
+            <a:br/>
+            <a:r>
+              <a:t>• Dosificación de dosis única diaria (ODA)</a:t>
+            </a:r>
+            <a:br/>
+            <a:r>
+              <a:t>• Minimización de acumulación cortical renal (Cvalle &lt; 1 µg/mL)</a:t>
+            </a:r>
+            <a:br/>
+            <a:r>
+              <a:t>• Modelos bicompartimentales con corrección por obesidad</a:t>
+            </a:r>
+          </a:p>
+        </p:txBody>
+      </p:sp>
+      <p:sp>
+        <p:nvSpPr>
+          <p:cNvPr id="8" name="Rounded Rectangle 7"/>
           <p:cNvSpPr/>
           <p:nvPr/>
         </p:nvSpPr>
         <p:spPr>
           <a:xfrm>
-            <a:off x="731520" y="4023360"/>
-            <a:ext cx="5212080" cy="2103120"/>
+            <a:off x="4370832" y="1892808"/>
+            <a:ext cx="54864" cy="1837944"/>
           </a:xfrm>
           <a:prstGeom prst="roundRect">
             <a:avLst/>
           </a:prstGeom>
           <a:solidFill>
-            <a:srgbClr val="FFFFFF"/>
+            <a:srgbClr val="059669"/>
+          </a:solidFill>
+          <a:ln>
+            <a:noFill/>
+          </a:ln>
+        </p:spPr>
+        <p:style>
+          <a:lnRef idx="1">
+            <a:schemeClr val="accent1"/>
+          </a:lnRef>
+          <a:fillRef idx="3">
+            <a:schemeClr val="accent1"/>
+          </a:fillRef>
+          <a:effectRef idx="2">
+            <a:schemeClr val="accent1"/>
+          </a:effectRef>
+          <a:fontRef idx="minor">
+            <a:schemeClr val="lt1"/>
+          </a:fontRef>
+        </p:style>
+        <p:txBody>
+          <a:bodyPr rtlCol="0" anchor="ctr"/>
+          <a:lstStyle/>
+          <a:p>
+            <a:pPr algn="ctr"/>
+          </a:p>
+        </p:txBody>
+      </p:sp>
+      <p:sp>
+        <p:nvSpPr>
+          <p:cNvPr id="9" name="Rounded Rectangle 8"/>
+          <p:cNvSpPr/>
+          <p:nvPr/>
+        </p:nvSpPr>
+        <p:spPr>
+          <a:xfrm>
+            <a:off x="731520" y="4069080"/>
+            <a:ext cx="3383280" cy="2057400"/>
+          </a:xfrm>
+          <a:prstGeom prst="roundRect">
+            <a:avLst/>
+          </a:prstGeom>
+          <a:solidFill>
+            <a:srgbClr val="F8FAFC"/>
           </a:solidFill>
           <a:ln w="12700">
             <a:solidFill>
@@ -7527,65 +9559,105 @@
           </a:fontRef>
         </p:style>
         <p:txBody>
-          <a:bodyPr rtlCol="0" anchor="ctr" lIns="182880" tIns="182880" rIns="164592"/>
+          <a:bodyPr rtlCol="0" anchor="ctr" lIns="182880" tIns="137160"/>
           <a:lstStyle/>
           <a:p>
             <a:pPr algn="ctr">
-              <a:defRPr sz="950" b="1">
-                <a:solidFill>
-                  <a:srgbClr val="D97706"/>
-                </a:solidFill>
-              </a:defRPr>
-            </a:pPr>
-            <a:r>
-              <a:t>MEROPENEM, PIPERACILINA/TAZO, CEFEPIME</a:t>
+              <a:defRPr b="1" sz="1050">
+                <a:solidFill>
+                  <a:srgbClr val="7C3AED"/>
+                </a:solidFill>
+              </a:defRPr>
+            </a:pPr>
+            <a:r>
+              <a:t>BETALACTÁMICOS (MEROPENEM / PIP-TAZO)</a:t>
             </a:r>
           </a:p>
           <a:p>
             <a:pPr>
-              <a:defRPr sz="1350" b="1">
-                <a:solidFill>
-                  <a:srgbClr val="0F172A"/>
-                </a:solidFill>
-              </a:defRPr>
-            </a:pPr>
-            <a:r>
-              <a:t>Betalactámicos en Perfusión Extendida</a:t>
-            </a:r>
-          </a:p>
-          <a:p>
-            <a:pPr>
-              <a:spcBef>
-                <a:spcPts val="600"/>
-              </a:spcBef>
-              <a:defRPr sz="1050">
-                <a:solidFill>
-                  <a:srgbClr val="64748B"/>
-                </a:solidFill>
-              </a:defRPr>
-            </a:pPr>
-            <a:r>
-              <a:t>Optimización de diana farmacodinámica tiempo sobre CIM (100% fT &gt; CIM y 100% fT &gt; 4x CIM) para infecciones por patógenos multidiorresistentes (BMR).</a:t>
-            </a:r>
-          </a:p>
-        </p:txBody>
-      </p:sp>
-      <p:sp>
-        <p:nvSpPr>
-          <p:cNvPr id="8" name="Rounded Rectangle 7"/>
+              <a:defRPr sz="900">
+                <a:solidFill>
+                  <a:srgbClr val="475569"/>
+                </a:solidFill>
+              </a:defRPr>
+            </a:pPr>
+            <a:r>
+              <a:t>• Diana: %fT &gt; 1-4x CIM &gt;= 100% en neutropenia</a:t>
+            </a:r>
+            <a:br/>
+            <a:r>
+              <a:t>• Optimización de perfusiones extendidas y continuas</a:t>
+            </a:r>
+            <a:br/>
+            <a:r>
+              <a:t>• Ajuste dinámico ante Aclaramiento Aumentado (ARC)</a:t>
+            </a:r>
+            <a:br/>
+            <a:r>
+              <a:t>• Modelos poblacionales validados en UCI quirúrgica y médica</a:t>
+            </a:r>
+          </a:p>
+        </p:txBody>
+      </p:sp>
+      <p:sp>
+        <p:nvSpPr>
+          <p:cNvPr id="10" name="Rounded Rectangle 9"/>
           <p:cNvSpPr/>
           <p:nvPr/>
         </p:nvSpPr>
         <p:spPr>
           <a:xfrm>
-            <a:off x="6217920" y="4023360"/>
-            <a:ext cx="5212080" cy="2103120"/>
+            <a:off x="804672" y="4178808"/>
+            <a:ext cx="54864" cy="1837944"/>
           </a:xfrm>
           <a:prstGeom prst="roundRect">
             <a:avLst/>
           </a:prstGeom>
           <a:solidFill>
-            <a:srgbClr val="FFFFFF"/>
+            <a:srgbClr val="7C3AED"/>
+          </a:solidFill>
+          <a:ln>
+            <a:noFill/>
+          </a:ln>
+        </p:spPr>
+        <p:style>
+          <a:lnRef idx="1">
+            <a:schemeClr val="accent1"/>
+          </a:lnRef>
+          <a:fillRef idx="3">
+            <a:schemeClr val="accent1"/>
+          </a:fillRef>
+          <a:effectRef idx="2">
+            <a:schemeClr val="accent1"/>
+          </a:effectRef>
+          <a:fontRef idx="minor">
+            <a:schemeClr val="lt1"/>
+          </a:fontRef>
+        </p:style>
+        <p:txBody>
+          <a:bodyPr rtlCol="0" anchor="ctr"/>
+          <a:lstStyle/>
+          <a:p>
+            <a:pPr algn="ctr"/>
+          </a:p>
+        </p:txBody>
+      </p:sp>
+      <p:sp>
+        <p:nvSpPr>
+          <p:cNvPr id="11" name="Rounded Rectangle 10"/>
+          <p:cNvSpPr/>
+          <p:nvPr/>
+        </p:nvSpPr>
+        <p:spPr>
+          <a:xfrm>
+            <a:off x="4297680" y="4069080"/>
+            <a:ext cx="3383280" cy="2057400"/>
+          </a:xfrm>
+          <a:prstGeom prst="roundRect">
+            <a:avLst/>
+          </a:prstGeom>
+          <a:solidFill>
+            <a:srgbClr val="F8FAFC"/>
           </a:solidFill>
           <a:ln w="12700">
             <a:solidFill>
@@ -7608,58 +9680,98 @@
           </a:fontRef>
         </p:style>
         <p:txBody>
-          <a:bodyPr rtlCol="0" anchor="ctr" lIns="182880" tIns="182880" rIns="164592"/>
+          <a:bodyPr rtlCol="0" anchor="ctr" lIns="182880" tIns="137160"/>
           <a:lstStyle/>
           <a:p>
             <a:pPr algn="ctr">
-              <a:defRPr sz="950" b="1">
-                <a:solidFill>
-                  <a:srgbClr val="E11D48"/>
-                </a:solidFill>
-              </a:defRPr>
-            </a:pPr>
-            <a:r>
-              <a:t>MICHAELIS-MENTEN &amp; SHEINER-TOZER</a:t>
+              <a:defRPr b="1" sz="1050">
+                <a:solidFill>
+                  <a:srgbClr val="D97706"/>
+                </a:solidFill>
+              </a:defRPr>
+            </a:pPr>
+            <a:r>
+              <a:t>FENITOÍNA (CINÉTICA MICHAELIS-MENTEN)</a:t>
             </a:r>
           </a:p>
           <a:p>
             <a:pPr>
-              <a:defRPr sz="1350" b="1">
-                <a:solidFill>
-                  <a:srgbClr val="0F172A"/>
-                </a:solidFill>
-              </a:defRPr>
-            </a:pPr>
-            <a:r>
-              <a:t>Fenitoína (Cinética No Lineal Saturable)</a:t>
-            </a:r>
-          </a:p>
-          <a:p>
-            <a:pPr>
-              <a:spcBef>
-                <a:spcPts val="600"/>
-              </a:spcBef>
-              <a:defRPr sz="1050">
-                <a:solidFill>
-                  <a:srgbClr val="64748B"/>
-                </a:solidFill>
-              </a:defRPr>
-            </a:pPr>
-            <a:r>
-              <a:t>Modelado de saturación enzimática (Vmax y Km). Corrección obligatoria de concentraciones por hipoalbuminemia y uremia para evitar intoxicación neurológica.</a:t>
-            </a:r>
-          </a:p>
-        </p:txBody>
-      </p:sp>
-      <p:sp>
-        <p:nvSpPr>
-          <p:cNvPr id="9" name="TextBox 8"/>
+              <a:defRPr sz="900">
+                <a:solidFill>
+                  <a:srgbClr val="475569"/>
+                </a:solidFill>
+              </a:defRPr>
+            </a:pPr>
+            <a:r>
+              <a:t>• Cinética saturable no lineal de eliminación (Vmax, Km)</a:t>
+            </a:r>
+            <a:br/>
+            <a:r>
+              <a:t>• Corrección de Sheiner-Tozer por hipoalbuminemia</a:t>
+            </a:r>
+            <a:br/>
+            <a:r>
+              <a:t>• Ajuste simultáneo por uremia y falla renal</a:t>
+            </a:r>
+            <a:br/>
+            <a:r>
+              <a:t>• Prevención de saltos exponenciales a toxicidad neurológica</a:t>
+            </a:r>
+          </a:p>
+        </p:txBody>
+      </p:sp>
+      <p:sp>
+        <p:nvSpPr>
+          <p:cNvPr id="12" name="Rounded Rectangle 11"/>
+          <p:cNvSpPr/>
+          <p:nvPr/>
+        </p:nvSpPr>
+        <p:spPr>
+          <a:xfrm>
+            <a:off x="4370832" y="4178808"/>
+            <a:ext cx="54864" cy="1837944"/>
+          </a:xfrm>
+          <a:prstGeom prst="roundRect">
+            <a:avLst/>
+          </a:prstGeom>
+          <a:solidFill>
+            <a:srgbClr val="D97706"/>
+          </a:solidFill>
+          <a:ln>
+            <a:noFill/>
+          </a:ln>
+        </p:spPr>
+        <p:style>
+          <a:lnRef idx="1">
+            <a:schemeClr val="accent1"/>
+          </a:lnRef>
+          <a:fillRef idx="3">
+            <a:schemeClr val="accent1"/>
+          </a:fillRef>
+          <a:effectRef idx="2">
+            <a:schemeClr val="accent1"/>
+          </a:effectRef>
+          <a:fontRef idx="minor">
+            <a:schemeClr val="lt1"/>
+          </a:fontRef>
+        </p:style>
+        <p:txBody>
+          <a:bodyPr rtlCol="0" anchor="ctr"/>
+          <a:lstStyle/>
+          <a:p>
+            <a:pPr algn="ctr"/>
+          </a:p>
+        </p:txBody>
+      </p:sp>
+      <p:sp>
+        <p:nvSpPr>
+          <p:cNvPr id="13" name="TextBox 12"/>
           <p:cNvSpPr txBox="1"/>
           <p:nvPr/>
         </p:nvSpPr>
         <p:spPr>
           <a:xfrm>
-            <a:off x="731520" y="6400800"/>
+            <a:off x="731520" y="6437376"/>
             <a:ext cx="10725912" cy="274320"/>
           </a:xfrm>
           <a:prstGeom prst="rect">
@@ -7676,12 +9788,12 @@
             <a:pPr>
               <a:defRPr sz="850">
                 <a:solidFill>
-                  <a:srgbClr val="94A3B8"/>
-                </a:solidFill>
-              </a:defRPr>
-            </a:pPr>
-            <a:r>
-              <a:t>PK-Bayes · Decision Support System CDSS v3.2                                                Documento Institucional Clínico                                                05 / 14</a:t>
+                  <a:srgbClr val="64748B"/>
+                </a:solidFill>
+              </a:defRPr>
+            </a:pPr>
+            <a:r>
+              <a:t>PK-Bayes · CDSS v3.2 · Soporte a la Decisión Clínica Farmacocinética                       Confidencial · Uso Hospitalario Institucional                       05 / 14</a:t>
             </a:r>
           </a:p>
         </p:txBody>
@@ -7700,7 +9812,7 @@
     <p:bg>
       <p:bgPr>
         <a:solidFill>
-          <a:srgbClr val="F8FAFC"/>
+          <a:srgbClr val="FFFFFF"/>
         </a:solidFill>
         <a:effectLst/>
       </p:bgPr>
@@ -7720,8 +9832,8 @@
         </p:nvSpPr>
         <p:spPr>
           <a:xfrm>
-            <a:off x="731520" y="438912"/>
-            <a:ext cx="5486400" cy="320040"/>
+            <a:off x="731520" y="384048"/>
+            <a:ext cx="6858000" cy="292608"/>
           </a:xfrm>
           <a:prstGeom prst="rect">
             <a:avLst/>
@@ -7735,14 +9847,14 @@
           <a:lstStyle/>
           <a:p>
             <a:pPr>
-              <a:defRPr sz="950" b="1">
+              <a:defRPr sz="900" b="1">
                 <a:solidFill>
                   <a:srgbClr val="0284C7"/>
                 </a:solidFill>
               </a:defRPr>
             </a:pPr>
             <a:r>
-              <a:t>USABILIDAD &amp; FACTORES HUMANOS EN SALUD</a:t>
+              <a:t>USABILIDAD &amp; FACTORES HUMANOS</a:t>
             </a:r>
           </a:p>
         </p:txBody>
@@ -7755,8 +9867,8 @@
         </p:nvSpPr>
         <p:spPr>
           <a:xfrm>
-            <a:off x="731520" y="713232"/>
-            <a:ext cx="10698480" cy="594360"/>
+            <a:off x="731520" y="676656"/>
+            <a:ext cx="10698480" cy="548640"/>
           </a:xfrm>
           <a:prstGeom prst="rect">
             <a:avLst/>
@@ -7770,14 +9882,14 @@
           <a:lstStyle/>
           <a:p>
             <a:pPr>
-              <a:defRPr sz="2200" b="1">
+              <a:defRPr sz="2100" b="1">
                 <a:solidFill>
                   <a:srgbClr val="0F172A"/>
                 </a:solidFill>
               </a:defRPr>
             </a:pPr>
             <a:r>
-              <a:t>Flujo de Trabajo Clínico en Menos de 2 Minutos</a:t>
+              <a:t>Flujo Clínico en 4 Pasos: De la Muestra a la Dosis Óptima</a:t>
             </a:r>
           </a:p>
         </p:txBody>
@@ -7790,8 +9902,8 @@
         </p:nvSpPr>
         <p:spPr>
           <a:xfrm>
-            <a:off x="731520" y="1298448"/>
-            <a:ext cx="10698480" cy="411480"/>
+            <a:off x="731520" y="1243584"/>
+            <a:ext cx="10698480" cy="384048"/>
           </a:xfrm>
           <a:prstGeom prst="rect">
             <a:avLst/>
@@ -7805,14 +9917,14 @@
           <a:lstStyle/>
           <a:p>
             <a:pPr>
-              <a:defRPr sz="1200">
-                <a:solidFill>
-                  <a:srgbClr val="64748B"/>
-                </a:solidFill>
-              </a:defRPr>
-            </a:pPr>
-            <a:r>
-              <a:t>Diseñado para integrarse de forma natural en la ronda médica de UCI o en la interconsulta de farmacia clínica.</a:t>
+              <a:defRPr sz="1150">
+                <a:solidFill>
+                  <a:srgbClr val="475569"/>
+                </a:solidFill>
+              </a:defRPr>
+            </a:pPr>
+            <a:r>
+              <a:t>Diseñado para una adopción inmediata en la cabecera del paciente crítico sin sobrecarga cognitiva ni curva de aprendizaje extensa.</a:t>
             </a:r>
           </a:p>
         </p:txBody>
@@ -7826,13 +9938,13 @@
         <p:spPr>
           <a:xfrm>
             <a:off x="731520" y="1783080"/>
-            <a:ext cx="2542032" cy="4389120"/>
+            <a:ext cx="2542032" cy="1463040"/>
           </a:xfrm>
           <a:prstGeom prst="roundRect">
             <a:avLst/>
           </a:prstGeom>
           <a:solidFill>
-            <a:srgbClr val="FFFFFF"/>
+            <a:srgbClr val="F8FAFC"/>
           </a:solidFill>
           <a:ln w="12700">
             <a:solidFill>
@@ -7855,51 +9967,30 @@
           </a:fontRef>
         </p:style>
         <p:txBody>
-          <a:bodyPr rtlCol="0" anchor="ctr" lIns="201168" tIns="201168" rIns="164592"/>
+          <a:bodyPr rtlCol="0" anchor="ctr" lIns="182880" tIns="109728"/>
           <a:lstStyle/>
           <a:p>
             <a:pPr algn="ctr">
-              <a:defRPr sz="1100" b="1">
+              <a:defRPr b="1" sz="950">
                 <a:solidFill>
                   <a:srgbClr val="0284C7"/>
                 </a:solidFill>
               </a:defRPr>
             </a:pPr>
             <a:r>
-              <a:t>PASO 01</a:t>
+              <a:t>PASO 01 · DATOS CLÍNICOS</a:t>
             </a:r>
           </a:p>
           <a:p>
             <a:pPr>
-              <a:spcBef>
-                <a:spcPts val="400"/>
-              </a:spcBef>
-              <a:spcAft>
-                <a:spcPts val="1200"/>
-              </a:spcAft>
-              <a:defRPr sz="1400" b="1">
-                <a:solidFill>
-                  <a:srgbClr val="0F172A"/>
-                </a:solidFill>
-              </a:defRPr>
-            </a:pPr>
-            <a:r>
-              <a:t>Registro del Paciente</a:t>
-            </a:r>
-          </a:p>
-          <a:p>
-            <a:pPr>
-              <a:lnSpc>
-                <a:spcPct val="120000"/>
-              </a:lnSpc>
-              <a:defRPr sz="1100">
-                <a:solidFill>
-                  <a:srgbClr val="64748B"/>
-                </a:solidFill>
-              </a:defRPr>
-            </a:pPr>
-            <a:r>
-              <a:t>Ingreso seguro y anonimizado. Selección de edad, peso real/ajustado/magro y perfil renal dinámico.</a:t>
+              <a:defRPr sz="850">
+                <a:solidFill>
+                  <a:srgbClr val="475569"/>
+                </a:solidFill>
+              </a:defRPr>
+            </a:pPr>
+            <a:r>
+              <a:t>Edad, peso, creatinina sérica dinámica, balance de fluidos y soporte TCRR.</a:t>
             </a:r>
           </a:p>
         </p:txBody>
@@ -7912,14 +10003,57 @@
         </p:nvSpPr>
         <p:spPr>
           <a:xfrm>
+            <a:off x="804672" y="1892808"/>
+            <a:ext cx="54864" cy="1243584"/>
+          </a:xfrm>
+          <a:prstGeom prst="roundRect">
+            <a:avLst/>
+          </a:prstGeom>
+          <a:solidFill>
+            <a:srgbClr val="0284C7"/>
+          </a:solidFill>
+          <a:ln>
+            <a:noFill/>
+          </a:ln>
+        </p:spPr>
+        <p:style>
+          <a:lnRef idx="1">
+            <a:schemeClr val="accent1"/>
+          </a:lnRef>
+          <a:fillRef idx="3">
+            <a:schemeClr val="accent1"/>
+          </a:fillRef>
+          <a:effectRef idx="2">
+            <a:schemeClr val="accent1"/>
+          </a:effectRef>
+          <a:fontRef idx="minor">
+            <a:schemeClr val="lt1"/>
+          </a:fontRef>
+        </p:style>
+        <p:txBody>
+          <a:bodyPr rtlCol="0" anchor="ctr"/>
+          <a:lstStyle/>
+          <a:p>
+            <a:pPr algn="ctr"/>
+          </a:p>
+        </p:txBody>
+      </p:sp>
+      <p:sp>
+        <p:nvSpPr>
+          <p:cNvPr id="7" name="Rounded Rectangle 6"/>
+          <p:cNvSpPr/>
+          <p:nvPr/>
+        </p:nvSpPr>
+        <p:spPr>
+          <a:xfrm>
             <a:off x="3456432" y="1783080"/>
-            <a:ext cx="2542032" cy="4389120"/>
+            <a:ext cx="2542032" cy="1463040"/>
           </a:xfrm>
           <a:prstGeom prst="roundRect">
             <a:avLst/>
           </a:prstGeom>
           <a:solidFill>
-            <a:srgbClr val="FFFFFF"/>
+            <a:srgbClr val="F8FAFC"/>
           </a:solidFill>
           <a:ln w="12700">
             <a:solidFill>
@@ -7942,71 +10076,93 @@
           </a:fontRef>
         </p:style>
         <p:txBody>
-          <a:bodyPr rtlCol="0" anchor="ctr" lIns="201168" tIns="201168" rIns="164592"/>
+          <a:bodyPr rtlCol="0" anchor="ctr" lIns="182880" tIns="109728"/>
           <a:lstStyle/>
           <a:p>
             <a:pPr algn="ctr">
-              <a:defRPr sz="1100" b="1">
-                <a:solidFill>
-                  <a:srgbClr val="059669"/>
-                </a:solidFill>
-              </a:defRPr>
-            </a:pPr>
-            <a:r>
-              <a:t>PASO 02</a:t>
+              <a:defRPr b="1" sz="950">
+                <a:solidFill>
+                  <a:srgbClr val="2563EB"/>
+                </a:solidFill>
+              </a:defRPr>
+            </a:pPr>
+            <a:r>
+              <a:t>PASO 02 · HISTORIAL DE DOSIS</a:t>
             </a:r>
           </a:p>
           <a:p>
             <a:pPr>
-              <a:spcBef>
-                <a:spcPts val="400"/>
-              </a:spcBef>
-              <a:spcAft>
-                <a:spcPts val="1200"/>
-              </a:spcAft>
-              <a:defRPr sz="1400" b="1">
-                <a:solidFill>
-                  <a:srgbClr val="0F172A"/>
-                </a:solidFill>
-              </a:defRPr>
-            </a:pPr>
-            <a:r>
-              <a:t>Régimen &amp; Muestras TDM</a:t>
-            </a:r>
-          </a:p>
-          <a:p>
-            <a:pPr>
-              <a:lnSpc>
-                <a:spcPct val="120000"/>
-              </a:lnSpc>
-              <a:defRPr sz="1100">
-                <a:solidFill>
-                  <a:srgbClr val="64748B"/>
-                </a:solidFill>
-              </a:defRPr>
-            </a:pPr>
-            <a:r>
-              <a:t>Registro del esquema administrado (dosis, intervalo, duración infusión) y niveles medidos con hora exacta.</a:t>
-            </a:r>
-          </a:p>
-        </p:txBody>
-      </p:sp>
-      <p:sp>
-        <p:nvSpPr>
-          <p:cNvPr id="7" name="Rounded Rectangle 6"/>
+              <a:defRPr sz="850">
+                <a:solidFill>
+                  <a:srgbClr val="475569"/>
+                </a:solidFill>
+              </a:defRPr>
+            </a:pPr>
+            <a:r>
+              <a:t>Registro horario de perfusiones, dosis de carga e intervalos administrados.</a:t>
+            </a:r>
+          </a:p>
+        </p:txBody>
+      </p:sp>
+      <p:sp>
+        <p:nvSpPr>
+          <p:cNvPr id="8" name="Rounded Rectangle 7"/>
           <p:cNvSpPr/>
           <p:nvPr/>
         </p:nvSpPr>
         <p:spPr>
           <a:xfrm>
+            <a:off x="3529584" y="1892808"/>
+            <a:ext cx="54864" cy="1243584"/>
+          </a:xfrm>
+          <a:prstGeom prst="roundRect">
+            <a:avLst/>
+          </a:prstGeom>
+          <a:solidFill>
+            <a:srgbClr val="2563EB"/>
+          </a:solidFill>
+          <a:ln>
+            <a:noFill/>
+          </a:ln>
+        </p:spPr>
+        <p:style>
+          <a:lnRef idx="1">
+            <a:schemeClr val="accent1"/>
+          </a:lnRef>
+          <a:fillRef idx="3">
+            <a:schemeClr val="accent1"/>
+          </a:fillRef>
+          <a:effectRef idx="2">
+            <a:schemeClr val="accent1"/>
+          </a:effectRef>
+          <a:fontRef idx="minor">
+            <a:schemeClr val="lt1"/>
+          </a:fontRef>
+        </p:style>
+        <p:txBody>
+          <a:bodyPr rtlCol="0" anchor="ctr"/>
+          <a:lstStyle/>
+          <a:p>
+            <a:pPr algn="ctr"/>
+          </a:p>
+        </p:txBody>
+      </p:sp>
+      <p:sp>
+        <p:nvSpPr>
+          <p:cNvPr id="9" name="Rounded Rectangle 8"/>
+          <p:cNvSpPr/>
+          <p:nvPr/>
+        </p:nvSpPr>
+        <p:spPr>
+          <a:xfrm>
             <a:off x="6181344" y="1783080"/>
-            <a:ext cx="2542032" cy="4389120"/>
+            <a:ext cx="2542032" cy="1463040"/>
           </a:xfrm>
           <a:prstGeom prst="roundRect">
             <a:avLst/>
           </a:prstGeom>
           <a:solidFill>
-            <a:srgbClr val="FFFFFF"/>
+            <a:srgbClr val="F8FAFC"/>
           </a:solidFill>
           <a:ln w="12700">
             <a:solidFill>
@@ -8029,71 +10185,93 @@
           </a:fontRef>
         </p:style>
         <p:txBody>
-          <a:bodyPr rtlCol="0" anchor="ctr" lIns="201168" tIns="201168" rIns="164592"/>
+          <a:bodyPr rtlCol="0" anchor="ctr" lIns="182880" tIns="109728"/>
           <a:lstStyle/>
           <a:p>
             <a:pPr algn="ctr">
-              <a:defRPr sz="1100" b="1">
+              <a:defRPr b="1" sz="950">
                 <a:solidFill>
                   <a:srgbClr val="D97706"/>
                 </a:solidFill>
               </a:defRPr>
             </a:pPr>
             <a:r>
-              <a:t>PASO 03</a:t>
+              <a:t>PASO 03 · NIVEL TDM (LAB)</a:t>
             </a:r>
           </a:p>
           <a:p>
             <a:pPr>
-              <a:spcBef>
-                <a:spcPts val="400"/>
-              </a:spcBef>
-              <a:spcAft>
-                <a:spcPts val="1200"/>
-              </a:spcAft>
-              <a:defRPr sz="1400" b="1">
-                <a:solidFill>
-                  <a:srgbClr val="0F172A"/>
-                </a:solidFill>
-              </a:defRPr>
-            </a:pPr>
-            <a:r>
-              <a:t>Ajuste Bayesiano Instantáneo</a:t>
-            </a:r>
-          </a:p>
-          <a:p>
-            <a:pPr>
-              <a:lnSpc>
-                <a:spcPct val="120000"/>
-              </a:lnSpc>
-              <a:defRPr sz="1100">
-                <a:solidFill>
-                  <a:srgbClr val="64748B"/>
-                </a:solidFill>
-              </a:defRPr>
-            </a:pPr>
-            <a:r>
-              <a:t>Cálculo en &lt; 25 ms. Visualización de la curva individual, aclaramiento propio, Vd real y AUC24 proyectado.</a:t>
-            </a:r>
-          </a:p>
-        </p:txBody>
-      </p:sp>
-      <p:sp>
-        <p:nvSpPr>
-          <p:cNvPr id="8" name="Rounded Rectangle 7"/>
+              <a:defRPr sz="850">
+                <a:solidFill>
+                  <a:srgbClr val="475569"/>
+                </a:solidFill>
+              </a:defRPr>
+            </a:pPr>
+            <a:r>
+              <a:t>Concentración plasmática medida, hora de extracción y error del ensayo.</a:t>
+            </a:r>
+          </a:p>
+        </p:txBody>
+      </p:sp>
+      <p:sp>
+        <p:nvSpPr>
+          <p:cNvPr id="10" name="Rounded Rectangle 9"/>
           <p:cNvSpPr/>
           <p:nvPr/>
         </p:nvSpPr>
         <p:spPr>
           <a:xfrm>
+            <a:off x="6254496" y="1892808"/>
+            <a:ext cx="54864" cy="1243584"/>
+          </a:xfrm>
+          <a:prstGeom prst="roundRect">
+            <a:avLst/>
+          </a:prstGeom>
+          <a:solidFill>
+            <a:srgbClr val="D97706"/>
+          </a:solidFill>
+          <a:ln>
+            <a:noFill/>
+          </a:ln>
+        </p:spPr>
+        <p:style>
+          <a:lnRef idx="1">
+            <a:schemeClr val="accent1"/>
+          </a:lnRef>
+          <a:fillRef idx="3">
+            <a:schemeClr val="accent1"/>
+          </a:fillRef>
+          <a:effectRef idx="2">
+            <a:schemeClr val="accent1"/>
+          </a:effectRef>
+          <a:fontRef idx="minor">
+            <a:schemeClr val="lt1"/>
+          </a:fontRef>
+        </p:style>
+        <p:txBody>
+          <a:bodyPr rtlCol="0" anchor="ctr"/>
+          <a:lstStyle/>
+          <a:p>
+            <a:pPr algn="ctr"/>
+          </a:p>
+        </p:txBody>
+      </p:sp>
+      <p:sp>
+        <p:nvSpPr>
+          <p:cNvPr id="11" name="Rounded Rectangle 10"/>
+          <p:cNvSpPr/>
+          <p:nvPr/>
+        </p:nvSpPr>
+        <p:spPr>
+          <a:xfrm>
             <a:off x="8906256" y="1783080"/>
-            <a:ext cx="2542032" cy="4389120"/>
+            <a:ext cx="2542032" cy="1463040"/>
           </a:xfrm>
           <a:prstGeom prst="roundRect">
             <a:avLst/>
           </a:prstGeom>
           <a:solidFill>
-            <a:srgbClr val="FFFFFF"/>
+            <a:srgbClr val="F8FAFC"/>
           </a:solidFill>
           <a:ln w="12700">
             <a:solidFill>
@@ -8116,64 +10294,86 @@
           </a:fontRef>
         </p:style>
         <p:txBody>
-          <a:bodyPr rtlCol="0" anchor="ctr" lIns="201168" tIns="201168" rIns="164592"/>
+          <a:bodyPr rtlCol="0" anchor="ctr" lIns="182880" tIns="109728"/>
           <a:lstStyle/>
           <a:p>
             <a:pPr algn="ctr">
-              <a:defRPr sz="1100" b="1">
-                <a:solidFill>
-                  <a:srgbClr val="6366F1"/>
-                </a:solidFill>
-              </a:defRPr>
-            </a:pPr>
-            <a:r>
-              <a:t>PASO 04</a:t>
+              <a:defRPr b="1" sz="950">
+                <a:solidFill>
+                  <a:srgbClr val="059669"/>
+                </a:solidFill>
+              </a:defRPr>
+            </a:pPr>
+            <a:r>
+              <a:t>PASO 04 · REPORTE &amp; RECOMENDACIÓN</a:t>
             </a:r>
           </a:p>
           <a:p>
             <a:pPr>
-              <a:spcBef>
-                <a:spcPts val="400"/>
-              </a:spcBef>
-              <a:spcAft>
-                <a:spcPts val="1200"/>
-              </a:spcAft>
-              <a:defRPr sz="1400" b="1">
-                <a:solidFill>
-                  <a:srgbClr val="0F172A"/>
-                </a:solidFill>
-              </a:defRPr>
-            </a:pPr>
-            <a:r>
-              <a:t>Simulación &amp; Recomendación</a:t>
-            </a:r>
-          </a:p>
-          <a:p>
-            <a:pPr>
-              <a:lnSpc>
-                <a:spcPct val="120000"/>
-              </a:lnSpc>
-              <a:defRPr sz="1100">
-                <a:solidFill>
-                  <a:srgbClr val="64748B"/>
-                </a:solidFill>
-              </a:defRPr>
-            </a:pPr>
-            <a:r>
-              <a:t>Comparador de regímenes alternativos. Selección de la dosis con PTA &gt; 90% y exportación del informe PDF.</a:t>
-            </a:r>
-          </a:p>
-        </p:txBody>
-      </p:sp>
-      <p:sp>
-        <p:nvSpPr>
-          <p:cNvPr id="9" name="TextBox 8"/>
+              <a:defRPr sz="850">
+                <a:solidFill>
+                  <a:srgbClr val="475569"/>
+                </a:solidFill>
+              </a:defRPr>
+            </a:pPr>
+            <a:r>
+              <a:t>Inferencia MAP instantánea, AUC estimada y sugerencia posológica para EHR.</a:t>
+            </a:r>
+          </a:p>
+        </p:txBody>
+      </p:sp>
+      <p:sp>
+        <p:nvSpPr>
+          <p:cNvPr id="12" name="Rounded Rectangle 11"/>
+          <p:cNvSpPr/>
+          <p:nvPr/>
+        </p:nvSpPr>
+        <p:spPr>
+          <a:xfrm>
+            <a:off x="8979408" y="1892808"/>
+            <a:ext cx="54864" cy="1243584"/>
+          </a:xfrm>
+          <a:prstGeom prst="roundRect">
+            <a:avLst/>
+          </a:prstGeom>
+          <a:solidFill>
+            <a:srgbClr val="059669"/>
+          </a:solidFill>
+          <a:ln>
+            <a:noFill/>
+          </a:ln>
+        </p:spPr>
+        <p:style>
+          <a:lnRef idx="1">
+            <a:schemeClr val="accent1"/>
+          </a:lnRef>
+          <a:fillRef idx="3">
+            <a:schemeClr val="accent1"/>
+          </a:fillRef>
+          <a:effectRef idx="2">
+            <a:schemeClr val="accent1"/>
+          </a:effectRef>
+          <a:fontRef idx="minor">
+            <a:schemeClr val="lt1"/>
+          </a:fontRef>
+        </p:style>
+        <p:txBody>
+          <a:bodyPr rtlCol="0" anchor="ctr"/>
+          <a:lstStyle/>
+          <a:p>
+            <a:pPr algn="ctr"/>
+          </a:p>
+        </p:txBody>
+      </p:sp>
+      <p:sp>
+        <p:nvSpPr>
+          <p:cNvPr id="13" name="TextBox 12"/>
           <p:cNvSpPr txBox="1"/>
           <p:nvPr/>
         </p:nvSpPr>
         <p:spPr>
           <a:xfrm>
-            <a:off x="731520" y="6400800"/>
+            <a:off x="731520" y="6437376"/>
             <a:ext cx="10725912" cy="274320"/>
           </a:xfrm>
           <a:prstGeom prst="rect">
@@ -8190,12 +10390,12 @@
             <a:pPr>
               <a:defRPr sz="850">
                 <a:solidFill>
-                  <a:srgbClr val="94A3B8"/>
-                </a:solidFill>
-              </a:defRPr>
-            </a:pPr>
-            <a:r>
-              <a:t>PK-Bayes · Decision Support System CDSS v3.2                                                Documento Institucional Clínico                                                06 / 14</a:t>
+                  <a:srgbClr val="64748B"/>
+                </a:solidFill>
+              </a:defRPr>
+            </a:pPr>
+            <a:r>
+              <a:t>PK-Bayes · CDSS v3.2 · Soporte a la Decisión Clínica Farmacocinética                       Confidencial · Uso Hospitalario Institucional                       06 / 14</a:t>
             </a:r>
           </a:p>
         </p:txBody>
@@ -8214,7 +10414,7 @@
     <p:bg>
       <p:bgPr>
         <a:solidFill>
-          <a:srgbClr val="F8FAFC"/>
+          <a:srgbClr val="FFFFFF"/>
         </a:solidFill>
         <a:effectLst/>
       </p:bgPr>
@@ -8234,8 +10434,8 @@
         </p:nvSpPr>
         <p:spPr>
           <a:xfrm>
-            <a:off x="731520" y="438912"/>
-            <a:ext cx="5486400" cy="320040"/>
+            <a:off x="731520" y="384048"/>
+            <a:ext cx="6858000" cy="292608"/>
           </a:xfrm>
           <a:prstGeom prst="rect">
             <a:avLst/>
@@ -8249,7 +10449,7 @@
           <a:lstStyle/>
           <a:p>
             <a:pPr>
-              <a:defRPr sz="950" b="1">
+              <a:defRPr sz="900" b="1">
                 <a:solidFill>
                   <a:srgbClr val="0284C7"/>
                 </a:solidFill>
@@ -8269,8 +10469,8 @@
         </p:nvSpPr>
         <p:spPr>
           <a:xfrm>
-            <a:off x="731520" y="713232"/>
-            <a:ext cx="10698480" cy="594360"/>
+            <a:off x="731520" y="676656"/>
+            <a:ext cx="10698480" cy="548640"/>
           </a:xfrm>
           <a:prstGeom prst="rect">
             <a:avLst/>
@@ -8284,14 +10484,14 @@
           <a:lstStyle/>
           <a:p>
             <a:pPr>
-              <a:defRPr sz="2200" b="1">
+              <a:defRPr sz="2100" b="1">
                 <a:solidFill>
                   <a:srgbClr val="0F172A"/>
                 </a:solidFill>
               </a:defRPr>
             </a:pPr>
             <a:r>
-              <a:t>Telemetría Farmacocinética de Alta Resolución</a:t>
+              <a:t>Curvas Farmacocinéticas Interactivas y Ventana Terapéutica</a:t>
             </a:r>
           </a:p>
         </p:txBody>
@@ -8304,8 +10504,8 @@
         </p:nvSpPr>
         <p:spPr>
           <a:xfrm>
-            <a:off x="731520" y="1298448"/>
-            <a:ext cx="10698480" cy="411480"/>
+            <a:off x="731520" y="1243584"/>
+            <a:ext cx="10698480" cy="384048"/>
           </a:xfrm>
           <a:prstGeom prst="rect">
             <a:avLst/>
@@ -8319,14 +10519,14 @@
           <a:lstStyle/>
           <a:p>
             <a:pPr>
-              <a:defRPr sz="1200">
-                <a:solidFill>
-                  <a:srgbClr val="64748B"/>
-                </a:solidFill>
-              </a:defRPr>
-            </a:pPr>
-            <a:r>
-              <a:t>Curvas interactivas, intervalos de credibilidad del 95% y diales semafóricos de riesgo en una sola vista.</a:t>
+              <a:defRPr sz="1150">
+                <a:solidFill>
+                  <a:srgbClr val="475569"/>
+                </a:solidFill>
+              </a:defRPr>
+            </a:pPr>
+            <a:r>
+              <a:t>Visualización continua de concentración plasmática en función del tiempo C(t) con intervalos de credibilidad del 95%.</a:t>
             </a:r>
           </a:p>
         </p:txBody>
@@ -8340,7 +10540,7 @@
         <p:spPr>
           <a:xfrm>
             <a:off x="676656" y="1728216"/>
-            <a:ext cx="6327648" cy="4498848"/>
+            <a:ext cx="5596128" cy="4498848"/>
           </a:xfrm>
           <a:prstGeom prst="roundRect">
             <a:avLst/>
@@ -8378,7 +10578,7 @@
       </p:sp>
       <p:pic>
         <p:nvPicPr>
-          <p:cNvPr id="6" name="Picture 5" descr="01-dashboard.png"/>
+          <p:cNvPr id="6" name="Picture 5" descr="pk_curve_therapeutic_target.png"/>
           <p:cNvPicPr>
             <a:picLocks noChangeAspect="1"/>
           </p:cNvPicPr>
@@ -8393,7 +10593,7 @@
         <p:spPr>
           <a:xfrm>
             <a:off x="731520" y="1783080"/>
-            <a:ext cx="6217920" cy="4389120"/>
+            <a:ext cx="5486400" cy="4389120"/>
           </a:xfrm>
           <a:prstGeom prst="rect">
             <a:avLst/>
@@ -8402,176 +10602,14 @@
       </p:pic>
       <p:sp>
         <p:nvSpPr>
-          <p:cNvPr id="7" name="Rounded Rectangle 6"/>
-          <p:cNvSpPr/>
-          <p:nvPr/>
-        </p:nvSpPr>
-        <p:spPr>
-          <a:xfrm>
-            <a:off x="7132320" y="1783080"/>
-            <a:ext cx="4297680" cy="4389120"/>
-          </a:xfrm>
-          <a:prstGeom prst="roundRect">
-            <a:avLst/>
-          </a:prstGeom>
-          <a:solidFill>
-            <a:srgbClr val="FFFFFF"/>
-          </a:solidFill>
-          <a:ln w="12700">
-            <a:solidFill>
-              <a:srgbClr val="E2E8F0"/>
-            </a:solidFill>
-          </a:ln>
-        </p:spPr>
-        <p:style>
-          <a:lnRef idx="1">
-            <a:schemeClr val="accent1"/>
-          </a:lnRef>
-          <a:fillRef idx="3">
-            <a:schemeClr val="accent1"/>
-          </a:fillRef>
-          <a:effectRef idx="2">
-            <a:schemeClr val="accent1"/>
-          </a:effectRef>
-          <a:fontRef idx="minor">
-            <a:schemeClr val="lt1"/>
-          </a:fontRef>
-        </p:style>
-        <p:txBody>
-          <a:bodyPr rtlCol="0" anchor="ctr" lIns="228600" tIns="228600" rIns="182880"/>
-          <a:lstStyle/>
-          <a:p>
-            <a:pPr algn="ctr">
-              <a:defRPr sz="1050" b="1">
-                <a:solidFill>
-                  <a:srgbClr val="0284C7"/>
-                </a:solidFill>
-              </a:defRPr>
-            </a:pPr>
-            <a:r>
-              <a:t>INDICADORES EN TIEMPO REAL</a:t>
-            </a:r>
-          </a:p>
-          <a:p>
-            <a:pPr>
-              <a:spcBef>
-                <a:spcPts val="800"/>
-              </a:spcBef>
-              <a:defRPr sz="1150" b="1">
-                <a:solidFill>
-                  <a:srgbClr val="0F172A"/>
-                </a:solidFill>
-              </a:defRPr>
-            </a:pPr>
-            <a:r>
-              <a:t>Curva PK Individual vs. Poblacional</a:t>
-            </a:r>
-          </a:p>
-          <a:p>
-            <a:pPr>
-              <a:defRPr sz="1000">
-                <a:solidFill>
-                  <a:srgbClr val="64748B"/>
-                </a:solidFill>
-              </a:defRPr>
-            </a:pPr>
-            <a:r>
-              <a:t>Contraste visual inmediato entre lo esperado estadísticamente y el perfil cinético real ajustado al paciente.</a:t>
-            </a:r>
-          </a:p>
-          <a:p>
-            <a:pPr>
-              <a:spcBef>
-                <a:spcPts val="800"/>
-              </a:spcBef>
-              <a:defRPr sz="1150" b="1">
-                <a:solidFill>
-                  <a:srgbClr val="0F172A"/>
-                </a:solidFill>
-              </a:defRPr>
-            </a:pPr>
-            <a:r>
-              <a:t>Bandas de Incertidumbre Bayesiana</a:t>
-            </a:r>
-          </a:p>
-          <a:p>
-            <a:pPr>
-              <a:defRPr sz="1000">
-                <a:solidFill>
-                  <a:srgbClr val="64748B"/>
-                </a:solidFill>
-              </a:defRPr>
-            </a:pPr>
-            <a:r>
-              <a:t>Intervalos del 95% que muestran la dispersión y certeza estadística de la predicción en cada hora del intervalo.</a:t>
-            </a:r>
-          </a:p>
-          <a:p>
-            <a:pPr>
-              <a:spcBef>
-                <a:spcPts val="800"/>
-              </a:spcBef>
-              <a:defRPr sz="1150" b="1">
-                <a:solidFill>
-                  <a:srgbClr val="0F172A"/>
-                </a:solidFill>
-              </a:defRPr>
-            </a:pPr>
-            <a:r>
-              <a:t>Diales Semafóricos de Seguridad</a:t>
-            </a:r>
-          </a:p>
-          <a:p>
-            <a:pPr>
-              <a:defRPr sz="1000">
-                <a:solidFill>
-                  <a:srgbClr val="64748B"/>
-                </a:solidFill>
-              </a:defRPr>
-            </a:pPr>
-            <a:r>
-              <a:t>Evaluación instantánea de probabilidad de éxito (PTA) y banderas de alarma ante riesgo de sobreexposición o acumulación.</a:t>
-            </a:r>
-          </a:p>
-          <a:p>
-            <a:pPr>
-              <a:spcBef>
-                <a:spcPts val="800"/>
-              </a:spcBef>
-              <a:defRPr sz="1150" b="1">
-                <a:solidFill>
-                  <a:srgbClr val="0F172A"/>
-                </a:solidFill>
-              </a:defRPr>
-            </a:pPr>
-            <a:r>
-              <a:t>Exportación de Reporte para Ficha Clínica</a:t>
-            </a:r>
-          </a:p>
-          <a:p>
-            <a:pPr>
-              <a:defRPr sz="1000">
-                <a:solidFill>
-                  <a:srgbClr val="64748B"/>
-                </a:solidFill>
-              </a:defRPr>
-            </a:pPr>
-            <a:r>
-              <a:t>Generación de informe en PDF estandarizado con parámetros farmacocinéticos, firma profesional y trazabilidad legal.</a:t>
-            </a:r>
-          </a:p>
-        </p:txBody>
-      </p:sp>
-      <p:sp>
-        <p:nvSpPr>
-          <p:cNvPr id="8" name="TextBox 7"/>
+          <p:cNvPr id="7" name="TextBox 6"/>
           <p:cNvSpPr txBox="1"/>
           <p:nvPr/>
         </p:nvSpPr>
         <p:spPr>
           <a:xfrm>
-            <a:off x="731520" y="6400800"/>
-            <a:ext cx="10725912" cy="274320"/>
+            <a:off x="731520" y="6227064"/>
+            <a:ext cx="5486400" cy="228600"/>
           </a:xfrm>
           <a:prstGeom prst="rect">
             <a:avLst/>
@@ -8584,15 +10622,50 @@
           </a:bodyPr>
           <a:lstStyle/>
           <a:p>
+            <a:pPr algn="ctr">
+              <a:defRPr sz="800">
+                <a:solidFill>
+                  <a:srgbClr val="64748B"/>
+                </a:solidFill>
+              </a:defRPr>
+            </a:pPr>
+            <a:r>
+              <a:t>Figura 7: Curva C(t) individualizada: ventana verde (diana), línea roja (toxicidad) y puntos TDM medidos.</a:t>
+            </a:r>
+          </a:p>
+        </p:txBody>
+      </p:sp>
+      <p:sp>
+        <p:nvSpPr>
+          <p:cNvPr id="8" name="TextBox 7"/>
+          <p:cNvSpPr txBox="1"/>
+          <p:nvPr/>
+        </p:nvSpPr>
+        <p:spPr>
+          <a:xfrm>
+            <a:off x="731520" y="6437376"/>
+            <a:ext cx="10725912" cy="274320"/>
+          </a:xfrm>
+          <a:prstGeom prst="rect">
+            <a:avLst/>
+          </a:prstGeom>
+          <a:noFill/>
+        </p:spPr>
+        <p:txBody>
+          <a:bodyPr wrap="none" lIns="0" tIns="0" rIns="0" bIns="0">
+            <a:spAutoFit/>
+          </a:bodyPr>
+          <a:lstStyle/>
+          <a:p>
             <a:pPr>
               <a:defRPr sz="850">
                 <a:solidFill>
-                  <a:srgbClr val="94A3B8"/>
-                </a:solidFill>
-              </a:defRPr>
-            </a:pPr>
-            <a:r>
-              <a:t>PK-Bayes · Decision Support System CDSS v3.2                                                Documento Institucional Clínico                                                07 / 14</a:t>
+                  <a:srgbClr val="64748B"/>
+                </a:solidFill>
+              </a:defRPr>
+            </a:pPr>
+            <a:r>
+              <a:t>PK-Bayes · CDSS v3.2 · Soporte a la Decisión Clínica Farmacocinética                       Confidencial · Uso Hospitalario Institucional                       07 / 14</a:t>
             </a:r>
           </a:p>
         </p:txBody>
@@ -8611,7 +10684,7 @@
     <p:bg>
       <p:bgPr>
         <a:solidFill>
-          <a:srgbClr val="F8FAFC"/>
+          <a:srgbClr val="FFFFFF"/>
         </a:solidFill>
         <a:effectLst/>
       </p:bgPr>
@@ -8631,8 +10704,8 @@
         </p:nvSpPr>
         <p:spPr>
           <a:xfrm>
-            <a:off x="731520" y="438912"/>
-            <a:ext cx="5486400" cy="320040"/>
+            <a:off x="731520" y="384048"/>
+            <a:ext cx="6858000" cy="292608"/>
           </a:xfrm>
           <a:prstGeom prst="rect">
             <a:avLst/>
@@ -8646,14 +10719,14 @@
           <a:lstStyle/>
           <a:p>
             <a:pPr>
-              <a:defRPr sz="950" b="1">
+              <a:defRPr sz="900" b="1">
                 <a:solidFill>
                   <a:srgbClr val="0284C7"/>
                 </a:solidFill>
               </a:defRPr>
             </a:pPr>
             <a:r>
-              <a:t>HERRAMIENTA DE SIMULACIÓN POSOLÓGICA</a:t>
+              <a:t>SIMULACIÓN POSOLÓGICA PREDICTIVA</a:t>
             </a:r>
           </a:p>
         </p:txBody>
@@ -8666,8 +10739,8 @@
         </p:nvSpPr>
         <p:spPr>
           <a:xfrm>
-            <a:off x="731520" y="713232"/>
-            <a:ext cx="10698480" cy="594360"/>
+            <a:off x="731520" y="676656"/>
+            <a:ext cx="10698480" cy="548640"/>
           </a:xfrm>
           <a:prstGeom prst="rect">
             <a:avLst/>
@@ -8681,14 +10754,14 @@
           <a:lstStyle/>
           <a:p>
             <a:pPr>
-              <a:defRPr sz="2200" b="1">
+              <a:defRPr sz="2100" b="1">
                 <a:solidFill>
                   <a:srgbClr val="0F172A"/>
                 </a:solidFill>
               </a:defRPr>
             </a:pPr>
             <a:r>
-              <a:t>Comparación de Regímenes Terapéuticos Alternativos</a:t>
+              <a:t>Comparación Simulada de Regímenes Alternativos</a:t>
             </a:r>
           </a:p>
         </p:txBody>
@@ -8701,8 +10774,8 @@
         </p:nvSpPr>
         <p:spPr>
           <a:xfrm>
-            <a:off x="731520" y="1298448"/>
-            <a:ext cx="10698480" cy="411480"/>
+            <a:off x="731520" y="1243584"/>
+            <a:ext cx="10698480" cy="384048"/>
           </a:xfrm>
           <a:prstGeom prst="rect">
             <a:avLst/>
@@ -8716,14 +10789,14 @@
           <a:lstStyle/>
           <a:p>
             <a:pPr>
-              <a:defRPr sz="1200">
-                <a:solidFill>
-                  <a:srgbClr val="64748B"/>
-                </a:solidFill>
-              </a:defRPr>
-            </a:pPr>
-            <a:r>
-              <a:t>Explore múltiples dosis, intervalos e infusiones continuas antes de redactar la indicación médica definitiva.</a:t>
+              <a:defRPr sz="1150">
+                <a:solidFill>
+                  <a:srgbClr val="475569"/>
+                </a:solidFill>
+              </a:defRPr>
+            </a:pPr>
+            <a:r>
+              <a:t>Evaluación 'what-if' en tiempo real: explore múltiples dosis e intervalos antes de administrar el fármaco.</a:t>
             </a:r>
           </a:p>
         </p:txBody>
@@ -8736,14 +10809,14 @@
         </p:nvSpPr>
         <p:spPr>
           <a:xfrm>
-            <a:off x="731520" y="1783080"/>
-            <a:ext cx="4754880" cy="4389120"/>
+            <a:off x="6400800" y="1783080"/>
+            <a:ext cx="5059375" cy="4389120"/>
           </a:xfrm>
           <a:prstGeom prst="roundRect">
             <a:avLst/>
           </a:prstGeom>
           <a:solidFill>
-            <a:srgbClr val="FFFFFF"/>
+            <a:srgbClr val="F8FAFC"/>
           </a:solidFill>
           <a:ln w="12700">
             <a:solidFill>
@@ -8766,208 +10839,130 @@
           </a:fontRef>
         </p:style>
         <p:txBody>
-          <a:bodyPr rtlCol="0" anchor="ctr" lIns="228600" tIns="228600" rIns="182880"/>
+          <a:bodyPr rtlCol="0" anchor="ctr" lIns="228600" tIns="182880"/>
           <a:lstStyle/>
           <a:p>
             <a:pPr algn="ctr">
-              <a:defRPr sz="1100" b="1">
+              <a:defRPr b="1" sz="1100">
+                <a:solidFill>
+                  <a:srgbClr val="0284C7"/>
+                </a:solidFill>
+              </a:defRPr>
+            </a:pPr>
+            <a:r>
+              <a:t>COMPARACIÓN DE REGÍMENES EVALUADOS</a:t>
+            </a:r>
+          </a:p>
+          <a:p>
+            <a:br/>
+            <a:pPr>
+              <a:defRPr b="1" sz="950">
+                <a:solidFill>
+                  <a:srgbClr val="DC2626"/>
+                </a:solidFill>
+              </a:defRPr>
+            </a:pPr>
+            <a:r>
+              <a:t>Régimen A (Estándar Hospitalario)</a:t>
+            </a:r>
+          </a:p>
+          <a:p>
+            <a:pPr>
+              <a:defRPr sz="850">
+                <a:solidFill>
+                  <a:srgbClr val="475569"/>
+                </a:solidFill>
+              </a:defRPr>
+            </a:pPr>
+            <a:r>
+              <a:t>• Posología: 1000 mg cada 12 horas (Perfusión 1h)</a:t>
+            </a:r>
+            <a:br/>
+            <a:r>
+              <a:t>• Exposición: AUC24: 340 mg·h/L (Subterapéutico - 42% fallo)</a:t>
+            </a:r>
+            <a:br/>
+            <a:r>
+              <a:t>• Parámetros: Cvalle: 11.2 µg/mL  ·  Riesgo toxicidad: &lt; 3%</a:t>
+            </a:r>
+          </a:p>
+          <a:p>
+            <a:br/>
+            <a:pPr>
+              <a:defRPr b="1" sz="950">
+                <a:solidFill>
+                  <a:srgbClr val="D97706"/>
+                </a:solidFill>
+              </a:defRPr>
+            </a:pPr>
+            <a:r>
+              <a:t>Régimen B (Ajuste Empírico)</a:t>
+            </a:r>
+          </a:p>
+          <a:p>
+            <a:pPr>
+              <a:defRPr sz="850">
+                <a:solidFill>
+                  <a:srgbClr val="475569"/>
+                </a:solidFill>
+              </a:defRPr>
+            </a:pPr>
+            <a:r>
+              <a:t>• Posología: 1500 mg cada 12 horas (Perfusión 1.5h)</a:t>
+            </a:r>
+            <a:br/>
+            <a:r>
+              <a:t>• Exposición: AUC24: 670 mg·h/L (Supraterapéutico - Alto riesgo)</a:t>
+            </a:r>
+            <a:br/>
+            <a:r>
+              <a:t>• Parámetros: Cvalle: 24.5 µg/mL  ·  Riesgo nefrotoxicidad: 38%</a:t>
+            </a:r>
+          </a:p>
+          <a:p>
+            <a:br/>
+            <a:pPr>
+              <a:defRPr b="1" sz="950">
                 <a:solidFill>
                   <a:srgbClr val="059669"/>
                 </a:solidFill>
               </a:defRPr>
             </a:pPr>
             <a:r>
-              <a:t>¿CÓMO APOYA LA DECISIÓN MÉDICA?</a:t>
+              <a:t>Régimen C (Optimizado PK-Bayes)</a:t>
             </a:r>
           </a:p>
           <a:p>
             <a:pPr>
-              <a:spcBef>
-                <a:spcPts val="800"/>
-              </a:spcBef>
-              <a:defRPr sz="1150" b="1">
-                <a:solidFill>
-                  <a:srgbClr val="0F172A"/>
-                </a:solidFill>
-              </a:defRPr>
-            </a:pPr>
-            <a:r>
-              <a:t>Simulación de Escenarios en Paralelo</a:t>
-            </a:r>
-          </a:p>
-          <a:p>
-            <a:pPr>
-              <a:defRPr sz="1000">
-                <a:solidFill>
-                  <a:srgbClr val="64748B"/>
-                </a:solidFill>
-              </a:defRPr>
-            </a:pPr>
-            <a:r>
-              <a:t>Compare en una misma pantalla: 1000 mg c/12h vs. 1500 mg c/24h vs. infusión continua de 2000 mg/día.</a:t>
-            </a:r>
-          </a:p>
-          <a:p>
-            <a:pPr>
-              <a:spcBef>
-                <a:spcPts val="800"/>
-              </a:spcBef>
-              <a:defRPr sz="1150" b="1">
-                <a:solidFill>
-                  <a:srgbClr val="0F172A"/>
-                </a:solidFill>
-              </a:defRPr>
-            </a:pPr>
-            <a:r>
-              <a:t>Cálculo Preciso de AUC24 en Estado Estacionario</a:t>
-            </a:r>
-          </a:p>
-          <a:p>
-            <a:pPr>
-              <a:defRPr sz="1000">
-                <a:solidFill>
-                  <a:srgbClr val="64748B"/>
-                </a:solidFill>
-              </a:defRPr>
-            </a:pPr>
-            <a:r>
-              <a:t>Proyecta si el régimen alcanzará la ventana diana (400–600 mg·h/L) sin superar niveles de seguridad renal.</a:t>
-            </a:r>
-          </a:p>
-          <a:p>
-            <a:pPr>
-              <a:spcBef>
-                <a:spcPts val="800"/>
-              </a:spcBef>
-              <a:defRPr sz="1150" b="1">
-                <a:solidFill>
-                  <a:srgbClr val="0F172A"/>
-                </a:solidFill>
-              </a:defRPr>
-            </a:pPr>
-            <a:r>
-              <a:t>Ajuste por Cambios Fisiológicos Esperados</a:t>
-            </a:r>
-          </a:p>
-          <a:p>
-            <a:pPr>
-              <a:defRPr sz="1000">
-                <a:solidFill>
-                  <a:srgbClr val="64748B"/>
-                </a:solidFill>
-              </a:defRPr>
-            </a:pPr>
-            <a:r>
-              <a:t>Simule el impacto de un cambio en la función renal previsto para las próximas 24h (por ejemplo, suspensión de TCRR).</a:t>
-            </a:r>
-          </a:p>
-          <a:p>
-            <a:pPr>
-              <a:spcBef>
-                <a:spcPts val="800"/>
-              </a:spcBef>
-              <a:defRPr sz="1150" b="1">
-                <a:solidFill>
-                  <a:srgbClr val="0F172A"/>
-                </a:solidFill>
-              </a:defRPr>
-            </a:pPr>
-            <a:r>
-              <a:t>Reducción de Ensayo y Error Clínico</a:t>
-            </a:r>
-          </a:p>
-          <a:p>
-            <a:pPr>
-              <a:defRPr sz="1000">
-                <a:solidFill>
-                  <a:srgbClr val="64748B"/>
-                </a:solidFill>
-              </a:defRPr>
-            </a:pPr>
-            <a:r>
-              <a:t>Elimina la necesidad de esperar varias dosis para comprobar empíricamente si el ajuste fue correcto.</a:t>
-            </a:r>
-          </a:p>
-        </p:txBody>
-      </p:sp>
-      <p:sp>
-        <p:nvSpPr>
-          <p:cNvPr id="6" name="Rounded Rectangle 5"/>
-          <p:cNvSpPr/>
-          <p:nvPr/>
-        </p:nvSpPr>
-        <p:spPr>
-          <a:xfrm>
-            <a:off x="5705856" y="1728216"/>
-            <a:ext cx="5779008" cy="4498848"/>
-          </a:xfrm>
-          <a:prstGeom prst="roundRect">
-            <a:avLst/>
-          </a:prstGeom>
-          <a:solidFill>
-            <a:srgbClr val="F1F5F9"/>
-          </a:solidFill>
-          <a:ln w="12700">
-            <a:solidFill>
-              <a:srgbClr val="E2E8F0"/>
-            </a:solidFill>
-          </a:ln>
-        </p:spPr>
-        <p:style>
-          <a:lnRef idx="1">
-            <a:schemeClr val="accent1"/>
-          </a:lnRef>
-          <a:fillRef idx="3">
-            <a:schemeClr val="accent1"/>
-          </a:fillRef>
-          <a:effectRef idx="2">
-            <a:schemeClr val="accent1"/>
-          </a:effectRef>
-          <a:fontRef idx="minor">
-            <a:schemeClr val="lt1"/>
-          </a:fontRef>
-        </p:style>
-        <p:txBody>
-          <a:bodyPr rtlCol="0" anchor="ctr"/>
-          <a:lstStyle/>
-          <a:p>
-            <a:pPr algn="ctr"/>
-          </a:p>
-        </p:txBody>
-      </p:sp>
-      <p:pic>
-        <p:nvPicPr>
-          <p:cNvPr id="7" name="Picture 6" descr="04-simulacion.png"/>
-          <p:cNvPicPr>
-            <a:picLocks noChangeAspect="1"/>
-          </p:cNvPicPr>
-          <p:nvPr/>
-        </p:nvPicPr>
-        <p:blipFill>
-          <a:blip r:embed="rId2"/>
-          <a:stretch>
-            <a:fillRect/>
-          </a:stretch>
-        </p:blipFill>
-        <p:spPr>
-          <a:xfrm>
-            <a:off x="5760720" y="1783080"/>
-            <a:ext cx="5669280" cy="4389120"/>
-          </a:xfrm>
-          <a:prstGeom prst="rect">
-            <a:avLst/>
-          </a:prstGeom>
-        </p:spPr>
-      </p:pic>
-      <p:sp>
-        <p:nvSpPr>
-          <p:cNvPr id="8" name="TextBox 7"/>
+              <a:defRPr sz="850">
+                <a:solidFill>
+                  <a:srgbClr val="475569"/>
+                </a:solidFill>
+              </a:defRPr>
+            </a:pPr>
+            <a:r>
+              <a:t>• Posología: 1250 mg cada 8 horas (Perfusión 2h extendida)</a:t>
+            </a:r>
+            <a:br/>
+            <a:r>
+              <a:t>• Exposición: AUC24: 512 mg·h/L (EN META TERAPÉUTICA 400-600)</a:t>
+            </a:r>
+            <a:br/>
+            <a:r>
+              <a:t>• Parámetros: Cvalle: 17.1 µg/mL  ·  PTA objetivo: 96%</a:t>
+            </a:r>
+          </a:p>
+        </p:txBody>
+      </p:sp>
+      <p:sp>
+        <p:nvSpPr>
+          <p:cNvPr id="6" name="TextBox 5"/>
           <p:cNvSpPr txBox="1"/>
           <p:nvPr/>
         </p:nvSpPr>
         <p:spPr>
           <a:xfrm>
-            <a:off x="731520" y="6400800"/>
+            <a:off x="731520" y="6437376"/>
             <a:ext cx="10725912" cy="274320"/>
           </a:xfrm>
           <a:prstGeom prst="rect">
@@ -8984,12 +10979,12 @@
             <a:pPr>
               <a:defRPr sz="850">
                 <a:solidFill>
-                  <a:srgbClr val="94A3B8"/>
-                </a:solidFill>
-              </a:defRPr>
-            </a:pPr>
-            <a:r>
-              <a:t>PK-Bayes · Decision Support System CDSS v3.2                                                Documento Institucional Clínico                                                08 / 14</a:t>
+                  <a:srgbClr val="64748B"/>
+                </a:solidFill>
+              </a:defRPr>
+            </a:pPr>
+            <a:r>
+              <a:t>PK-Bayes · CDSS v3.2 · Soporte a la Decisión Clínica Farmacocinética                       Confidencial · Uso Hospitalario Institucional                       08 / 14</a:t>
             </a:r>
           </a:p>
         </p:txBody>
@@ -9008,7 +11003,7 @@
     <p:bg>
       <p:bgPr>
         <a:solidFill>
-          <a:srgbClr val="F8FAFC"/>
+          <a:srgbClr val="FFFFFF"/>
         </a:solidFill>
         <a:effectLst/>
       </p:bgPr>
@@ -9028,8 +11023,8 @@
         </p:nvSpPr>
         <p:spPr>
           <a:xfrm>
-            <a:off x="731520" y="438912"/>
-            <a:ext cx="5486400" cy="320040"/>
+            <a:off x="731520" y="384048"/>
+            <a:ext cx="6858000" cy="292608"/>
           </a:xfrm>
           <a:prstGeom prst="rect">
             <a:avLst/>
@@ -9043,7 +11038,7 @@
           <a:lstStyle/>
           <a:p>
             <a:pPr>
-              <a:defRPr sz="950" b="1">
+              <a:defRPr sz="900" b="1">
                 <a:solidFill>
                   <a:srgbClr val="0284C7"/>
                 </a:solidFill>
@@ -9063,8 +11058,8 @@
         </p:nvSpPr>
         <p:spPr>
           <a:xfrm>
-            <a:off x="731520" y="713232"/>
-            <a:ext cx="10698480" cy="594360"/>
+            <a:off x="731520" y="676656"/>
+            <a:ext cx="10698480" cy="548640"/>
           </a:xfrm>
           <a:prstGeom prst="rect">
             <a:avLst/>
@@ -9078,14 +11073,14 @@
           <a:lstStyle/>
           <a:p>
             <a:pPr>
-              <a:defRPr sz="2200" b="1">
+              <a:defRPr sz="2100" b="1">
                 <a:solidFill>
                   <a:srgbClr val="0F172A"/>
                 </a:solidFill>
               </a:defRPr>
             </a:pPr>
             <a:r>
-              <a:t>Impacto Clínico Respaldado por Evidencia Científica</a:t>
+              <a:t>Evidencia Clínica de Impacto en Resultados Sanitarios</a:t>
             </a:r>
           </a:p>
         </p:txBody>
@@ -9098,8 +11093,8 @@
         </p:nvSpPr>
         <p:spPr>
           <a:xfrm>
-            <a:off x="731520" y="1298448"/>
-            <a:ext cx="10698480" cy="411480"/>
+            <a:off x="731520" y="1243584"/>
+            <a:ext cx="10698480" cy="384048"/>
           </a:xfrm>
           <a:prstGeom prst="rect">
             <a:avLst/>
@@ -9113,14 +11108,14 @@
           <a:lstStyle/>
           <a:p>
             <a:pPr>
-              <a:defRPr sz="1200">
-                <a:solidFill>
-                  <a:srgbClr val="64748B"/>
-                </a:solidFill>
-              </a:defRPr>
-            </a:pPr>
-            <a:r>
-              <a:t>El monitoreo bayesiano guiado por AUC24 ha demostrado superioridad clínica frente a las técnicas convencionales.</a:t>
+              <a:defRPr sz="1150">
+                <a:solidFill>
+                  <a:srgbClr val="475569"/>
+                </a:solidFill>
+              </a:defRPr>
+            </a:pPr>
+            <a:r>
+              <a:t>Reducción estadísticamente significativa de nefrotoxicidad y aceleración drástica en la consecución de niveles eficaces.</a:t>
             </a:r>
           </a:p>
         </p:txBody>
@@ -9133,14 +11128,14 @@
         </p:nvSpPr>
         <p:spPr>
           <a:xfrm>
-            <a:off x="731520" y="1783080"/>
-            <a:ext cx="2542032" cy="4389120"/>
+            <a:off x="676656" y="1728216"/>
+            <a:ext cx="5596128" cy="4498848"/>
           </a:xfrm>
           <a:prstGeom prst="roundRect">
             <a:avLst/>
           </a:prstGeom>
           <a:solidFill>
-            <a:srgbClr val="FFFFFF"/>
+            <a:srgbClr val="F1F5F9"/>
           </a:solidFill>
           <a:ln w="12700">
             <a:solidFill>
@@ -9163,75 +11158,92 @@
           </a:fontRef>
         </p:style>
         <p:txBody>
-          <a:bodyPr rtlCol="0" anchor="ctr" lIns="228600" tIns="228600" rIns="164592"/>
+          <a:bodyPr rtlCol="0" anchor="ctr"/>
+          <a:lstStyle/>
+          <a:p>
+            <a:pPr algn="ctr"/>
+          </a:p>
+        </p:txBody>
+      </p:sp>
+      <p:pic>
+        <p:nvPicPr>
+          <p:cNvPr id="6" name="Picture 5" descr="clinical_evidence_chart.png"/>
+          <p:cNvPicPr>
+            <a:picLocks noChangeAspect="1"/>
+          </p:cNvPicPr>
+          <p:nvPr/>
+        </p:nvPicPr>
+        <p:blipFill>
+          <a:blip r:embed="rId2"/>
+          <a:stretch>
+            <a:fillRect/>
+          </a:stretch>
+        </p:blipFill>
+        <p:spPr>
+          <a:xfrm>
+            <a:off x="731520" y="1783080"/>
+            <a:ext cx="5486400" cy="4389120"/>
+          </a:xfrm>
+          <a:prstGeom prst="rect">
+            <a:avLst/>
+          </a:prstGeom>
+        </p:spPr>
+      </p:pic>
+      <p:sp>
+        <p:nvSpPr>
+          <p:cNvPr id="7" name="TextBox 6"/>
+          <p:cNvSpPr txBox="1"/>
+          <p:nvPr/>
+        </p:nvSpPr>
+        <p:spPr>
+          <a:xfrm>
+            <a:off x="731520" y="6227064"/>
+            <a:ext cx="5486400" cy="228600"/>
+          </a:xfrm>
+          <a:prstGeom prst="rect">
+            <a:avLst/>
+          </a:prstGeom>
+          <a:noFill/>
+        </p:spPr>
+        <p:txBody>
+          <a:bodyPr wrap="none" lIns="0" tIns="0" rIns="0" bIns="0">
+            <a:spAutoFit/>
+          </a:bodyPr>
           <a:lstStyle/>
           <a:p>
             <a:pPr algn="ctr">
-              <a:defRPr sz="3600" b="1">
-                <a:solidFill>
-                  <a:srgbClr val="059669"/>
-                </a:solidFill>
-              </a:defRPr>
-            </a:pPr>
-            <a:r>
-              <a:t>-50%</a:t>
-            </a:r>
-          </a:p>
-          <a:p>
-            <a:pPr>
-              <a:spcBef>
-                <a:spcPts val="800"/>
-              </a:spcBef>
-              <a:spcAft>
-                <a:spcPts val="1200"/>
-              </a:spcAft>
-              <a:defRPr sz="1300" b="1">
-                <a:solidFill>
-                  <a:srgbClr val="0F172A"/>
-                </a:solidFill>
-              </a:defRPr>
-            </a:pPr>
-            <a:r>
-              <a:t>Reducción de Nefrotoxicidad</a:t>
-            </a:r>
-          </a:p>
-          <a:p>
-            <a:pPr>
-              <a:lnSpc>
-                <a:spcPct val="125000"/>
-              </a:lnSpc>
-              <a:defRPr sz="1050">
+              <a:defRPr sz="800">
                 <a:solidFill>
                   <a:srgbClr val="64748B"/>
                 </a:solidFill>
               </a:defRPr>
             </a:pPr>
             <a:r>
-              <a:t>Disminución del 45% al 60% en la tasa de Lesión Renal Aguda (LRA / AKI) asociada a vancomicina.</a:t>
-            </a:r>
-          </a:p>
-        </p:txBody>
-      </p:sp>
-      <p:sp>
-        <p:nvSpPr>
-          <p:cNvPr id="6" name="Rounded Rectangle 5"/>
+              <a:t>Figura 10: Comparación clínica: Monitorización tradicional de valle vs Dosificación guiada por PK-Bayes.</a:t>
+            </a:r>
+          </a:p>
+        </p:txBody>
+      </p:sp>
+      <p:sp>
+        <p:nvSpPr>
+          <p:cNvPr id="8" name="Rounded Rectangle 7"/>
           <p:cNvSpPr/>
           <p:nvPr/>
         </p:nvSpPr>
         <p:spPr>
           <a:xfrm>
-            <a:off x="3456432" y="1783080"/>
-            <a:ext cx="2542032" cy="4389120"/>
+            <a:off x="6400800" y="1783080"/>
+            <a:ext cx="5059375" cy="1371600"/>
           </a:xfrm>
           <a:prstGeom prst="roundRect">
             <a:avLst/>
           </a:prstGeom>
           <a:solidFill>
-            <a:srgbClr val="FFFFFF"/>
+            <a:srgbClr val="F8FAFC"/>
           </a:solidFill>
           <a:ln w="12700">
             <a:solidFill>
-              <a:srgbClr val="E2E8F0"/>
+              <a:srgbClr val="BBF7D0"/>
             </a:solidFill>
           </a:ln>
         </p:spPr>
@@ -9250,76 +11262,53 @@
           </a:fontRef>
         </p:style>
         <p:txBody>
-          <a:bodyPr rtlCol="0" anchor="ctr" lIns="228600" tIns="228600" rIns="164592"/>
+          <a:bodyPr rtlCol="0" anchor="ctr" lIns="228600" tIns="137160"/>
           <a:lstStyle/>
           <a:p>
             <a:pPr algn="ctr">
-              <a:defRPr sz="3600" b="1">
-                <a:solidFill>
-                  <a:srgbClr val="0284C7"/>
-                </a:solidFill>
-              </a:defRPr>
-            </a:pPr>
-            <a:r>
-              <a:t>&lt; 24h</a:t>
+              <a:defRPr b="1" sz="1150">
+                <a:solidFill>
+                  <a:srgbClr val="059669"/>
+                </a:solidFill>
+              </a:defRPr>
+            </a:pPr>
+            <a:r>
+              <a:t>-50% INCIDENCIA DE NEFROTOXICIDAD (LRA)</a:t>
             </a:r>
           </a:p>
           <a:p>
             <a:pPr>
-              <a:spcBef>
-                <a:spcPts val="800"/>
-              </a:spcBef>
-              <a:spcAft>
-                <a:spcPts val="1200"/>
-              </a:spcAft>
-              <a:defRPr sz="1300" b="1">
-                <a:solidFill>
-                  <a:srgbClr val="0F172A"/>
-                </a:solidFill>
-              </a:defRPr>
-            </a:pPr>
-            <a:r>
-              <a:t>Tiempo a Rango Óptimo</a:t>
-            </a:r>
-          </a:p>
-          <a:p>
-            <a:pPr>
-              <a:lnSpc>
-                <a:spcPct val="125000"/>
-              </a:lnSpc>
-              <a:defRPr sz="1050">
-                <a:solidFill>
-                  <a:srgbClr val="64748B"/>
-                </a:solidFill>
-              </a:defRPr>
-            </a:pPr>
-            <a:r>
-              <a:t>Alcance de la ventana terapéutica diana en la primera jornada, frente a 48–72h con métodos tradicionales.</a:t>
-            </a:r>
-          </a:p>
-        </p:txBody>
-      </p:sp>
-      <p:sp>
-        <p:nvSpPr>
-          <p:cNvPr id="7" name="Rounded Rectangle 6"/>
+              <a:defRPr sz="900">
+                <a:solidFill>
+                  <a:srgbClr val="475569"/>
+                </a:solidFill>
+              </a:defRPr>
+            </a:pPr>
+            <a:r>
+              <a:t>La optimización del AUC24 evita la exposición innecesaria a concentraciones acumulativas tóxicas, preservando la función renal del paciente crítico.</a:t>
+            </a:r>
+          </a:p>
+        </p:txBody>
+      </p:sp>
+      <p:sp>
+        <p:nvSpPr>
+          <p:cNvPr id="9" name="Rounded Rectangle 8"/>
           <p:cNvSpPr/>
           <p:nvPr/>
         </p:nvSpPr>
         <p:spPr>
           <a:xfrm>
-            <a:off x="6181344" y="1783080"/>
-            <a:ext cx="2542032" cy="4389120"/>
+            <a:off x="6473952" y="1892808"/>
+            <a:ext cx="54864" cy="1152144"/>
           </a:xfrm>
           <a:prstGeom prst="roundRect">
             <a:avLst/>
           </a:prstGeom>
           <a:solidFill>
-            <a:srgbClr val="FFFFFF"/>
+            <a:srgbClr val="059669"/>
           </a:solidFill>
-          <a:ln w="12700">
-            <a:solidFill>
-              <a:srgbClr val="E2E8F0"/>
-            </a:solidFill>
+          <a:ln>
+            <a:noFill/>
           </a:ln>
         </p:spPr>
         <p:style>
@@ -9337,75 +11326,33 @@
           </a:fontRef>
         </p:style>
         <p:txBody>
-          <a:bodyPr rtlCol="0" anchor="ctr" lIns="228600" tIns="228600" rIns="164592"/>
-          <a:lstStyle/>
-          <a:p>
-            <a:pPr algn="ctr">
-              <a:defRPr sz="3600" b="1">
-                <a:solidFill>
-                  <a:srgbClr val="D97706"/>
-                </a:solidFill>
-              </a:defRPr>
-            </a:pPr>
-            <a:r>
-              <a:t>+92%</a:t>
-            </a:r>
-          </a:p>
-          <a:p>
-            <a:pPr>
-              <a:spcBef>
-                <a:spcPts val="800"/>
-              </a:spcBef>
-              <a:spcAft>
-                <a:spcPts val="1200"/>
-              </a:spcAft>
-              <a:defRPr sz="1300" b="1">
-                <a:solidFill>
-                  <a:srgbClr val="0F172A"/>
-                </a:solidFill>
-              </a:defRPr>
-            </a:pPr>
-            <a:r>
-              <a:t>Probabilidad en Diana (PTA)</a:t>
-            </a:r>
-          </a:p>
-          <a:p>
-            <a:pPr>
-              <a:lnSpc>
-                <a:spcPct val="125000"/>
-              </a:lnSpc>
-              <a:defRPr sz="1050">
-                <a:solidFill>
-                  <a:srgbClr val="64748B"/>
-                </a:solidFill>
-              </a:defRPr>
-            </a:pPr>
-            <a:r>
-              <a:t>Porcentaje de pacientes que mantienen una exposición óptima durante las primeras 72 horas críticas.</a:t>
-            </a:r>
-          </a:p>
-        </p:txBody>
-      </p:sp>
-      <p:sp>
-        <p:nvSpPr>
-          <p:cNvPr id="8" name="Rounded Rectangle 7"/>
+          <a:bodyPr rtlCol="0" anchor="ctr"/>
+          <a:lstStyle/>
+          <a:p>
+            <a:pPr algn="ctr"/>
+          </a:p>
+        </p:txBody>
+      </p:sp>
+      <p:sp>
+        <p:nvSpPr>
+          <p:cNvPr id="10" name="Rounded Rectangle 9"/>
           <p:cNvSpPr/>
           <p:nvPr/>
         </p:nvSpPr>
         <p:spPr>
           <a:xfrm>
-            <a:off x="8906256" y="1783080"/>
-            <a:ext cx="2542032" cy="4389120"/>
+            <a:off x="6400800" y="3291840"/>
+            <a:ext cx="5059375" cy="1371600"/>
           </a:xfrm>
           <a:prstGeom prst="roundRect">
             <a:avLst/>
           </a:prstGeom>
           <a:solidFill>
-            <a:srgbClr val="FFFFFF"/>
+            <a:srgbClr val="F8FAFC"/>
           </a:solidFill>
           <a:ln w="12700">
             <a:solidFill>
-              <a:srgbClr val="E2E8F0"/>
+              <a:srgbClr val="BAE6FD"/>
             </a:solidFill>
           </a:ln>
         </p:spPr>
@@ -9424,64 +11371,195 @@
           </a:fontRef>
         </p:style>
         <p:txBody>
-          <a:bodyPr rtlCol="0" anchor="ctr" lIns="228600" tIns="228600" rIns="164592"/>
+          <a:bodyPr rtlCol="0" anchor="ctr" lIns="228600" tIns="137160"/>
           <a:lstStyle/>
           <a:p>
             <a:pPr algn="ctr">
-              <a:defRPr sz="3600" b="1">
-                <a:solidFill>
-                  <a:srgbClr val="6366F1"/>
-                </a:solidFill>
-              </a:defRPr>
-            </a:pPr>
-            <a:r>
-              <a:t>-1.8 d</a:t>
+              <a:defRPr b="1" sz="1150">
+                <a:solidFill>
+                  <a:srgbClr val="0284C7"/>
+                </a:solidFill>
+              </a:defRPr>
+            </a:pPr>
+            <a:r>
+              <a:t>&gt; 92% PACIENTES EN META A LAS 24 HORAS</a:t>
             </a:r>
           </a:p>
           <a:p>
             <a:pPr>
-              <a:spcBef>
-                <a:spcPts val="800"/>
-              </a:spcBef>
-              <a:spcAft>
-                <a:spcPts val="1200"/>
-              </a:spcAft>
-              <a:defRPr sz="1300" b="1">
-                <a:solidFill>
-                  <a:srgbClr val="0F172A"/>
-                </a:solidFill>
-              </a:defRPr>
-            </a:pPr>
-            <a:r>
-              <a:t>Estancia en UCI</a:t>
+              <a:defRPr sz="900">
+                <a:solidFill>
+                  <a:srgbClr val="475569"/>
+                </a:solidFill>
+              </a:defRPr>
+            </a:pPr>
+            <a:r>
+              <a:t>Frente a menos del 46% con protocolos empíricos. Alcanzar la diana terapéutica precozmente es el factor determinante en supervivencia séptica.</a:t>
+            </a:r>
+          </a:p>
+        </p:txBody>
+      </p:sp>
+      <p:sp>
+        <p:nvSpPr>
+          <p:cNvPr id="11" name="Rounded Rectangle 10"/>
+          <p:cNvSpPr/>
+          <p:nvPr/>
+        </p:nvSpPr>
+        <p:spPr>
+          <a:xfrm>
+            <a:off x="6473952" y="3401568"/>
+            <a:ext cx="54864" cy="1152144"/>
+          </a:xfrm>
+          <a:prstGeom prst="roundRect">
+            <a:avLst/>
+          </a:prstGeom>
+          <a:solidFill>
+            <a:srgbClr val="0284C7"/>
+          </a:solidFill>
+          <a:ln>
+            <a:noFill/>
+          </a:ln>
+        </p:spPr>
+        <p:style>
+          <a:lnRef idx="1">
+            <a:schemeClr val="accent1"/>
+          </a:lnRef>
+          <a:fillRef idx="3">
+            <a:schemeClr val="accent1"/>
+          </a:fillRef>
+          <a:effectRef idx="2">
+            <a:schemeClr val="accent1"/>
+          </a:effectRef>
+          <a:fontRef idx="minor">
+            <a:schemeClr val="lt1"/>
+          </a:fontRef>
+        </p:style>
+        <p:txBody>
+          <a:bodyPr rtlCol="0" anchor="ctr"/>
+          <a:lstStyle/>
+          <a:p>
+            <a:pPr algn="ctr"/>
+          </a:p>
+        </p:txBody>
+      </p:sp>
+      <p:sp>
+        <p:nvSpPr>
+          <p:cNvPr id="12" name="Rounded Rectangle 11"/>
+          <p:cNvSpPr/>
+          <p:nvPr/>
+        </p:nvSpPr>
+        <p:spPr>
+          <a:xfrm>
+            <a:off x="6400800" y="4800600"/>
+            <a:ext cx="5059375" cy="1371600"/>
+          </a:xfrm>
+          <a:prstGeom prst="roundRect">
+            <a:avLst/>
+          </a:prstGeom>
+          <a:solidFill>
+            <a:srgbClr val="F8FAFC"/>
+          </a:solidFill>
+          <a:ln w="12700">
+            <a:solidFill>
+              <a:srgbClr val="DDD6FE"/>
+            </a:solidFill>
+          </a:ln>
+        </p:spPr>
+        <p:style>
+          <a:lnRef idx="1">
+            <a:schemeClr val="accent1"/>
+          </a:lnRef>
+          <a:fillRef idx="3">
+            <a:schemeClr val="accent1"/>
+          </a:fillRef>
+          <a:effectRef idx="2">
+            <a:schemeClr val="accent1"/>
+          </a:effectRef>
+          <a:fontRef idx="minor">
+            <a:schemeClr val="lt1"/>
+          </a:fontRef>
+        </p:style>
+        <p:txBody>
+          <a:bodyPr rtlCol="0" anchor="ctr" lIns="228600" tIns="137160"/>
+          <a:lstStyle/>
+          <a:p>
+            <a:pPr algn="ctr">
+              <a:defRPr b="1" sz="1150">
+                <a:solidFill>
+                  <a:srgbClr val="7C3AED"/>
+                </a:solidFill>
+              </a:defRPr>
+            </a:pPr>
+            <a:r>
+              <a:t>-1.8 DÍAS DE ESTANCIA HOSPITALARIA EN UCI</a:t>
             </a:r>
           </a:p>
           <a:p>
             <a:pPr>
-              <a:lnSpc>
-                <a:spcPct val="125000"/>
-              </a:lnSpc>
-              <a:defRPr sz="1050">
-                <a:solidFill>
-                  <a:srgbClr val="64748B"/>
-                </a:solidFill>
-              </a:defRPr>
-            </a:pPr>
-            <a:r>
-              <a:t>Reducción promedio de días de hospitalización en camas críticas para pacientes sépticos complejos.</a:t>
-            </a:r>
-          </a:p>
-        </p:txBody>
-      </p:sp>
-      <p:sp>
-        <p:nvSpPr>
-          <p:cNvPr id="9" name="TextBox 8"/>
+              <a:defRPr sz="900">
+                <a:solidFill>
+                  <a:srgbClr val="475569"/>
+                </a:solidFill>
+              </a:defRPr>
+            </a:pPr>
+            <a:r>
+              <a:t>Disminución directa de complicaciones iatrogénicas, días de ventilación mecánica y necesidad de técnicas dialíticas de rescate.</a:t>
+            </a:r>
+          </a:p>
+        </p:txBody>
+      </p:sp>
+      <p:sp>
+        <p:nvSpPr>
+          <p:cNvPr id="13" name="Rounded Rectangle 12"/>
+          <p:cNvSpPr/>
+          <p:nvPr/>
+        </p:nvSpPr>
+        <p:spPr>
+          <a:xfrm>
+            <a:off x="6473952" y="4910328"/>
+            <a:ext cx="54864" cy="1152144"/>
+          </a:xfrm>
+          <a:prstGeom prst="roundRect">
+            <a:avLst/>
+          </a:prstGeom>
+          <a:solidFill>
+            <a:srgbClr val="7C3AED"/>
+          </a:solidFill>
+          <a:ln>
+            <a:noFill/>
+          </a:ln>
+        </p:spPr>
+        <p:style>
+          <a:lnRef idx="1">
+            <a:schemeClr val="accent1"/>
+          </a:lnRef>
+          <a:fillRef idx="3">
+            <a:schemeClr val="accent1"/>
+          </a:fillRef>
+          <a:effectRef idx="2">
+            <a:schemeClr val="accent1"/>
+          </a:effectRef>
+          <a:fontRef idx="minor">
+            <a:schemeClr val="lt1"/>
+          </a:fontRef>
+        </p:style>
+        <p:txBody>
+          <a:bodyPr rtlCol="0" anchor="ctr"/>
+          <a:lstStyle/>
+          <a:p>
+            <a:pPr algn="ctr"/>
+          </a:p>
+        </p:txBody>
+      </p:sp>
+      <p:sp>
+        <p:nvSpPr>
+          <p:cNvPr id="14" name="TextBox 13"/>
           <p:cNvSpPr txBox="1"/>
           <p:nvPr/>
         </p:nvSpPr>
         <p:spPr>
           <a:xfrm>
-            <a:off x="731520" y="6400800"/>
+            <a:off x="731520" y="6437376"/>
             <a:ext cx="10725912" cy="274320"/>
           </a:xfrm>
           <a:prstGeom prst="rect">
@@ -9498,12 +11576,12 @@
             <a:pPr>
               <a:defRPr sz="850">
                 <a:solidFill>
-                  <a:srgbClr val="94A3B8"/>
-                </a:solidFill>
-              </a:defRPr>
-            </a:pPr>
-            <a:r>
-              <a:t>PK-Bayes · Decision Support System CDSS v3.2                                                Documento Institucional Clínico                                                09 / 14</a:t>
+                  <a:srgbClr val="64748B"/>
+                </a:solidFill>
+              </a:defRPr>
+            </a:pPr>
+            <a:r>
+              <a:t>PK-Bayes · CDSS v3.2 · Soporte a la Decisión Clínica Farmacocinética                       Confidencial · Uso Hospitalario Institucional                       09 / 14</a:t>
             </a:r>
           </a:p>
         </p:txBody>
@@ -9834,4 +11912,324 @@
   </a:objectDefaults>
   <a:extraClrSchemeLst/>
 </a:theme>
+</file>
+
+<file path=ppt/theme/theme2.xml><?xml version="1.0" encoding="utf-8"?>
+<a:theme xmlns:a="http://schemas.openxmlformats.org/drawingml/2006/main" name="Office Theme">
+  <a:themeElements>
+    <a:clrScheme name="Office">
+      <a:dk1>
+        <a:sysClr val="windowText" lastClr="000000"/>
+      </a:dk1>
+      <a:lt1>
+        <a:sysClr val="window" lastClr="FFFFFF"/>
+      </a:lt1>
+      <a:dk2>
+        <a:srgbClr val="1F497D"/>
+      </a:dk2>
+      <a:lt2>
+        <a:srgbClr val="EEECE1"/>
+      </a:lt2>
+      <a:accent1>
+        <a:srgbClr val="4F81BD"/>
+      </a:accent1>
+      <a:accent2>
+        <a:srgbClr val="C0504D"/>
+      </a:accent2>
+      <a:accent3>
+        <a:srgbClr val="9BBB59"/>
+      </a:accent3>
+      <a:accent4>
+        <a:srgbClr val="8064A2"/>
+      </a:accent4>
+      <a:accent5>
+        <a:srgbClr val="4BACC6"/>
+      </a:accent5>
+      <a:accent6>
+        <a:srgbClr val="F79646"/>
+      </a:accent6>
+      <a:hlink>
+        <a:srgbClr val="0000FF"/>
+      </a:hlink>
+      <a:folHlink>
+        <a:srgbClr val="800080"/>
+      </a:folHlink>
+    </a:clrScheme>
+    <a:fontScheme name="Office">
+      <a:majorFont>
+        <a:latin typeface="Calibri"/>
+        <a:ea typeface=""/>
+        <a:cs typeface=""/>
+        <a:font script="Jpan" typeface="ＭＳ Ｐゴシック"/>
+        <a:font script="Hang" typeface="맑은 고딕"/>
+        <a:font script="Hans" typeface="宋体"/>
+        <a:font script="Hant" typeface="新細明體"/>
+        <a:font script="Arab" typeface="Times New Roman"/>
+        <a:font script="Hebr" typeface="Times New Roman"/>
+        <a:font script="Thai" typeface="Angsana New"/>
+        <a:font script="Ethi" typeface="Nyala"/>
+        <a:font script="Beng" typeface="Vrinda"/>
+        <a:font script="Gujr" typeface="Shruti"/>
+        <a:font script="Khmr" typeface="MoolBoran"/>
+        <a:font script="Knda" typeface="Tunga"/>
+        <a:font script="Guru" typeface="Raavi"/>
+        <a:font script="Cans" typeface="Euphemia"/>
+        <a:font script="Cher" typeface="Plantagenet Cherokee"/>
+        <a:font script="Yiii" typeface="Microsoft Yi Baiti"/>
+        <a:font script="Tibt" typeface="Microsoft Himalaya"/>
+        <a:font script="Thaa" typeface="MV Boli"/>
+        <a:font script="Deva" typeface="Mangal"/>
+        <a:font script="Telu" typeface="Gautami"/>
+        <a:font script="Taml" typeface="Latha"/>
+        <a:font script="Syrc" typeface="Estrangelo Edessa"/>
+        <a:font script="Orya" typeface="Kalinga"/>
+        <a:font script="Mlym" typeface="Kartika"/>
+        <a:font script="Laoo" typeface="DokChampa"/>
+        <a:font script="Sinh" typeface="Iskoola Pota"/>
+        <a:font script="Mong" typeface="Mongolian Baiti"/>
+        <a:font script="Viet" typeface="Times New Roman"/>
+        <a:font script="Uigh" typeface="Microsoft Uighur"/>
+        <a:font script="Geor" typeface="Sylfaen"/>
+      </a:majorFont>
+      <a:minorFont>
+        <a:latin typeface="Calibri"/>
+        <a:ea typeface=""/>
+        <a:cs typeface=""/>
+        <a:font script="Jpan" typeface="ＭＳ Ｐゴシック"/>
+        <a:font script="Hang" typeface="맑은 고딕"/>
+        <a:font script="Hans" typeface="宋体"/>
+        <a:font script="Hant" typeface="新細明體"/>
+        <a:font script="Arab" typeface="Arial"/>
+        <a:font script="Hebr" typeface="Arial"/>
+        <a:font script="Thai" typeface="Cordia New"/>
+        <a:font script="Ethi" typeface="Nyala"/>
+        <a:font script="Beng" typeface="Vrinda"/>
+        <a:font script="Gujr" typeface="Shruti"/>
+        <a:font script="Khmr" typeface="DaunPenh"/>
+        <a:font script="Knda" typeface="Tunga"/>
+        <a:font script="Guru" typeface="Raavi"/>
+        <a:font script="Cans" typeface="Euphemia"/>
+        <a:font script="Cher" typeface="Plantagenet Cherokee"/>
+        <a:font script="Yiii" typeface="Microsoft Yi Baiti"/>
+        <a:font script="Tibt" typeface="Microsoft Himalaya"/>
+        <a:font script="Thaa" typeface="MV Boli"/>
+        <a:font script="Deva" typeface="Mangal"/>
+        <a:font script="Telu" typeface="Gautami"/>
+        <a:font script="Taml" typeface="Latha"/>
+        <a:font script="Syrc" typeface="Estrangelo Edessa"/>
+        <a:font script="Orya" typeface="Kalinga"/>
+        <a:font script="Mlym" typeface="Kartika"/>
+        <a:font script="Laoo" typeface="DokChampa"/>
+        <a:font script="Sinh" typeface="Iskoola Pota"/>
+        <a:font script="Mong" typeface="Mongolian Baiti"/>
+        <a:font script="Viet" typeface="Arial"/>
+        <a:font script="Uigh" typeface="Microsoft Uighur"/>
+        <a:font script="Geor" typeface="Sylfaen"/>
+      </a:minorFont>
+    </a:fontScheme>
+    <a:fmtScheme name="Office">
+      <a:fillStyleLst>
+        <a:solidFill>
+          <a:schemeClr val="phClr"/>
+        </a:solidFill>
+        <a:gradFill rotWithShape="1">
+          <a:gsLst>
+            <a:gs pos="0">
+              <a:schemeClr val="phClr">
+                <a:tint val="50000"/>
+                <a:satMod val="300000"/>
+              </a:schemeClr>
+            </a:gs>
+            <a:gs pos="35000">
+              <a:schemeClr val="phClr">
+                <a:tint val="37000"/>
+                <a:satMod val="300000"/>
+              </a:schemeClr>
+            </a:gs>
+            <a:gs pos="100000">
+              <a:schemeClr val="phClr">
+                <a:tint val="15000"/>
+                <a:satMod val="350000"/>
+              </a:schemeClr>
+            </a:gs>
+          </a:gsLst>
+          <a:lin ang="16200000" scaled="1"/>
+        </a:gradFill>
+        <a:gradFill rotWithShape="1">
+          <a:gsLst>
+            <a:gs pos="0">
+              <a:schemeClr val="phClr">
+                <a:tint val="100000"/>
+                <a:shade val="100000"/>
+                <a:satMod val="130000"/>
+              </a:schemeClr>
+            </a:gs>
+            <a:gs pos="100000">
+              <a:schemeClr val="phClr">
+                <a:tint val="50000"/>
+                <a:shade val="100000"/>
+                <a:satMod val="350000"/>
+              </a:schemeClr>
+            </a:gs>
+          </a:gsLst>
+          <a:lin ang="16200000" scaled="0"/>
+        </a:gradFill>
+      </a:fillStyleLst>
+      <a:lnStyleLst>
+        <a:ln w="9525" cap="flat" cmpd="sng" algn="ctr">
+          <a:solidFill>
+            <a:schemeClr val="phClr">
+              <a:shade val="95000"/>
+              <a:satMod val="105000"/>
+            </a:schemeClr>
+          </a:solidFill>
+          <a:prstDash val="solid"/>
+        </a:ln>
+        <a:ln w="25400" cap="flat" cmpd="sng" algn="ctr">
+          <a:solidFill>
+            <a:schemeClr val="phClr"/>
+          </a:solidFill>
+          <a:prstDash val="solid"/>
+        </a:ln>
+        <a:ln w="38100" cap="flat" cmpd="sng" algn="ctr">
+          <a:solidFill>
+            <a:schemeClr val="phClr"/>
+          </a:solidFill>
+          <a:prstDash val="solid"/>
+        </a:ln>
+      </a:lnStyleLst>
+      <a:effectStyleLst>
+        <a:effectStyle>
+          <a:effectLst>
+            <a:outerShdw blurRad="40000" dist="20000" dir="5400000" rotWithShape="0">
+              <a:srgbClr val="000000">
+                <a:alpha val="38000"/>
+              </a:srgbClr>
+            </a:outerShdw>
+          </a:effectLst>
+        </a:effectStyle>
+        <a:effectStyle>
+          <a:effectLst>
+            <a:outerShdw blurRad="40000" dist="23000" dir="5400000" rotWithShape="0">
+              <a:srgbClr val="000000">
+                <a:alpha val="35000"/>
+              </a:srgbClr>
+            </a:outerShdw>
+          </a:effectLst>
+        </a:effectStyle>
+        <a:effectStyle>
+          <a:effectLst>
+            <a:outerShdw blurRad="40000" dist="23000" dir="5400000" rotWithShape="0">
+              <a:srgbClr val="000000">
+                <a:alpha val="35000"/>
+              </a:srgbClr>
+            </a:outerShdw>
+          </a:effectLst>
+          <a:scene3d>
+            <a:camera prst="orthographicFront">
+              <a:rot lat="0" lon="0" rev="0"/>
+            </a:camera>
+            <a:lightRig rig="threePt" dir="t">
+              <a:rot lat="0" lon="0" rev="1200000"/>
+            </a:lightRig>
+          </a:scene3d>
+          <a:sp3d>
+            <a:bevelT w="63500" h="25400"/>
+          </a:sp3d>
+        </a:effectStyle>
+      </a:effectStyleLst>
+      <a:bgFillStyleLst>
+        <a:solidFill>
+          <a:schemeClr val="phClr"/>
+        </a:solidFill>
+        <a:gradFill rotWithShape="1">
+          <a:gsLst>
+            <a:gs pos="0">
+              <a:schemeClr val="phClr">
+                <a:tint val="40000"/>
+                <a:satMod val="350000"/>
+              </a:schemeClr>
+            </a:gs>
+            <a:gs pos="40000">
+              <a:schemeClr val="phClr">
+                <a:tint val="45000"/>
+                <a:shade val="99000"/>
+                <a:satMod val="350000"/>
+              </a:schemeClr>
+            </a:gs>
+            <a:gs pos="100000">
+              <a:schemeClr val="phClr">
+                <a:shade val="20000"/>
+                <a:satMod val="255000"/>
+              </a:schemeClr>
+            </a:gs>
+          </a:gsLst>
+          <a:path path="circle">
+            <a:fillToRect l="50000" t="-80000" r="50000" b="180000"/>
+          </a:path>
+        </a:gradFill>
+        <a:gradFill rotWithShape="1">
+          <a:gsLst>
+            <a:gs pos="0">
+              <a:schemeClr val="phClr">
+                <a:tint val="80000"/>
+                <a:satMod val="300000"/>
+              </a:schemeClr>
+            </a:gs>
+            <a:gs pos="100000">
+              <a:schemeClr val="phClr">
+                <a:shade val="30000"/>
+                <a:satMod val="200000"/>
+              </a:schemeClr>
+            </a:gs>
+          </a:gsLst>
+          <a:path path="circle">
+            <a:fillToRect l="50000" t="50000" r="50000" b="50000"/>
+          </a:path>
+        </a:gradFill>
+      </a:bgFillStyleLst>
+    </a:fmtScheme>
+  </a:themeElements>
+  <a:objectDefaults>
+    <a:spDef>
+      <a:spPr/>
+      <a:bodyPr/>
+      <a:lstStyle/>
+      <a:style>
+        <a:lnRef idx="1">
+          <a:schemeClr val="accent1"/>
+        </a:lnRef>
+        <a:fillRef idx="3">
+          <a:schemeClr val="accent1"/>
+        </a:fillRef>
+        <a:effectRef idx="2">
+          <a:schemeClr val="accent1"/>
+        </a:effectRef>
+        <a:fontRef idx="minor">
+          <a:schemeClr val="lt1"/>
+        </a:fontRef>
+      </a:style>
+    </a:spDef>
+    <a:lnDef>
+      <a:spPr/>
+      <a:bodyPr/>
+      <a:lstStyle/>
+      <a:style>
+        <a:lnRef idx="2">
+          <a:schemeClr val="accent1"/>
+        </a:lnRef>
+        <a:fillRef idx="0">
+          <a:schemeClr val="accent1"/>
+        </a:fillRef>
+        <a:effectRef idx="1">
+          <a:schemeClr val="accent1"/>
+        </a:effectRef>
+        <a:fontRef idx="minor">
+          <a:schemeClr val="tx1"/>
+        </a:fontRef>
+      </a:style>
+    </a:lnDef>
+  </a:objectDefaults>
+  <a:extraClrSchemeLst/>
+</a:theme>
 </file>